--- a/课件/题集刷题导航/第5章-数组和广义表/第5章-数组和广义表.pptx
+++ b/课件/题集刷题导航/第5章-数组和广义表/第5章-数组和广义表.pptx
@@ -1,26 +1,26 @@
 
 <file path=ppt/presentation.xml><?xml version="1.0" encoding="utf-8"?>
-<p:presentation xmlns:a="http://schemas.openxmlformats.org/drawingml/2006/main" xmlns:r="http://schemas.openxmlformats.org/officeDocument/2006/relationships" xmlns:p="http://schemas.openxmlformats.org/presentationml/2006/main" saveSubsetFonts="1" autoCompressPictures="0">
+<p:presentation xmlns:a="http://schemas.openxmlformats.org/drawingml/2006/main" xmlns:r="http://schemas.openxmlformats.org/officeDocument/2006/relationships" xmlns:p="http://schemas.openxmlformats.org/presentationml/2006/main" autoCompressPictures="0">
   <p:sldMasterIdLst>
     <p:sldMasterId id="2147483648" r:id="rId1"/>
   </p:sldMasterIdLst>
+  <p:notesMasterIdLst>
+    <p:notesMasterId r:id="rId4"/>
+  </p:notesMasterIdLst>
   <p:sldIdLst>
-    <p:sldId id="256" r:id="rId2"/>
-    <p:sldId id="257" r:id="rId3"/>
-    <p:sldId id="258" r:id="rId4"/>
-    <p:sldId id="259" r:id="rId5"/>
-    <p:sldId id="260" r:id="rId6"/>
-    <p:sldId id="261" r:id="rId7"/>
-    <p:sldId id="262" r:id="rId8"/>
-    <p:sldId id="263" r:id="rId9"/>
-    <p:sldId id="264" r:id="rId10"/>
-    <p:sldId id="265" r:id="rId11"/>
+    <p:sldId id="256" r:id="rId3"/>
+    <p:sldId id="257" r:id="rId5"/>
+    <p:sldId id="258" r:id="rId6"/>
+    <p:sldId id="259" r:id="rId7"/>
+    <p:sldId id="260" r:id="rId8"/>
+    <p:sldId id="261" r:id="rId9"/>
+    <p:sldId id="263" r:id="rId10"/>
+    <p:sldId id="264" r:id="rId11"/>
+    <p:sldId id="262" r:id="rId12"/>
+    <p:sldId id="265" r:id="rId13"/>
   </p:sldIdLst>
-  <p:notesMasterIdLst>
-    <p:notesMasterId r:id="rId12"/>
-  </p:notesMasterIdLst>
-  <p:sldSz cx="12191695" cy="6858000"/>
-  <p:notesSz cx="6858000" cy="12191695"/>
+  <p:sldSz cx="12191365" cy="6858000"/>
+  <p:notesSz cx="6858000" cy="12191365"/>
   <p:defaultTextStyle>
     <a:lvl1pPr marL="0" algn="l" defTabSz="914400" rtl="0" eaLnBrk="1" latinLnBrk="0" hangingPunct="1">
       <a:defRPr sz="1800" kern="1200">
@@ -198,7 +198,6 @@
           <a:p>
             <a:fld id="{5282F153-3F37-0F45-9E97-73ACFA13230C}" type="datetimeFigureOut">
               <a:rPr lang="en-US"/>
-              <a:t>7/23/19</a:t>
             </a:fld>
             <a:endParaRPr lang="en-US"/>
           </a:p>
@@ -265,6 +264,7 @@
               <a:rPr lang="en-US"/>
               <a:t>Click to edit Master text styles</a:t>
             </a:r>
+            <a:endParaRPr lang="en-US"/>
           </a:p>
           <a:p>
             <a:pPr lvl="1"/>
@@ -272,6 +272,7 @@
               <a:rPr lang="en-US"/>
               <a:t>Second level</a:t>
             </a:r>
+            <a:endParaRPr lang="en-US"/>
           </a:p>
           <a:p>
             <a:pPr lvl="2"/>
@@ -279,6 +280,7 @@
               <a:rPr lang="en-US"/>
               <a:t>Third level</a:t>
             </a:r>
+            <a:endParaRPr lang="en-US"/>
           </a:p>
           <a:p>
             <a:pPr lvl="3"/>
@@ -286,6 +288,7 @@
               <a:rPr lang="en-US"/>
               <a:t>Fourth level</a:t>
             </a:r>
+            <a:endParaRPr lang="en-US"/>
           </a:p>
           <a:p>
             <a:pPr lvl="4"/>
@@ -293,6 +296,7 @@
               <a:rPr lang="en-US"/>
               <a:t>Fifth level</a:t>
             </a:r>
+            <a:endParaRPr lang="en-US"/>
           </a:p>
         </p:txBody>
       </p:sp>
@@ -356,18 +360,12 @@
           <a:p>
             <a:fld id="{CE5E9CC1-C706-0F49-92D6-E571CC5EEA8F}" type="slidenum">
               <a:rPr lang="en-US"/>
-              <a:t>‹#›</a:t>
             </a:fld>
             <a:endParaRPr lang="en-US"/>
           </a:p>
         </p:txBody>
       </p:sp>
     </p:spTree>
-    <p:extLst>
-      <p:ext uri="{BB962C8B-B14F-4D97-AF65-F5344CB8AC3E}">
-        <p14:creationId xmlns:p14="http://schemas.microsoft.com/office/powerpoint/2010/main" val="1024086991"/>
-      </p:ext>
-    </p:extLst>
   </p:cSld>
   <p:clrMap bg1="lt1" tx1="dk1" bg2="lt2" tx2="dk2" accent1="accent1" accent2="accent2" accent3="accent3" accent4="accent4" accent5="accent5" accent6="accent6" hlink="hlink" folHlink="folHlink"/>
   <p:notesStyle>
@@ -509,10 +507,6 @@
           <a:bodyPr/>
           <a:lstStyle/>
           <a:p>
-            <a:r>
-              <a:rPr lang="en-US" dirty="0"/>
-              <a:t/>
-            </a:r>
             <a:endParaRPr lang="en-US" dirty="0"/>
           </a:p>
         </p:txBody>
@@ -534,18 +528,12 @@
           <a:p>
             <a:fld id="{F7021451-1387-4CA6-816F-3879F97B5CBC}" type="slidenum">
               <a:rPr lang="en-US"/>
-              <a:t>1</a:t>
             </a:fld>
             <a:endParaRPr lang="en-US"/>
           </a:p>
         </p:txBody>
       </p:sp>
     </p:spTree>
-    <p:extLst>
-      <p:ext uri="{BB962C8B-B14F-4D97-AF65-F5344CB8AC3E}">
-        <p14:creationId xmlns:p14="http://schemas.microsoft.com/office/powerpoint/2010/main" val="1024086991"/>
-      </p:ext>
-    </p:extLst>
   </p:cSld>
   <p:clrMapOvr>
     <a:masterClrMapping/>
@@ -597,10 +585,6 @@
           <a:bodyPr/>
           <a:lstStyle/>
           <a:p>
-            <a:r>
-              <a:rPr lang="en-US" dirty="0"/>
-              <a:t/>
-            </a:r>
             <a:endParaRPr lang="en-US" dirty="0"/>
           </a:p>
         </p:txBody>
@@ -622,18 +606,12 @@
           <a:p>
             <a:fld id="{F7021451-1387-4CA6-816F-3879F97B5CBC}" type="slidenum">
               <a:rPr lang="en-US"/>
-              <a:t>10</a:t>
             </a:fld>
             <a:endParaRPr lang="en-US"/>
           </a:p>
         </p:txBody>
       </p:sp>
     </p:spTree>
-    <p:extLst>
-      <p:ext uri="{BB962C8B-B14F-4D97-AF65-F5344CB8AC3E}">
-        <p14:creationId xmlns:p14="http://schemas.microsoft.com/office/powerpoint/2010/main" val="1024086991"/>
-      </p:ext>
-    </p:extLst>
   </p:cSld>
   <p:clrMapOvr>
     <a:masterClrMapping/>
@@ -685,10 +663,6 @@
           <a:bodyPr/>
           <a:lstStyle/>
           <a:p>
-            <a:r>
-              <a:rPr lang="en-US" dirty="0"/>
-              <a:t/>
-            </a:r>
             <a:endParaRPr lang="en-US" dirty="0"/>
           </a:p>
         </p:txBody>
@@ -710,18 +684,12 @@
           <a:p>
             <a:fld id="{F7021451-1387-4CA6-816F-3879F97B5CBC}" type="slidenum">
               <a:rPr lang="en-US"/>
-              <a:t>2</a:t>
             </a:fld>
             <a:endParaRPr lang="en-US"/>
           </a:p>
         </p:txBody>
       </p:sp>
     </p:spTree>
-    <p:extLst>
-      <p:ext uri="{BB962C8B-B14F-4D97-AF65-F5344CB8AC3E}">
-        <p14:creationId xmlns:p14="http://schemas.microsoft.com/office/powerpoint/2010/main" val="1024086991"/>
-      </p:ext>
-    </p:extLst>
   </p:cSld>
   <p:clrMapOvr>
     <a:masterClrMapping/>
@@ -773,10 +741,6 @@
           <a:bodyPr/>
           <a:lstStyle/>
           <a:p>
-            <a:r>
-              <a:rPr lang="en-US" dirty="0"/>
-              <a:t/>
-            </a:r>
             <a:endParaRPr lang="en-US" dirty="0"/>
           </a:p>
         </p:txBody>
@@ -798,18 +762,12 @@
           <a:p>
             <a:fld id="{F7021451-1387-4CA6-816F-3879F97B5CBC}" type="slidenum">
               <a:rPr lang="en-US"/>
-              <a:t>3</a:t>
             </a:fld>
             <a:endParaRPr lang="en-US"/>
           </a:p>
         </p:txBody>
       </p:sp>
     </p:spTree>
-    <p:extLst>
-      <p:ext uri="{BB962C8B-B14F-4D97-AF65-F5344CB8AC3E}">
-        <p14:creationId xmlns:p14="http://schemas.microsoft.com/office/powerpoint/2010/main" val="1024086991"/>
-      </p:ext>
-    </p:extLst>
   </p:cSld>
   <p:clrMapOvr>
     <a:masterClrMapping/>
@@ -861,10 +819,6 @@
           <a:bodyPr/>
           <a:lstStyle/>
           <a:p>
-            <a:r>
-              <a:rPr lang="en-US" dirty="0"/>
-              <a:t/>
-            </a:r>
             <a:endParaRPr lang="en-US" dirty="0"/>
           </a:p>
         </p:txBody>
@@ -886,18 +840,12 @@
           <a:p>
             <a:fld id="{F7021451-1387-4CA6-816F-3879F97B5CBC}" type="slidenum">
               <a:rPr lang="en-US"/>
-              <a:t>4</a:t>
             </a:fld>
             <a:endParaRPr lang="en-US"/>
           </a:p>
         </p:txBody>
       </p:sp>
     </p:spTree>
-    <p:extLst>
-      <p:ext uri="{BB962C8B-B14F-4D97-AF65-F5344CB8AC3E}">
-        <p14:creationId xmlns:p14="http://schemas.microsoft.com/office/powerpoint/2010/main" val="1024086991"/>
-      </p:ext>
-    </p:extLst>
   </p:cSld>
   <p:clrMapOvr>
     <a:masterClrMapping/>
@@ -949,10 +897,6 @@
           <a:bodyPr/>
           <a:lstStyle/>
           <a:p>
-            <a:r>
-              <a:rPr lang="en-US" dirty="0"/>
-              <a:t/>
-            </a:r>
             <a:endParaRPr lang="en-US" dirty="0"/>
           </a:p>
         </p:txBody>
@@ -974,18 +918,12 @@
           <a:p>
             <a:fld id="{F7021451-1387-4CA6-816F-3879F97B5CBC}" type="slidenum">
               <a:rPr lang="en-US"/>
-              <a:t>5</a:t>
             </a:fld>
             <a:endParaRPr lang="en-US"/>
           </a:p>
         </p:txBody>
       </p:sp>
     </p:spTree>
-    <p:extLst>
-      <p:ext uri="{BB962C8B-B14F-4D97-AF65-F5344CB8AC3E}">
-        <p14:creationId xmlns:p14="http://schemas.microsoft.com/office/powerpoint/2010/main" val="1024086991"/>
-      </p:ext>
-    </p:extLst>
   </p:cSld>
   <p:clrMapOvr>
     <a:masterClrMapping/>
@@ -1037,10 +975,6 @@
           <a:bodyPr/>
           <a:lstStyle/>
           <a:p>
-            <a:r>
-              <a:rPr lang="en-US" dirty="0"/>
-              <a:t/>
-            </a:r>
             <a:endParaRPr lang="en-US" dirty="0"/>
           </a:p>
         </p:txBody>
@@ -1062,18 +996,12 @@
           <a:p>
             <a:fld id="{F7021451-1387-4CA6-816F-3879F97B5CBC}" type="slidenum">
               <a:rPr lang="en-US"/>
-              <a:t>6</a:t>
             </a:fld>
             <a:endParaRPr lang="en-US"/>
           </a:p>
         </p:txBody>
       </p:sp>
     </p:spTree>
-    <p:extLst>
-      <p:ext uri="{BB962C8B-B14F-4D97-AF65-F5344CB8AC3E}">
-        <p14:creationId xmlns:p14="http://schemas.microsoft.com/office/powerpoint/2010/main" val="1024086991"/>
-      </p:ext>
-    </p:extLst>
   </p:cSld>
   <p:clrMapOvr>
     <a:masterClrMapping/>
@@ -1125,10 +1053,6 @@
           <a:bodyPr/>
           <a:lstStyle/>
           <a:p>
-            <a:r>
-              <a:rPr lang="en-US" dirty="0"/>
-              <a:t/>
-            </a:r>
             <a:endParaRPr lang="en-US" dirty="0"/>
           </a:p>
         </p:txBody>
@@ -1150,18 +1074,12 @@
           <a:p>
             <a:fld id="{F7021451-1387-4CA6-816F-3879F97B5CBC}" type="slidenum">
               <a:rPr lang="en-US"/>
-              <a:t>7</a:t>
             </a:fld>
             <a:endParaRPr lang="en-US"/>
           </a:p>
         </p:txBody>
       </p:sp>
     </p:spTree>
-    <p:extLst>
-      <p:ext uri="{BB962C8B-B14F-4D97-AF65-F5344CB8AC3E}">
-        <p14:creationId xmlns:p14="http://schemas.microsoft.com/office/powerpoint/2010/main" val="1024086991"/>
-      </p:ext>
-    </p:extLst>
   </p:cSld>
   <p:clrMapOvr>
     <a:masterClrMapping/>
@@ -1213,10 +1131,6 @@
           <a:bodyPr/>
           <a:lstStyle/>
           <a:p>
-            <a:r>
-              <a:rPr lang="en-US" dirty="0"/>
-              <a:t/>
-            </a:r>
             <a:endParaRPr lang="en-US" dirty="0"/>
           </a:p>
         </p:txBody>
@@ -1238,18 +1152,12 @@
           <a:p>
             <a:fld id="{F7021451-1387-4CA6-816F-3879F97B5CBC}" type="slidenum">
               <a:rPr lang="en-US"/>
-              <a:t>8</a:t>
             </a:fld>
             <a:endParaRPr lang="en-US"/>
           </a:p>
         </p:txBody>
       </p:sp>
     </p:spTree>
-    <p:extLst>
-      <p:ext uri="{BB962C8B-B14F-4D97-AF65-F5344CB8AC3E}">
-        <p14:creationId xmlns:p14="http://schemas.microsoft.com/office/powerpoint/2010/main" val="1024086991"/>
-      </p:ext>
-    </p:extLst>
   </p:cSld>
   <p:clrMapOvr>
     <a:masterClrMapping/>
@@ -1301,10 +1209,6 @@
           <a:bodyPr/>
           <a:lstStyle/>
           <a:p>
-            <a:r>
-              <a:rPr lang="en-US" dirty="0"/>
-              <a:t/>
-            </a:r>
             <a:endParaRPr lang="en-US" dirty="0"/>
           </a:p>
         </p:txBody>
@@ -1326,18 +1230,12 @@
           <a:p>
             <a:fld id="{F7021451-1387-4CA6-816F-3879F97B5CBC}" type="slidenum">
               <a:rPr lang="en-US"/>
-              <a:t>9</a:t>
             </a:fld>
             <a:endParaRPr lang="en-US"/>
           </a:p>
         </p:txBody>
       </p:sp>
     </p:spTree>
-    <p:extLst>
-      <p:ext uri="{BB962C8B-B14F-4D97-AF65-F5344CB8AC3E}">
-        <p14:creationId xmlns:p14="http://schemas.microsoft.com/office/powerpoint/2010/main" val="1024086991"/>
-      </p:ext>
-    </p:extLst>
   </p:cSld>
   <p:clrMapOvr>
     <a:masterClrMapping/>
@@ -1378,6 +1276,11 @@
 <file path=ppt/slideMasters/slideMaster1.xml><?xml version="1.0" encoding="utf-8"?>
 <p:sldMaster xmlns:a="http://schemas.openxmlformats.org/drawingml/2006/main" xmlns:r="http://schemas.openxmlformats.org/officeDocument/2006/relationships" xmlns:p="http://schemas.openxmlformats.org/presentationml/2006/main">
   <p:cSld>
+    <p:bg>
+      <p:bgRef idx="1001">
+        <a:schemeClr val="bg1"/>
+      </p:bgRef>
+    </p:bg>
     <p:spTree>
       <p:nvGrpSpPr>
         <p:cNvPr id="1" name=""/>
@@ -1421,7 +1324,7 @@
         <a:spcBef>
           <a:spcPct val="20000"/>
         </a:spcBef>
-        <a:buFont typeface="Arial" pitchFamily="34" charset="0"/>
+        <a:buFont typeface="Arial" panose="020B0604020202020204" pitchFamily="34" charset="0"/>
         <a:buChar char="•"/>
         <a:defRPr sz="3200" kern="1200">
           <a:solidFill>
@@ -1436,7 +1339,7 @@
         <a:spcBef>
           <a:spcPct val="20000"/>
         </a:spcBef>
-        <a:buFont typeface="Arial" pitchFamily="34" charset="0"/>
+        <a:buFont typeface="Arial" panose="020B0604020202020204" pitchFamily="34" charset="0"/>
         <a:buChar char="–"/>
         <a:defRPr sz="2800" kern="1200">
           <a:solidFill>
@@ -1451,7 +1354,7 @@
         <a:spcBef>
           <a:spcPct val="20000"/>
         </a:spcBef>
-        <a:buFont typeface="Arial" pitchFamily="34" charset="0"/>
+        <a:buFont typeface="Arial" panose="020B0604020202020204" pitchFamily="34" charset="0"/>
         <a:buChar char="•"/>
         <a:defRPr sz="2400" kern="1200">
           <a:solidFill>
@@ -1466,7 +1369,7 @@
         <a:spcBef>
           <a:spcPct val="20000"/>
         </a:spcBef>
-        <a:buFont typeface="Arial" pitchFamily="34" charset="0"/>
+        <a:buFont typeface="Arial" panose="020B0604020202020204" pitchFamily="34" charset="0"/>
         <a:buChar char="–"/>
         <a:defRPr sz="2000" kern="1200">
           <a:solidFill>
@@ -1481,7 +1384,7 @@
         <a:spcBef>
           <a:spcPct val="20000"/>
         </a:spcBef>
-        <a:buFont typeface="Arial" pitchFamily="34" charset="0"/>
+        <a:buFont typeface="Arial" panose="020B0604020202020204" pitchFamily="34" charset="0"/>
         <a:buChar char="»"/>
         <a:defRPr sz="2000" kern="1200">
           <a:solidFill>
@@ -1496,7 +1399,7 @@
         <a:spcBef>
           <a:spcPct val="20000"/>
         </a:spcBef>
-        <a:buFont typeface="Arial" pitchFamily="34" charset="0"/>
+        <a:buFont typeface="Arial" panose="020B0604020202020204" pitchFamily="34" charset="0"/>
         <a:buChar char="•"/>
         <a:defRPr sz="2000" kern="1200">
           <a:solidFill>
@@ -1511,7 +1414,7 @@
         <a:spcBef>
           <a:spcPct val="20000"/>
         </a:spcBef>
-        <a:buFont typeface="Arial" pitchFamily="34" charset="0"/>
+        <a:buFont typeface="Arial" panose="020B0604020202020204" pitchFamily="34" charset="0"/>
         <a:buChar char="•"/>
         <a:defRPr sz="2000" kern="1200">
           <a:solidFill>
@@ -1526,7 +1429,7 @@
         <a:spcBef>
           <a:spcPct val="20000"/>
         </a:spcBef>
-        <a:buFont typeface="Arial" pitchFamily="34" charset="0"/>
+        <a:buFont typeface="Arial" panose="020B0604020202020204" pitchFamily="34" charset="0"/>
         <a:buChar char="•"/>
         <a:defRPr sz="2000" kern="1200">
           <a:solidFill>
@@ -1541,7 +1444,7 @@
         <a:spcBef>
           <a:spcPct val="20000"/>
         </a:spcBef>
-        <a:buFont typeface="Arial" pitchFamily="34" charset="0"/>
+        <a:buFont typeface="Arial" panose="020B0604020202020204" pitchFamily="34" charset="0"/>
         <a:buChar char="•"/>
         <a:defRPr sz="2000" kern="1200">
           <a:solidFill>
@@ -1654,7 +1557,7 @@
 
 <file path=ppt/slides/slide1.xml><?xml version="1.0" encoding="utf-8"?>
 <p:sld xmlns:a="http://schemas.openxmlformats.org/drawingml/2006/main" xmlns:r="http://schemas.openxmlformats.org/officeDocument/2006/relationships" xmlns:p="http://schemas.openxmlformats.org/presentationml/2006/main">
-  <p:cSld name="Slide 1">
+  <p:cSld>
     <p:bg>
       <p:bgPr>
         <a:blipFill dpi="0" rotWithShape="1">
@@ -1698,13 +1601,12 @@
             <a:avLst/>
           </a:prstGeom>
           <a:noFill/>
-          <a:ln/>
         </p:spPr>
         <p:txBody>
           <a:bodyPr wrap="square" rtlCol="0" anchor="ctr"/>
           <a:lstStyle/>
           <a:p>
-            <a:pPr algn="r" indent="0" marL="0">
+            <a:pPr marL="0" indent="0" algn="r">
               <a:buNone/>
             </a:pPr>
             <a:r>
@@ -1712,9 +1614,9 @@
                 <a:solidFill>
                   <a:srgbClr val="8A9099"/>
                 </a:solidFill>
-                <a:latin typeface="微软雅黑" pitchFamily="34" charset="0"/>
-                <a:ea typeface="微软雅黑" pitchFamily="34" charset="-122"/>
-                <a:cs typeface="微软雅黑" pitchFamily="34" charset="-120"/>
+                <a:latin typeface="微软雅黑" panose="020B0503020204020204" pitchFamily="34" charset="-122"/>
+                <a:ea typeface="微软雅黑" panose="020B0503020204020204" pitchFamily="34" charset="-122"/>
+                <a:cs typeface="微软雅黑" panose="020B0503020204020204" pitchFamily="34" charset="-120"/>
               </a:rPr>
               <a:t>1 / 10</a:t>
             </a:r>
@@ -1737,13 +1639,12 @@
             <a:avLst/>
           </a:prstGeom>
           <a:noFill/>
-          <a:ln/>
         </p:spPr>
         <p:txBody>
           <a:bodyPr wrap="square" rtlCol="0" anchor="ctr"/>
           <a:lstStyle/>
           <a:p>
-            <a:pPr algn="ctr" indent="0" marL="0">
+            <a:pPr marL="0" indent="0" algn="ctr">
               <a:buNone/>
             </a:pPr>
             <a:r>
@@ -1751,9 +1652,9 @@
                 <a:solidFill>
                   <a:srgbClr val="1F4E9C"/>
                 </a:solidFill>
-                <a:latin typeface="微软雅黑" pitchFamily="34" charset="0"/>
-                <a:ea typeface="微软雅黑" pitchFamily="34" charset="-122"/>
-                <a:cs typeface="微软雅黑" pitchFamily="34" charset="-120"/>
+                <a:latin typeface="微软雅黑" panose="020B0503020204020204" pitchFamily="34" charset="-122"/>
+                <a:ea typeface="微软雅黑" panose="020B0503020204020204" pitchFamily="34" charset="-122"/>
+                <a:cs typeface="微软雅黑" panose="020B0503020204020204" pitchFamily="34" charset="-120"/>
               </a:rPr>
               <a:t>重邮考研802 数据结构</a:t>
             </a:r>
@@ -1776,13 +1677,12 @@
             <a:avLst/>
           </a:prstGeom>
           <a:noFill/>
-          <a:ln/>
         </p:spPr>
         <p:txBody>
           <a:bodyPr wrap="square" rtlCol="0" anchor="ctr"/>
           <a:lstStyle/>
           <a:p>
-            <a:pPr algn="ctr" indent="0" marL="0">
+            <a:pPr marL="0" indent="0" algn="ctr">
               <a:buNone/>
             </a:pPr>
             <a:r>
@@ -1790,9 +1690,9 @@
                 <a:solidFill>
                   <a:srgbClr val="1F2329"/>
                 </a:solidFill>
-                <a:latin typeface="微软雅黑" pitchFamily="34" charset="0"/>
-                <a:ea typeface="微软雅黑" pitchFamily="34" charset="-122"/>
-                <a:cs typeface="微软雅黑" pitchFamily="34" charset="-120"/>
+                <a:latin typeface="微软雅黑" panose="020B0503020204020204" pitchFamily="34" charset="-122"/>
+                <a:ea typeface="微软雅黑" panose="020B0503020204020204" pitchFamily="34" charset="-122"/>
+                <a:cs typeface="微软雅黑" panose="020B0503020204020204" pitchFamily="34" charset="-120"/>
               </a:rPr>
               <a:t>习题集题目勾画 · 第5章 数组和广义表</a:t>
             </a:r>
@@ -1815,13 +1715,12 @@
             <a:avLst/>
           </a:prstGeom>
           <a:noFill/>
-          <a:ln/>
         </p:spPr>
         <p:txBody>
           <a:bodyPr wrap="square" rtlCol="0" anchor="ctr"/>
           <a:lstStyle/>
           <a:p>
-            <a:pPr algn="ctr" indent="0" marL="0">
+            <a:pPr marL="0" indent="0" algn="ctr">
               <a:buNone/>
             </a:pPr>
             <a:r>
@@ -1829,9 +1728,9 @@
                 <a:solidFill>
                   <a:srgbClr val="1F2329"/>
                 </a:solidFill>
-                <a:latin typeface="微软雅黑" pitchFamily="34" charset="0"/>
-                <a:ea typeface="微软雅黑" pitchFamily="34" charset="-122"/>
-                <a:cs typeface="微软雅黑" pitchFamily="34" charset="-120"/>
+                <a:latin typeface="微软雅黑" panose="020B0503020204020204" pitchFamily="34" charset="-122"/>
+                <a:ea typeface="微软雅黑" panose="020B0503020204020204" pitchFamily="34" charset="-122"/>
+                <a:cs typeface="微软雅黑" panose="020B0503020204020204" pitchFamily="34" charset="-120"/>
               </a:rPr>
               <a:t>严蔚敏《数据结构题集（第2版）》</a:t>
             </a:r>
@@ -1854,13 +1753,12 @@
             <a:avLst/>
           </a:prstGeom>
           <a:noFill/>
-          <a:ln/>
         </p:spPr>
         <p:txBody>
           <a:bodyPr wrap="square" rtlCol="0" anchor="ctr"/>
           <a:lstStyle/>
           <a:p>
-            <a:pPr algn="ctr" indent="0" marL="0">
+            <a:pPr marL="0" indent="0" algn="ctr">
               <a:buNone/>
             </a:pPr>
             <a:r>
@@ -1868,9 +1766,9 @@
                 <a:solidFill>
                   <a:srgbClr val="8A9099"/>
                 </a:solidFill>
-                <a:latin typeface="微软雅黑" pitchFamily="34" charset="0"/>
-                <a:ea typeface="微软雅黑" pitchFamily="34" charset="-122"/>
-                <a:cs typeface="微软雅黑" pitchFamily="34" charset="-120"/>
+                <a:latin typeface="微软雅黑" panose="020B0503020204020204" pitchFamily="34" charset="-122"/>
+                <a:ea typeface="微软雅黑" panose="020B0503020204020204" pitchFamily="34" charset="-122"/>
+                <a:cs typeface="微软雅黑" panose="020B0503020204020204" pitchFamily="34" charset="-120"/>
               </a:rPr>
               <a:t>依据：802考情与2020—2026真题 · 主讲：牙膏学长</a:t>
             </a:r>
@@ -1888,7 +1786,7 @@
 
 <file path=ppt/slides/slide10.xml><?xml version="1.0" encoding="utf-8"?>
 <p:sld xmlns:a="http://schemas.openxmlformats.org/drawingml/2006/main" xmlns:r="http://schemas.openxmlformats.org/officeDocument/2006/relationships" xmlns:p="http://schemas.openxmlformats.org/presentationml/2006/main">
-  <p:cSld name="Slide 10">
+  <p:cSld>
     <p:bg>
       <p:bgPr>
         <a:blipFill dpi="0" rotWithShape="1">
@@ -1932,13 +1830,12 @@
             <a:avLst/>
           </a:prstGeom>
           <a:noFill/>
-          <a:ln/>
         </p:spPr>
         <p:txBody>
           <a:bodyPr wrap="square" rtlCol="0" anchor="ctr"/>
           <a:lstStyle/>
           <a:p>
-            <a:pPr algn="r" indent="0" marL="0">
+            <a:pPr marL="0" indent="0" algn="r">
               <a:buNone/>
             </a:pPr>
             <a:r>
@@ -1946,9 +1843,9 @@
                 <a:solidFill>
                   <a:srgbClr val="8A9099"/>
                 </a:solidFill>
-                <a:latin typeface="微软雅黑" pitchFamily="34" charset="0"/>
-                <a:ea typeface="微软雅黑" pitchFamily="34" charset="-122"/>
-                <a:cs typeface="微软雅黑" pitchFamily="34" charset="-120"/>
+                <a:latin typeface="微软雅黑" panose="020B0503020204020204" pitchFamily="34" charset="-122"/>
+                <a:ea typeface="微软雅黑" panose="020B0503020204020204" pitchFamily="34" charset="-122"/>
+                <a:cs typeface="微软雅黑" panose="020B0503020204020204" pitchFamily="34" charset="-120"/>
               </a:rPr>
               <a:t>10 / 10</a:t>
             </a:r>
@@ -1971,13 +1868,12 @@
             <a:avLst/>
           </a:prstGeom>
           <a:noFill/>
-          <a:ln/>
         </p:spPr>
         <p:txBody>
           <a:bodyPr wrap="square" rtlCol="0" anchor="ctr"/>
           <a:lstStyle/>
           <a:p>
-            <a:pPr algn="l" indent="0" marL="0">
+            <a:pPr marL="0" indent="0" algn="l">
               <a:buNone/>
             </a:pPr>
             <a:r>
@@ -1985,9 +1881,9 @@
                 <a:solidFill>
                   <a:srgbClr val="1F4E9C"/>
                 </a:solidFill>
-                <a:latin typeface="微软雅黑" pitchFamily="34" charset="0"/>
-                <a:ea typeface="微软雅黑" pitchFamily="34" charset="-122"/>
-                <a:cs typeface="微软雅黑" pitchFamily="34" charset="-120"/>
+                <a:latin typeface="微软雅黑" panose="020B0503020204020204" pitchFamily="34" charset="-122"/>
+                <a:ea typeface="微软雅黑" panose="020B0503020204020204" pitchFamily="34" charset="-122"/>
+                <a:cs typeface="微软雅黑" panose="020B0503020204020204" pitchFamily="34" charset="-120"/>
               </a:rPr>
               <a:t>使用建议</a:t>
             </a:r>
@@ -2010,13 +1906,12 @@
             <a:avLst/>
           </a:prstGeom>
           <a:noFill/>
-          <a:ln/>
         </p:spPr>
         <p:txBody>
           <a:bodyPr wrap="square" rtlCol="0" anchor="ctr"/>
           <a:lstStyle/>
           <a:p>
-            <a:pPr algn="l" indent="0" marL="0">
+            <a:pPr marL="0" indent="0" algn="l">
               <a:buNone/>
             </a:pPr>
             <a:r>
@@ -2024,9 +1919,9 @@
                 <a:solidFill>
                   <a:srgbClr val="1F2329"/>
                 </a:solidFill>
-                <a:latin typeface="微软雅黑" pitchFamily="34" charset="0"/>
-                <a:ea typeface="微软雅黑" pitchFamily="34" charset="-122"/>
-                <a:cs typeface="微软雅黑" pitchFamily="34" charset="-120"/>
+                <a:latin typeface="微软雅黑" panose="020B0503020204020204" pitchFamily="34" charset="-122"/>
+                <a:ea typeface="微软雅黑" panose="020B0503020204020204" pitchFamily="34" charset="-122"/>
+                <a:cs typeface="微软雅黑" panose="020B0503020204020204" pitchFamily="34" charset="-120"/>
               </a:rPr>
               <a:t>第5章刷题路线</a:t>
             </a:r>
@@ -2049,13 +1944,12 @@
             <a:avLst/>
           </a:prstGeom>
           <a:noFill/>
-          <a:ln/>
         </p:spPr>
         <p:txBody>
           <a:bodyPr wrap="square" rtlCol="0" anchor="t"/>
           <a:lstStyle/>
           <a:p>
-            <a:pPr algn="l" indent="0" marL="0">
+            <a:pPr marL="0" indent="0" algn="l">
               <a:lnSpc>
                 <a:spcPct val="115000"/>
               </a:lnSpc>
@@ -2066,18 +1960,12 @@
                 <a:solidFill>
                   <a:srgbClr val="1F4E9C"/>
                 </a:solidFill>
-                <a:latin typeface="微软雅黑" pitchFamily="34" charset="0"/>
-                <a:ea typeface="微软雅黑" pitchFamily="34" charset="-122"/>
-                <a:cs typeface="微软雅黑" pitchFamily="34" charset="-120"/>
+                <a:latin typeface="微软雅黑" panose="020B0503020204020204" pitchFamily="34" charset="-122"/>
+                <a:ea typeface="微软雅黑" panose="020B0503020204020204" pitchFamily="34" charset="-122"/>
+                <a:cs typeface="微软雅黑" panose="020B0503020204020204" pitchFamily="34" charset="-120"/>
               </a:rPr>
               <a:t>•  </a:t>
             </a:r>
-            <a:pPr algn="l" indent="0" marL="0">
-              <a:lnSpc>
-                <a:spcPct val="115000"/>
-              </a:lnSpc>
-              <a:buNone/>
-            </a:pPr>
             <a:r>
               <a:rPr lang="en-US" sz="1800" dirty="0">
                 <a:solidFill>
@@ -2105,13 +1993,12 @@
             <a:avLst/>
           </a:prstGeom>
           <a:noFill/>
-          <a:ln/>
         </p:spPr>
         <p:txBody>
           <a:bodyPr wrap="square" rtlCol="0" anchor="t"/>
           <a:lstStyle/>
           <a:p>
-            <a:pPr algn="l" indent="0" marL="0">
+            <a:pPr marL="0" indent="0" algn="l">
               <a:lnSpc>
                 <a:spcPct val="115000"/>
               </a:lnSpc>
@@ -2122,18 +2009,12 @@
                 <a:solidFill>
                   <a:srgbClr val="1F4E9C"/>
                 </a:solidFill>
-                <a:latin typeface="微软雅黑" pitchFamily="34" charset="0"/>
-                <a:ea typeface="微软雅黑" pitchFamily="34" charset="-122"/>
-                <a:cs typeface="微软雅黑" pitchFamily="34" charset="-120"/>
+                <a:latin typeface="微软雅黑" panose="020B0503020204020204" pitchFamily="34" charset="-122"/>
+                <a:ea typeface="微软雅黑" panose="020B0503020204020204" pitchFamily="34" charset="-122"/>
+                <a:cs typeface="微软雅黑" panose="020B0503020204020204" pitchFamily="34" charset="-120"/>
               </a:rPr>
               <a:t>•  </a:t>
             </a:r>
-            <a:pPr algn="l" indent="0" marL="0">
-              <a:lnSpc>
-                <a:spcPct val="115000"/>
-              </a:lnSpc>
-              <a:buNone/>
-            </a:pPr>
             <a:r>
               <a:rPr lang="en-US" sz="1800" dirty="0">
                 <a:solidFill>
@@ -2161,13 +2042,12 @@
             <a:avLst/>
           </a:prstGeom>
           <a:noFill/>
-          <a:ln/>
         </p:spPr>
         <p:txBody>
           <a:bodyPr wrap="square" rtlCol="0" anchor="t"/>
           <a:lstStyle/>
           <a:p>
-            <a:pPr algn="l" indent="0" marL="0">
+            <a:pPr marL="0" indent="0" algn="l">
               <a:lnSpc>
                 <a:spcPct val="115000"/>
               </a:lnSpc>
@@ -2178,18 +2058,12 @@
                 <a:solidFill>
                   <a:srgbClr val="1F4E9C"/>
                 </a:solidFill>
-                <a:latin typeface="微软雅黑" pitchFamily="34" charset="0"/>
-                <a:ea typeface="微软雅黑" pitchFamily="34" charset="-122"/>
-                <a:cs typeface="微软雅黑" pitchFamily="34" charset="-120"/>
+                <a:latin typeface="微软雅黑" panose="020B0503020204020204" pitchFamily="34" charset="-122"/>
+                <a:ea typeface="微软雅黑" panose="020B0503020204020204" pitchFamily="34" charset="-122"/>
+                <a:cs typeface="微软雅黑" panose="020B0503020204020204" pitchFamily="34" charset="-120"/>
               </a:rPr>
               <a:t>•  </a:t>
             </a:r>
-            <a:pPr algn="l" indent="0" marL="0">
-              <a:lnSpc>
-                <a:spcPct val="115000"/>
-              </a:lnSpc>
-              <a:buNone/>
-            </a:pPr>
             <a:r>
               <a:rPr lang="en-US" sz="1800" dirty="0">
                 <a:solidFill>
@@ -2217,13 +2091,12 @@
             <a:avLst/>
           </a:prstGeom>
           <a:noFill/>
-          <a:ln/>
         </p:spPr>
         <p:txBody>
           <a:bodyPr wrap="square" rtlCol="0" anchor="t"/>
           <a:lstStyle/>
           <a:p>
-            <a:pPr algn="l" indent="0" marL="0">
+            <a:pPr marL="0" indent="0" algn="l">
               <a:buNone/>
             </a:pPr>
             <a:r>
@@ -2231,9 +2104,9 @@
                 <a:solidFill>
                   <a:srgbClr val="8A9099"/>
                 </a:solidFill>
-                <a:latin typeface="微软雅黑" pitchFamily="34" charset="0"/>
-                <a:ea typeface="微软雅黑" pitchFamily="34" charset="-122"/>
-                <a:cs typeface="微软雅黑" pitchFamily="34" charset="-120"/>
+                <a:latin typeface="微软雅黑" panose="020B0503020204020204" pitchFamily="34" charset="-122"/>
+                <a:ea typeface="微软雅黑" panose="020B0503020204020204" pitchFamily="34" charset="-122"/>
+                <a:cs typeface="微软雅黑" panose="020B0503020204020204" pitchFamily="34" charset="-120"/>
               </a:rPr>
               <a:t>知识点回看：重邮数据结构笔记「栈队和数组（数组与广义表部分）」对应小节；答疑进页面底部群。</a:t>
             </a:r>
@@ -2251,7 +2124,7 @@
 
 <file path=ppt/slides/slide2.xml><?xml version="1.0" encoding="utf-8"?>
 <p:sld xmlns:a="http://schemas.openxmlformats.org/drawingml/2006/main" xmlns:r="http://schemas.openxmlformats.org/officeDocument/2006/relationships" xmlns:p="http://schemas.openxmlformats.org/presentationml/2006/main">
-  <p:cSld name="Slide 2">
+  <p:cSld>
     <p:bg>
       <p:bgPr>
         <a:blipFill dpi="0" rotWithShape="1">
@@ -2295,13 +2168,12 @@
             <a:avLst/>
           </a:prstGeom>
           <a:noFill/>
-          <a:ln/>
         </p:spPr>
         <p:txBody>
           <a:bodyPr wrap="square" rtlCol="0" anchor="ctr"/>
           <a:lstStyle/>
           <a:p>
-            <a:pPr algn="r" indent="0" marL="0">
+            <a:pPr marL="0" indent="0" algn="r">
               <a:buNone/>
             </a:pPr>
             <a:r>
@@ -2309,9 +2181,9 @@
                 <a:solidFill>
                   <a:srgbClr val="8A9099"/>
                 </a:solidFill>
-                <a:latin typeface="微软雅黑" pitchFamily="34" charset="0"/>
-                <a:ea typeface="微软雅黑" pitchFamily="34" charset="-122"/>
-                <a:cs typeface="微软雅黑" pitchFamily="34" charset="-120"/>
+                <a:latin typeface="微软雅黑" panose="020B0503020204020204" pitchFamily="34" charset="-122"/>
+                <a:ea typeface="微软雅黑" panose="020B0503020204020204" pitchFamily="34" charset="-122"/>
+                <a:cs typeface="微软雅黑" panose="020B0503020204020204" pitchFamily="34" charset="-120"/>
               </a:rPr>
               <a:t>2 / 10</a:t>
             </a:r>
@@ -2334,13 +2206,12 @@
             <a:avLst/>
           </a:prstGeom>
           <a:noFill/>
-          <a:ln/>
         </p:spPr>
         <p:txBody>
           <a:bodyPr wrap="square" rtlCol="0" anchor="ctr"/>
           <a:lstStyle/>
           <a:p>
-            <a:pPr algn="l" indent="0" marL="0">
+            <a:pPr marL="0" indent="0" algn="l">
               <a:buNone/>
             </a:pPr>
             <a:r>
@@ -2348,9 +2219,9 @@
                 <a:solidFill>
                   <a:srgbClr val="1F4E9C"/>
                 </a:solidFill>
-                <a:latin typeface="微软雅黑" pitchFamily="34" charset="0"/>
-                <a:ea typeface="微软雅黑" pitchFamily="34" charset="-122"/>
-                <a:cs typeface="微软雅黑" pitchFamily="34" charset="-120"/>
+                <a:latin typeface="微软雅黑" panose="020B0503020204020204" pitchFamily="34" charset="-122"/>
+                <a:ea typeface="微软雅黑" panose="020B0503020204020204" pitchFamily="34" charset="-122"/>
+                <a:cs typeface="微软雅黑" panose="020B0503020204020204" pitchFamily="34" charset="-120"/>
               </a:rPr>
               <a:t>本章勾画总览</a:t>
             </a:r>
@@ -2373,13 +2244,12 @@
             <a:avLst/>
           </a:prstGeom>
           <a:noFill/>
-          <a:ln/>
         </p:spPr>
         <p:txBody>
           <a:bodyPr wrap="square" rtlCol="0" anchor="ctr"/>
           <a:lstStyle/>
           <a:p>
-            <a:pPr algn="l" indent="0" marL="0">
+            <a:pPr marL="0" indent="0" algn="l">
               <a:buNone/>
             </a:pPr>
             <a:r>
@@ -2387,9 +2257,9 @@
                 <a:solidFill>
                   <a:srgbClr val="1F2329"/>
                 </a:solidFill>
-                <a:latin typeface="微软雅黑" pitchFamily="34" charset="0"/>
-                <a:ea typeface="微软雅黑" pitchFamily="34" charset="-122"/>
-                <a:cs typeface="微软雅黑" pitchFamily="34" charset="-120"/>
+                <a:latin typeface="微软雅黑" panose="020B0503020204020204" pitchFamily="34" charset="-122"/>
+                <a:ea typeface="微软雅黑" panose="020B0503020204020204" pitchFamily="34" charset="-122"/>
+                <a:cs typeface="微软雅黑" panose="020B0503020204020204" pitchFamily="34" charset="-120"/>
               </a:rPr>
               <a:t>第5章三档题量与用法</a:t>
             </a:r>
@@ -2399,21 +2269,15 @@
       </p:sp>
       <p:graphicFrame>
         <p:nvGraphicFramePr>
-          <p:cNvPr id="3" name="Table 0"/>
+          <p:cNvPr id="5" name="Table 0"/>
           <p:cNvGraphicFramePr>
             <a:graphicFrameLocks noGrp="1"/>
           </p:cNvGraphicFramePr>
-          <p:nvPr>
-            <p:extLst>
-              <p:ext uri="{D42A27DB-BD31-4B8C-83A1-F6EECF244321}">
-                <p14:modId xmlns:p14="http://schemas.microsoft.com/office/powerpoint/2010/main" val="1579011935"/>
-              </p:ext>
-            </p:extLst>
-          </p:nvPr>
+          <p:nvPr/>
         </p:nvGraphicFramePr>
         <p:xfrm>
           <a:off x="822960" y="2395728"/>
-          <a:ext cx="10545775" cy="914400"/>
+          <a:ext cx="10545776" cy="1682496"/>
         </p:xfrm>
         <a:graphic>
           <a:graphicData uri="http://schemas.openxmlformats.org/drawingml/2006/table">
@@ -2431,7 +2295,7 @@
                     <a:bodyPr/>
                     <a:lstStyle/>
                     <a:p>
-                      <a:pPr algn="ctr" indent="0" marL="0">
+                      <a:pPr marL="0" indent="0" algn="ctr">
                         <a:buNone/>
                       </a:pPr>
                       <a:r>
@@ -2439,20 +2303,20 @@
                           <a:solidFill>
                             <a:srgbClr val="1F4E9C"/>
                           </a:solidFill>
-                          <a:latin typeface="微软雅黑" pitchFamily="34" charset="0"/>
-                          <a:ea typeface="微软雅黑" pitchFamily="34" charset="-122"/>
-                          <a:cs typeface="微软雅黑" pitchFamily="34" charset="-120"/>
+                          <a:latin typeface="微软雅黑" panose="020B0503020204020204" pitchFamily="34" charset="-122"/>
+                          <a:ea typeface="微软雅黑" panose="020B0503020204020204" pitchFamily="34" charset="-122"/>
+                          <a:cs typeface="微软雅黑" panose="020B0503020204020204" pitchFamily="34" charset="-120"/>
                         </a:rPr>
                         <a:t>方向</a:t>
                       </a:r>
                       <a:endParaRPr lang="en-US" sz="1500" dirty="0">
-                        <a:latin typeface="微软雅黑" charset="0"/>
-                        <a:ea typeface="微软雅黑" charset="0"/>
-                        <a:cs typeface="微软雅黑" charset="0"/>
+                        <a:latin typeface="微软雅黑" panose="020B0503020204020204" pitchFamily="34" charset="-122"/>
+                        <a:ea typeface="微软雅黑" panose="020B0503020204020204" pitchFamily="34" charset="-122"/>
+                        <a:cs typeface="微软雅黑" panose="020B0503020204020204" pitchFamily="34" charset="-122"/>
                       </a:endParaRPr>
                     </a:p>
                   </a:txBody>
-                  <a:tcPr marL="91440" marR="91440" marT="45720" marB="45720" anchor="ctr">
+                  <a:tcPr anchor="ctr">
                     <a:lnL w="9525" cap="flat" cmpd="sng" algn="ctr">
                       <a:solidFill>
                         <a:srgbClr val="D8DBE0"/>
@@ -2499,7 +2363,7 @@
                     <a:bodyPr/>
                     <a:lstStyle/>
                     <a:p>
-                      <a:pPr algn="ctr" indent="0" marL="0">
+                      <a:pPr marL="0" indent="0" algn="ctr">
                         <a:buNone/>
                       </a:pPr>
                       <a:r>
@@ -2507,20 +2371,20 @@
                           <a:solidFill>
                             <a:srgbClr val="1F4E9C"/>
                           </a:solidFill>
-                          <a:latin typeface="微软雅黑" pitchFamily="34" charset="0"/>
-                          <a:ea typeface="微软雅黑" pitchFamily="34" charset="-122"/>
-                          <a:cs typeface="微软雅黑" pitchFamily="34" charset="-120"/>
+                          <a:latin typeface="微软雅黑" panose="020B0503020204020204" pitchFamily="34" charset="-122"/>
+                          <a:ea typeface="微软雅黑" panose="020B0503020204020204" pitchFamily="34" charset="-122"/>
+                          <a:cs typeface="微软雅黑" panose="020B0503020204020204" pitchFamily="34" charset="-120"/>
                         </a:rPr>
                         <a:t>题数</a:t>
                       </a:r>
                       <a:endParaRPr lang="en-US" sz="1500" dirty="0">
-                        <a:latin typeface="微软雅黑" charset="0"/>
-                        <a:ea typeface="微软雅黑" charset="0"/>
-                        <a:cs typeface="微软雅黑" charset="0"/>
+                        <a:latin typeface="微软雅黑" panose="020B0503020204020204" pitchFamily="34" charset="-122"/>
+                        <a:ea typeface="微软雅黑" panose="020B0503020204020204" pitchFamily="34" charset="-122"/>
+                        <a:cs typeface="微软雅黑" panose="020B0503020204020204" pitchFamily="34" charset="-122"/>
                       </a:endParaRPr>
                     </a:p>
                   </a:txBody>
-                  <a:tcPr marL="91440" marR="91440" marT="45720" marB="45720" anchor="ctr">
+                  <a:tcPr anchor="ctr">
                     <a:lnL w="9525" cap="flat" cmpd="sng" algn="ctr">
                       <a:solidFill>
                         <a:srgbClr val="D8DBE0"/>
@@ -2567,7 +2431,7 @@
                     <a:bodyPr/>
                     <a:lstStyle/>
                     <a:p>
-                      <a:pPr algn="ctr" indent="0" marL="0">
+                      <a:pPr marL="0" indent="0" algn="ctr">
                         <a:buNone/>
                       </a:pPr>
                       <a:r>
@@ -2575,20 +2439,20 @@
                           <a:solidFill>
                             <a:srgbClr val="1F4E9C"/>
                           </a:solidFill>
-                          <a:latin typeface="微软雅黑" pitchFamily="34" charset="0"/>
-                          <a:ea typeface="微软雅黑" pitchFamily="34" charset="-122"/>
-                          <a:cs typeface="微软雅黑" pitchFamily="34" charset="-120"/>
+                          <a:latin typeface="微软雅黑" panose="020B0503020204020204" pitchFamily="34" charset="-122"/>
+                          <a:ea typeface="微软雅黑" panose="020B0503020204020204" pitchFamily="34" charset="-122"/>
+                          <a:cs typeface="微软雅黑" panose="020B0503020204020204" pitchFamily="34" charset="-120"/>
                         </a:rPr>
                         <a:t>占比</a:t>
                       </a:r>
                       <a:endParaRPr lang="en-US" sz="1500" dirty="0">
-                        <a:latin typeface="微软雅黑" charset="0"/>
-                        <a:ea typeface="微软雅黑" charset="0"/>
-                        <a:cs typeface="微软雅黑" charset="0"/>
+                        <a:latin typeface="微软雅黑" panose="020B0503020204020204" pitchFamily="34" charset="-122"/>
+                        <a:ea typeface="微软雅黑" panose="020B0503020204020204" pitchFamily="34" charset="-122"/>
+                        <a:cs typeface="微软雅黑" panose="020B0503020204020204" pitchFamily="34" charset="-122"/>
                       </a:endParaRPr>
                     </a:p>
                   </a:txBody>
-                  <a:tcPr marL="91440" marR="91440" marT="45720" marB="45720" anchor="ctr">
+                  <a:tcPr anchor="ctr">
                     <a:lnL w="9525" cap="flat" cmpd="sng" algn="ctr">
                       <a:solidFill>
                         <a:srgbClr val="D8DBE0"/>
@@ -2635,7 +2499,7 @@
                     <a:bodyPr/>
                     <a:lstStyle/>
                     <a:p>
-                      <a:pPr algn="ctr" indent="0" marL="0">
+                      <a:pPr marL="0" indent="0" algn="ctr">
                         <a:buNone/>
                       </a:pPr>
                       <a:r>
@@ -2643,20 +2507,20 @@
                           <a:solidFill>
                             <a:srgbClr val="1F4E9C"/>
                           </a:solidFill>
-                          <a:latin typeface="微软雅黑" pitchFamily="34" charset="0"/>
-                          <a:ea typeface="微软雅黑" pitchFamily="34" charset="-122"/>
-                          <a:cs typeface="微软雅黑" pitchFamily="34" charset="-120"/>
+                          <a:latin typeface="微软雅黑" panose="020B0503020204020204" pitchFamily="34" charset="-122"/>
+                          <a:ea typeface="微软雅黑" panose="020B0503020204020204" pitchFamily="34" charset="-122"/>
+                          <a:cs typeface="微软雅黑" panose="020B0503020204020204" pitchFamily="34" charset="-120"/>
                         </a:rPr>
                         <a:t>定位</a:t>
                       </a:r>
                       <a:endParaRPr lang="en-US" sz="1500" dirty="0">
-                        <a:latin typeface="微软雅黑" charset="0"/>
-                        <a:ea typeface="微软雅黑" charset="0"/>
-                        <a:cs typeface="微软雅黑" charset="0"/>
+                        <a:latin typeface="微软雅黑" panose="020B0503020204020204" pitchFamily="34" charset="-122"/>
+                        <a:ea typeface="微软雅黑" panose="020B0503020204020204" pitchFamily="34" charset="-122"/>
+                        <a:cs typeface="微软雅黑" panose="020B0503020204020204" pitchFamily="34" charset="-122"/>
                       </a:endParaRPr>
                     </a:p>
                   </a:txBody>
-                  <a:tcPr marL="91440" marR="91440" marT="45720" marB="45720" anchor="ctr">
+                  <a:tcPr anchor="ctr">
                     <a:lnL w="9525" cap="flat" cmpd="sng" algn="ctr">
                       <a:solidFill>
                         <a:srgbClr val="D8DBE0"/>
@@ -2705,7 +2569,7 @@
                     <a:bodyPr/>
                     <a:lstStyle/>
                     <a:p>
-                      <a:pPr algn="ctr" indent="0" marL="0">
+                      <a:pPr marL="0" indent="0" algn="ctr">
                         <a:buNone/>
                       </a:pPr>
                       <a:r>
@@ -2713,20 +2577,20 @@
                           <a:solidFill>
                             <a:srgbClr val="1F2329"/>
                           </a:solidFill>
-                          <a:latin typeface="微软雅黑" pitchFamily="34" charset="0"/>
-                          <a:ea typeface="微软雅黑" pitchFamily="34" charset="-122"/>
-                          <a:cs typeface="微软雅黑" pitchFamily="34" charset="-120"/>
+                          <a:latin typeface="微软雅黑" panose="020B0503020204020204" pitchFamily="34" charset="-122"/>
+                          <a:ea typeface="微软雅黑" panose="020B0503020204020204" pitchFamily="34" charset="-122"/>
+                          <a:cs typeface="微软雅黑" panose="020B0503020204020204" pitchFamily="34" charset="-120"/>
                         </a:rPr>
                         <a:t>有价值必做</a:t>
                       </a:r>
                       <a:endParaRPr lang="en-US" sz="1500" dirty="0">
-                        <a:latin typeface="微软雅黑" charset="0"/>
-                        <a:ea typeface="微软雅黑" charset="0"/>
-                        <a:cs typeface="微软雅黑" charset="0"/>
+                        <a:latin typeface="微软雅黑" panose="020B0503020204020204" pitchFamily="34" charset="-122"/>
+                        <a:ea typeface="微软雅黑" panose="020B0503020204020204" pitchFamily="34" charset="-122"/>
+                        <a:cs typeface="微软雅黑" panose="020B0503020204020204" pitchFamily="34" charset="-122"/>
                       </a:endParaRPr>
                     </a:p>
                   </a:txBody>
-                  <a:tcPr marL="91440" marR="91440" marT="45720" marB="45720" anchor="ctr">
+                  <a:tcPr anchor="ctr">
                     <a:lnL w="9525" cap="flat" cmpd="sng" algn="ctr">
                       <a:solidFill>
                         <a:srgbClr val="D8DBE0"/>
@@ -2773,7 +2637,7 @@
                     <a:bodyPr/>
                     <a:lstStyle/>
                     <a:p>
-                      <a:pPr algn="ctr" indent="0" marL="0">
+                      <a:pPr marL="0" indent="0" algn="ctr">
                         <a:buNone/>
                       </a:pPr>
                       <a:r>
@@ -2781,20 +2645,20 @@
                           <a:solidFill>
                             <a:srgbClr val="1F2329"/>
                           </a:solidFill>
-                          <a:latin typeface="微软雅黑" pitchFamily="34" charset="0"/>
-                          <a:ea typeface="微软雅黑" pitchFamily="34" charset="-122"/>
-                          <a:cs typeface="微软雅黑" pitchFamily="34" charset="-120"/>
+                          <a:latin typeface="微软雅黑" panose="020B0503020204020204" pitchFamily="34" charset="-122"/>
+                          <a:ea typeface="微软雅黑" panose="020B0503020204020204" pitchFamily="34" charset="-122"/>
+                          <a:cs typeface="微软雅黑" panose="020B0503020204020204" pitchFamily="34" charset="-120"/>
                         </a:rPr>
                         <a:t>20</a:t>
                       </a:r>
                       <a:endParaRPr lang="en-US" sz="1500" dirty="0">
-                        <a:latin typeface="微软雅黑" charset="0"/>
-                        <a:ea typeface="微软雅黑" charset="0"/>
-                        <a:cs typeface="微软雅黑" charset="0"/>
+                        <a:latin typeface="微软雅黑" panose="020B0503020204020204" pitchFamily="34" charset="-122"/>
+                        <a:ea typeface="微软雅黑" panose="020B0503020204020204" pitchFamily="34" charset="-122"/>
+                        <a:cs typeface="微软雅黑" panose="020B0503020204020204" pitchFamily="34" charset="-122"/>
                       </a:endParaRPr>
                     </a:p>
                   </a:txBody>
-                  <a:tcPr marL="91440" marR="91440" marT="45720" marB="45720" anchor="ctr">
+                  <a:tcPr anchor="ctr">
                     <a:lnL w="9525" cap="flat" cmpd="sng" algn="ctr">
                       <a:solidFill>
                         <a:srgbClr val="D8DBE0"/>
@@ -2841,7 +2705,7 @@
                     <a:bodyPr/>
                     <a:lstStyle/>
                     <a:p>
-                      <a:pPr algn="ctr" indent="0" marL="0">
+                      <a:pPr marL="0" indent="0" algn="ctr">
                         <a:buNone/>
                       </a:pPr>
                       <a:r>
@@ -2849,20 +2713,20 @@
                           <a:solidFill>
                             <a:srgbClr val="1F2329"/>
                           </a:solidFill>
-                          <a:latin typeface="微软雅黑" pitchFamily="34" charset="0"/>
-                          <a:ea typeface="微软雅黑" pitchFamily="34" charset="-122"/>
-                          <a:cs typeface="微软雅黑" pitchFamily="34" charset="-120"/>
+                          <a:latin typeface="微软雅黑" panose="020B0503020204020204" pitchFamily="34" charset="-122"/>
+                          <a:ea typeface="微软雅黑" panose="020B0503020204020204" pitchFamily="34" charset="-122"/>
+                          <a:cs typeface="微软雅黑" panose="020B0503020204020204" pitchFamily="34" charset="-120"/>
                         </a:rPr>
                         <a:t>30%</a:t>
                       </a:r>
                       <a:endParaRPr lang="en-US" sz="1500" dirty="0">
-                        <a:latin typeface="微软雅黑" charset="0"/>
-                        <a:ea typeface="微软雅黑" charset="0"/>
-                        <a:cs typeface="微软雅黑" charset="0"/>
+                        <a:latin typeface="微软雅黑" panose="020B0503020204020204" pitchFamily="34" charset="-122"/>
+                        <a:ea typeface="微软雅黑" panose="020B0503020204020204" pitchFamily="34" charset="-122"/>
+                        <a:cs typeface="微软雅黑" panose="020B0503020204020204" pitchFamily="34" charset="-122"/>
                       </a:endParaRPr>
                     </a:p>
                   </a:txBody>
-                  <a:tcPr marL="91440" marR="91440" marT="45720" marB="45720" anchor="ctr">
+                  <a:tcPr anchor="ctr">
                     <a:lnL w="9525" cap="flat" cmpd="sng" algn="ctr">
                       <a:solidFill>
                         <a:srgbClr val="D8DBE0"/>
@@ -2909,7 +2773,7 @@
                     <a:bodyPr/>
                     <a:lstStyle/>
                     <a:p>
-                      <a:pPr algn="ctr" indent="0" marL="0">
+                      <a:pPr marL="0" indent="0" algn="ctr">
                         <a:buNone/>
                       </a:pPr>
                       <a:r>
@@ -2917,20 +2781,20 @@
                           <a:solidFill>
                             <a:srgbClr val="1F2329"/>
                           </a:solidFill>
-                          <a:latin typeface="微软雅黑" pitchFamily="34" charset="0"/>
-                          <a:ea typeface="微软雅黑" pitchFamily="34" charset="-122"/>
-                          <a:cs typeface="微软雅黑" pitchFamily="34" charset="-120"/>
+                          <a:latin typeface="微软雅黑" panose="020B0503020204020204" pitchFamily="34" charset="-122"/>
+                          <a:ea typeface="微软雅黑" panose="020B0503020204020204" pitchFamily="34" charset="-122"/>
+                          <a:cs typeface="微软雅黑" panose="020B0503020204020204" pitchFamily="34" charset="-120"/>
                         </a:rPr>
                         <a:t>对应真题题型，逐题精做</a:t>
                       </a:r>
                       <a:endParaRPr lang="en-US" sz="1500" dirty="0">
-                        <a:latin typeface="微软雅黑" charset="0"/>
-                        <a:ea typeface="微软雅黑" charset="0"/>
-                        <a:cs typeface="微软雅黑" charset="0"/>
+                        <a:latin typeface="微软雅黑" panose="020B0503020204020204" pitchFamily="34" charset="-122"/>
+                        <a:ea typeface="微软雅黑" panose="020B0503020204020204" pitchFamily="34" charset="-122"/>
+                        <a:cs typeface="微软雅黑" panose="020B0503020204020204" pitchFamily="34" charset="-122"/>
                       </a:endParaRPr>
                     </a:p>
                   </a:txBody>
-                  <a:tcPr marL="91440" marR="91440" marT="45720" marB="45720" anchor="ctr">
+                  <a:tcPr anchor="ctr">
                     <a:lnL w="9525" cap="flat" cmpd="sng" algn="ctr">
                       <a:solidFill>
                         <a:srgbClr val="D8DBE0"/>
@@ -2979,7 +2843,7 @@
                     <a:bodyPr/>
                     <a:lstStyle/>
                     <a:p>
-                      <a:pPr algn="ctr" indent="0" marL="0">
+                      <a:pPr marL="0" indent="0" algn="ctr">
                         <a:buNone/>
                       </a:pPr>
                       <a:r>
@@ -2987,20 +2851,20 @@
                           <a:solidFill>
                             <a:srgbClr val="1F2329"/>
                           </a:solidFill>
-                          <a:latin typeface="微软雅黑" pitchFamily="34" charset="0"/>
-                          <a:ea typeface="微软雅黑" pitchFamily="34" charset="-122"/>
-                          <a:cs typeface="微软雅黑" pitchFamily="34" charset="-120"/>
+                          <a:latin typeface="微软雅黑" panose="020B0503020204020204" pitchFamily="34" charset="-122"/>
+                          <a:ea typeface="微软雅黑" panose="020B0503020204020204" pitchFamily="34" charset="-122"/>
+                          <a:cs typeface="微软雅黑" panose="020B0503020204020204" pitchFamily="34" charset="-120"/>
                         </a:rPr>
                         <a:t>可做可不做</a:t>
                       </a:r>
                       <a:endParaRPr lang="en-US" sz="1500" dirty="0">
-                        <a:latin typeface="微软雅黑" charset="0"/>
-                        <a:ea typeface="微软雅黑" charset="0"/>
-                        <a:cs typeface="微软雅黑" charset="0"/>
+                        <a:latin typeface="微软雅黑" panose="020B0503020204020204" pitchFamily="34" charset="-122"/>
+                        <a:ea typeface="微软雅黑" panose="020B0503020204020204" pitchFamily="34" charset="-122"/>
+                        <a:cs typeface="微软雅黑" panose="020B0503020204020204" pitchFamily="34" charset="-122"/>
                       </a:endParaRPr>
                     </a:p>
                   </a:txBody>
-                  <a:tcPr marL="91440" marR="91440" marT="45720" marB="45720" anchor="ctr">
+                  <a:tcPr anchor="ctr">
                     <a:lnL w="9525" cap="flat" cmpd="sng" algn="ctr">
                       <a:solidFill>
                         <a:srgbClr val="D8DBE0"/>
@@ -3047,7 +2911,7 @@
                     <a:bodyPr/>
                     <a:lstStyle/>
                     <a:p>
-                      <a:pPr algn="ctr" indent="0" marL="0">
+                      <a:pPr marL="0" indent="0" algn="ctr">
                         <a:buNone/>
                       </a:pPr>
                       <a:r>
@@ -3055,20 +2919,20 @@
                           <a:solidFill>
                             <a:srgbClr val="1F2329"/>
                           </a:solidFill>
-                          <a:latin typeface="微软雅黑" pitchFamily="34" charset="0"/>
-                          <a:ea typeface="微软雅黑" pitchFamily="34" charset="-122"/>
-                          <a:cs typeface="微软雅黑" pitchFamily="34" charset="-120"/>
+                          <a:latin typeface="微软雅黑" panose="020B0503020204020204" pitchFamily="34" charset="-122"/>
+                          <a:ea typeface="微软雅黑" panose="020B0503020204020204" pitchFamily="34" charset="-122"/>
+                          <a:cs typeface="微软雅黑" panose="020B0503020204020204" pitchFamily="34" charset="-120"/>
                         </a:rPr>
                         <a:t>25</a:t>
                       </a:r>
                       <a:endParaRPr lang="en-US" sz="1500" dirty="0">
-                        <a:latin typeface="微软雅黑" charset="0"/>
-                        <a:ea typeface="微软雅黑" charset="0"/>
-                        <a:cs typeface="微软雅黑" charset="0"/>
+                        <a:latin typeface="微软雅黑" panose="020B0503020204020204" pitchFamily="34" charset="-122"/>
+                        <a:ea typeface="微软雅黑" panose="020B0503020204020204" pitchFamily="34" charset="-122"/>
+                        <a:cs typeface="微软雅黑" panose="020B0503020204020204" pitchFamily="34" charset="-122"/>
                       </a:endParaRPr>
                     </a:p>
                   </a:txBody>
-                  <a:tcPr marL="91440" marR="91440" marT="45720" marB="45720" anchor="ctr">
+                  <a:tcPr anchor="ctr">
                     <a:lnL w="9525" cap="flat" cmpd="sng" algn="ctr">
                       <a:solidFill>
                         <a:srgbClr val="D8DBE0"/>
@@ -3115,7 +2979,7 @@
                     <a:bodyPr/>
                     <a:lstStyle/>
                     <a:p>
-                      <a:pPr algn="ctr" indent="0" marL="0">
+                      <a:pPr marL="0" indent="0" algn="ctr">
                         <a:buNone/>
                       </a:pPr>
                       <a:r>
@@ -3123,20 +2987,20 @@
                           <a:solidFill>
                             <a:srgbClr val="1F2329"/>
                           </a:solidFill>
-                          <a:latin typeface="微软雅黑" pitchFamily="34" charset="0"/>
-                          <a:ea typeface="微软雅黑" pitchFamily="34" charset="-122"/>
-                          <a:cs typeface="微软雅黑" pitchFamily="34" charset="-120"/>
+                          <a:latin typeface="微软雅黑" panose="020B0503020204020204" pitchFamily="34" charset="-122"/>
+                          <a:ea typeface="微软雅黑" panose="020B0503020204020204" pitchFamily="34" charset="-122"/>
+                          <a:cs typeface="微软雅黑" panose="020B0503020204020204" pitchFamily="34" charset="-120"/>
                         </a:rPr>
                         <a:t>38%</a:t>
                       </a:r>
                       <a:endParaRPr lang="en-US" sz="1500" dirty="0">
-                        <a:latin typeface="微软雅黑" charset="0"/>
-                        <a:ea typeface="微软雅黑" charset="0"/>
-                        <a:cs typeface="微软雅黑" charset="0"/>
+                        <a:latin typeface="微软雅黑" panose="020B0503020204020204" pitchFamily="34" charset="-122"/>
+                        <a:ea typeface="微软雅黑" panose="020B0503020204020204" pitchFamily="34" charset="-122"/>
+                        <a:cs typeface="微软雅黑" panose="020B0503020204020204" pitchFamily="34" charset="-122"/>
                       </a:endParaRPr>
                     </a:p>
                   </a:txBody>
-                  <a:tcPr marL="91440" marR="91440" marT="45720" marB="45720" anchor="ctr">
+                  <a:tcPr anchor="ctr">
                     <a:lnL w="9525" cap="flat" cmpd="sng" algn="ctr">
                       <a:solidFill>
                         <a:srgbClr val="D8DBE0"/>
@@ -3183,7 +3047,7 @@
                     <a:bodyPr/>
                     <a:lstStyle/>
                     <a:p>
-                      <a:pPr algn="ctr" indent="0" marL="0">
+                      <a:pPr marL="0" indent="0" algn="ctr">
                         <a:buNone/>
                       </a:pPr>
                       <a:r>
@@ -3191,20 +3055,20 @@
                           <a:solidFill>
                             <a:srgbClr val="1F2329"/>
                           </a:solidFill>
-                          <a:latin typeface="微软雅黑" pitchFamily="34" charset="0"/>
-                          <a:ea typeface="微软雅黑" pitchFamily="34" charset="-122"/>
-                          <a:cs typeface="微软雅黑" pitchFamily="34" charset="-120"/>
+                          <a:latin typeface="微软雅黑" panose="020B0503020204020204" pitchFamily="34" charset="-122"/>
+                          <a:ea typeface="微软雅黑" panose="020B0503020204020204" pitchFamily="34" charset="-122"/>
+                          <a:cs typeface="微软雅黑" panose="020B0503020204020204" pitchFamily="34" charset="-120"/>
                         </a:rPr>
                         <a:t>在纲内、考频低，限时巩固</a:t>
                       </a:r>
                       <a:endParaRPr lang="en-US" sz="1500" dirty="0">
-                        <a:latin typeface="微软雅黑" charset="0"/>
-                        <a:ea typeface="微软雅黑" charset="0"/>
-                        <a:cs typeface="微软雅黑" charset="0"/>
+                        <a:latin typeface="微软雅黑" panose="020B0503020204020204" pitchFamily="34" charset="-122"/>
+                        <a:ea typeface="微软雅黑" panose="020B0503020204020204" pitchFamily="34" charset="-122"/>
+                        <a:cs typeface="微软雅黑" panose="020B0503020204020204" pitchFamily="34" charset="-122"/>
                       </a:endParaRPr>
                     </a:p>
                   </a:txBody>
-                  <a:tcPr marL="91440" marR="91440" marT="45720" marB="45720" anchor="ctr">
+                  <a:tcPr anchor="ctr">
                     <a:lnL w="9525" cap="flat" cmpd="sng" algn="ctr">
                       <a:solidFill>
                         <a:srgbClr val="D8DBE0"/>
@@ -3253,7 +3117,7 @@
                     <a:bodyPr/>
                     <a:lstStyle/>
                     <a:p>
-                      <a:pPr algn="ctr" indent="0" marL="0">
+                      <a:pPr marL="0" indent="0" algn="ctr">
                         <a:buNone/>
                       </a:pPr>
                       <a:r>
@@ -3261,20 +3125,20 @@
                           <a:solidFill>
                             <a:srgbClr val="1F2329"/>
                           </a:solidFill>
-                          <a:latin typeface="微软雅黑" pitchFamily="34" charset="0"/>
-                          <a:ea typeface="微软雅黑" pitchFamily="34" charset="-122"/>
-                          <a:cs typeface="微软雅黑" pitchFamily="34" charset="-120"/>
+                          <a:latin typeface="微软雅黑" panose="020B0503020204020204" pitchFamily="34" charset="-122"/>
+                          <a:ea typeface="微软雅黑" panose="020B0503020204020204" pitchFamily="34" charset="-122"/>
+                          <a:cs typeface="微软雅黑" panose="020B0503020204020204" pitchFamily="34" charset="-120"/>
                         </a:rPr>
                         <a:t>完全不做</a:t>
                       </a:r>
                       <a:endParaRPr lang="en-US" sz="1500" dirty="0">
-                        <a:latin typeface="微软雅黑" charset="0"/>
-                        <a:ea typeface="微软雅黑" charset="0"/>
-                        <a:cs typeface="微软雅黑" charset="0"/>
+                        <a:latin typeface="微软雅黑" panose="020B0503020204020204" pitchFamily="34" charset="-122"/>
+                        <a:ea typeface="微软雅黑" panose="020B0503020204020204" pitchFamily="34" charset="-122"/>
+                        <a:cs typeface="微软雅黑" panose="020B0503020204020204" pitchFamily="34" charset="-122"/>
                       </a:endParaRPr>
                     </a:p>
                   </a:txBody>
-                  <a:tcPr marL="91440" marR="91440" marT="45720" marB="45720" anchor="ctr">
+                  <a:tcPr anchor="ctr">
                     <a:lnL w="9525" cap="flat" cmpd="sng" algn="ctr">
                       <a:solidFill>
                         <a:srgbClr val="D8DBE0"/>
@@ -3321,7 +3185,7 @@
                     <a:bodyPr/>
                     <a:lstStyle/>
                     <a:p>
-                      <a:pPr algn="ctr" indent="0" marL="0">
+                      <a:pPr marL="0" indent="0" algn="ctr">
                         <a:buNone/>
                       </a:pPr>
                       <a:r>
@@ -3329,20 +3193,20 @@
                           <a:solidFill>
                             <a:srgbClr val="1F2329"/>
                           </a:solidFill>
-                          <a:latin typeface="微软雅黑" pitchFamily="34" charset="0"/>
-                          <a:ea typeface="微软雅黑" pitchFamily="34" charset="-122"/>
-                          <a:cs typeface="微软雅黑" pitchFamily="34" charset="-120"/>
+                          <a:latin typeface="微软雅黑" panose="020B0503020204020204" pitchFamily="34" charset="-122"/>
+                          <a:ea typeface="微软雅黑" panose="020B0503020204020204" pitchFamily="34" charset="-122"/>
+                          <a:cs typeface="微软雅黑" panose="020B0503020204020204" pitchFamily="34" charset="-120"/>
                         </a:rPr>
                         <a:t>21</a:t>
                       </a:r>
                       <a:endParaRPr lang="en-US" sz="1500" dirty="0">
-                        <a:latin typeface="微软雅黑" charset="0"/>
-                        <a:ea typeface="微软雅黑" charset="0"/>
-                        <a:cs typeface="微软雅黑" charset="0"/>
+                        <a:latin typeface="微软雅黑" panose="020B0503020204020204" pitchFamily="34" charset="-122"/>
+                        <a:ea typeface="微软雅黑" panose="020B0503020204020204" pitchFamily="34" charset="-122"/>
+                        <a:cs typeface="微软雅黑" panose="020B0503020204020204" pitchFamily="34" charset="-122"/>
                       </a:endParaRPr>
                     </a:p>
                   </a:txBody>
-                  <a:tcPr marL="91440" marR="91440" marT="45720" marB="45720" anchor="ctr">
+                  <a:tcPr anchor="ctr">
                     <a:lnL w="9525" cap="flat" cmpd="sng" algn="ctr">
                       <a:solidFill>
                         <a:srgbClr val="D8DBE0"/>
@@ -3389,7 +3253,7 @@
                     <a:bodyPr/>
                     <a:lstStyle/>
                     <a:p>
-                      <a:pPr algn="ctr" indent="0" marL="0">
+                      <a:pPr marL="0" indent="0" algn="ctr">
                         <a:buNone/>
                       </a:pPr>
                       <a:r>
@@ -3397,20 +3261,20 @@
                           <a:solidFill>
                             <a:srgbClr val="1F2329"/>
                           </a:solidFill>
-                          <a:latin typeface="微软雅黑" pitchFamily="34" charset="0"/>
-                          <a:ea typeface="微软雅黑" pitchFamily="34" charset="-122"/>
-                          <a:cs typeface="微软雅黑" pitchFamily="34" charset="-120"/>
+                          <a:latin typeface="微软雅黑" panose="020B0503020204020204" pitchFamily="34" charset="-122"/>
+                          <a:ea typeface="微软雅黑" panose="020B0503020204020204" pitchFamily="34" charset="-122"/>
+                          <a:cs typeface="微软雅黑" panose="020B0503020204020204" pitchFamily="34" charset="-120"/>
                         </a:rPr>
                         <a:t>32%</a:t>
                       </a:r>
                       <a:endParaRPr lang="en-US" sz="1500" dirty="0">
-                        <a:latin typeface="微软雅黑" charset="0"/>
-                        <a:ea typeface="微软雅黑" charset="0"/>
-                        <a:cs typeface="微软雅黑" charset="0"/>
+                        <a:latin typeface="微软雅黑" panose="020B0503020204020204" pitchFamily="34" charset="-122"/>
+                        <a:ea typeface="微软雅黑" panose="020B0503020204020204" pitchFamily="34" charset="-122"/>
+                        <a:cs typeface="微软雅黑" panose="020B0503020204020204" pitchFamily="34" charset="-122"/>
                       </a:endParaRPr>
                     </a:p>
                   </a:txBody>
-                  <a:tcPr marL="91440" marR="91440" marT="45720" marB="45720" anchor="ctr">
+                  <a:tcPr anchor="ctr">
                     <a:lnL w="9525" cap="flat" cmpd="sng" algn="ctr">
                       <a:solidFill>
                         <a:srgbClr val="D8DBE0"/>
@@ -3457,7 +3321,7 @@
                     <a:bodyPr/>
                     <a:lstStyle/>
                     <a:p>
-                      <a:pPr algn="ctr" indent="0" marL="0">
+                      <a:pPr marL="0" indent="0" algn="ctr">
                         <a:buNone/>
                       </a:pPr>
                       <a:r>
@@ -3465,20 +3329,20 @@
                           <a:solidFill>
                             <a:srgbClr val="1F2329"/>
                           </a:solidFill>
-                          <a:latin typeface="微软雅黑" pitchFamily="34" charset="0"/>
-                          <a:ea typeface="微软雅黑" pitchFamily="34" charset="-122"/>
-                          <a:cs typeface="微软雅黑" pitchFamily="34" charset="-120"/>
+                          <a:latin typeface="微软雅黑" panose="020B0503020204020204" pitchFamily="34" charset="-122"/>
+                          <a:ea typeface="微软雅黑" panose="020B0503020204020204" pitchFamily="34" charset="-122"/>
+                          <a:cs typeface="微软雅黑" panose="020B0503020204020204" pitchFamily="34" charset="-120"/>
                         </a:rPr>
                         <a:t>超纲或无对应题型，直接跳过</a:t>
                       </a:r>
                       <a:endParaRPr lang="en-US" sz="1500" dirty="0">
-                        <a:latin typeface="微软雅黑" charset="0"/>
-                        <a:ea typeface="微软雅黑" charset="0"/>
-                        <a:cs typeface="微软雅黑" charset="0"/>
+                        <a:latin typeface="微软雅黑" panose="020B0503020204020204" pitchFamily="34" charset="-122"/>
+                        <a:ea typeface="微软雅黑" panose="020B0503020204020204" pitchFamily="34" charset="-122"/>
+                        <a:cs typeface="微软雅黑" panose="020B0503020204020204" pitchFamily="34" charset="-122"/>
                       </a:endParaRPr>
                     </a:p>
                   </a:txBody>
-                  <a:tcPr marL="91440" marR="91440" marT="45720" marB="45720" anchor="ctr">
+                  <a:tcPr anchor="ctr">
                     <a:lnL w="9525" cap="flat" cmpd="sng" algn="ctr">
                       <a:solidFill>
                         <a:srgbClr val="D8DBE0"/>
@@ -3540,13 +3404,12 @@
             <a:avLst/>
           </a:prstGeom>
           <a:noFill/>
-          <a:ln/>
         </p:spPr>
         <p:txBody>
           <a:bodyPr wrap="square" rtlCol="0" anchor="t"/>
           <a:lstStyle/>
           <a:p>
-            <a:pPr algn="l" indent="0" marL="0">
+            <a:pPr marL="0" indent="0" algn="l">
               <a:buNone/>
             </a:pPr>
             <a:r>
@@ -3554,9 +3417,9 @@
                 <a:solidFill>
                   <a:srgbClr val="8A9099"/>
                 </a:solidFill>
-                <a:latin typeface="微软雅黑" pitchFamily="34" charset="0"/>
-                <a:ea typeface="微软雅黑" pitchFamily="34" charset="-122"/>
-                <a:cs typeface="微软雅黑" pitchFamily="34" charset="-120"/>
+                <a:latin typeface="微软雅黑" panose="020B0503020204020204" pitchFamily="34" charset="-122"/>
+                <a:ea typeface="微软雅黑" panose="020B0503020204020204" pitchFamily="34" charset="-122"/>
+                <a:cs typeface="微软雅黑" panose="020B0503020204020204" pitchFamily="34" charset="-120"/>
               </a:rPr>
               <a:t>题号口径：选N＝本章单项选择题第N题，答N＝解答题第N题，算N＝算法设计题第N题；页码为题集PDF页（书页＝PDF页−9）。</a:t>
             </a:r>
@@ -3574,7 +3437,7 @@
 
 <file path=ppt/slides/slide3.xml><?xml version="1.0" encoding="utf-8"?>
 <p:sld xmlns:a="http://schemas.openxmlformats.org/drawingml/2006/main" xmlns:r="http://schemas.openxmlformats.org/officeDocument/2006/relationships" xmlns:p="http://schemas.openxmlformats.org/presentationml/2006/main">
-  <p:cSld name="Slide 3">
+  <p:cSld>
     <p:bg>
       <p:bgPr>
         <a:blipFill dpi="0" rotWithShape="1">
@@ -3618,13 +3481,12 @@
             <a:avLst/>
           </a:prstGeom>
           <a:noFill/>
-          <a:ln/>
         </p:spPr>
         <p:txBody>
           <a:bodyPr wrap="square" rtlCol="0" anchor="ctr"/>
           <a:lstStyle/>
           <a:p>
-            <a:pPr algn="r" indent="0" marL="0">
+            <a:pPr marL="0" indent="0" algn="r">
               <a:buNone/>
             </a:pPr>
             <a:r>
@@ -3632,9 +3494,9 @@
                 <a:solidFill>
                   <a:srgbClr val="8A9099"/>
                 </a:solidFill>
-                <a:latin typeface="微软雅黑" pitchFamily="34" charset="0"/>
-                <a:ea typeface="微软雅黑" pitchFamily="34" charset="-122"/>
-                <a:cs typeface="微软雅黑" pitchFamily="34" charset="-120"/>
+                <a:latin typeface="微软雅黑" panose="020B0503020204020204" pitchFamily="34" charset="-122"/>
+                <a:ea typeface="微软雅黑" panose="020B0503020204020204" pitchFamily="34" charset="-122"/>
+                <a:cs typeface="微软雅黑" panose="020B0503020204020204" pitchFamily="34" charset="-120"/>
               </a:rPr>
               <a:t>3 / 10</a:t>
             </a:r>
@@ -3657,13 +3519,12 @@
             <a:avLst/>
           </a:prstGeom>
           <a:noFill/>
-          <a:ln/>
         </p:spPr>
         <p:txBody>
           <a:bodyPr wrap="square" rtlCol="0" anchor="ctr"/>
           <a:lstStyle/>
           <a:p>
-            <a:pPr algn="l" indent="0" marL="0">
+            <a:pPr marL="0" indent="0" algn="l">
               <a:buNone/>
             </a:pPr>
             <a:r>
@@ -3671,9 +3532,9 @@
                 <a:solidFill>
                   <a:srgbClr val="1F4E9C"/>
                 </a:solidFill>
-                <a:latin typeface="微软雅黑" pitchFamily="34" charset="0"/>
-                <a:ea typeface="微软雅黑" pitchFamily="34" charset="-122"/>
-                <a:cs typeface="微软雅黑" pitchFamily="34" charset="-120"/>
+                <a:latin typeface="微软雅黑" panose="020B0503020204020204" pitchFamily="34" charset="-122"/>
+                <a:ea typeface="微软雅黑" panose="020B0503020204020204" pitchFamily="34" charset="-122"/>
+                <a:cs typeface="微软雅黑" panose="020B0503020204020204" pitchFamily="34" charset="-120"/>
               </a:rPr>
               <a:t>有价值必做</a:t>
             </a:r>
@@ -3696,13 +3557,12 @@
             <a:avLst/>
           </a:prstGeom>
           <a:noFill/>
-          <a:ln/>
         </p:spPr>
         <p:txBody>
           <a:bodyPr wrap="square" rtlCol="0" anchor="ctr"/>
           <a:lstStyle/>
           <a:p>
-            <a:pPr algn="l" indent="0" marL="0">
+            <a:pPr marL="0" indent="0" algn="l">
               <a:buNone/>
             </a:pPr>
             <a:r>
@@ -3710,9 +3570,9 @@
                 <a:solidFill>
                   <a:srgbClr val="1F2329"/>
                 </a:solidFill>
-                <a:latin typeface="微软雅黑" pitchFamily="34" charset="0"/>
-                <a:ea typeface="微软雅黑" pitchFamily="34" charset="-122"/>
-                <a:cs typeface="微软雅黑" pitchFamily="34" charset="-120"/>
+                <a:latin typeface="微软雅黑" panose="020B0503020204020204" pitchFamily="34" charset="-122"/>
+                <a:ea typeface="微软雅黑" panose="020B0503020204020204" pitchFamily="34" charset="-122"/>
+                <a:cs typeface="微软雅黑" panose="020B0503020204020204" pitchFamily="34" charset="-120"/>
               </a:rPr>
               <a:t>必做题（1/4）</a:t>
             </a:r>
@@ -3722,21 +3582,15 @@
       </p:sp>
       <p:graphicFrame>
         <p:nvGraphicFramePr>
-          <p:cNvPr id="4" name="Table 0"/>
+          <p:cNvPr id="5" name="Table 0"/>
           <p:cNvGraphicFramePr>
             <a:graphicFrameLocks noGrp="1"/>
           </p:cNvGraphicFramePr>
-          <p:nvPr>
-            <p:extLst>
-              <p:ext uri="{D42A27DB-BD31-4B8C-83A1-F6EECF244321}">
-                <p14:modId xmlns:p14="http://schemas.microsoft.com/office/powerpoint/2010/main" val="1579011935"/>
-              </p:ext>
-            </p:extLst>
-          </p:nvPr>
+          <p:nvPr/>
         </p:nvGraphicFramePr>
         <p:xfrm>
           <a:off x="822960" y="2395728"/>
-          <a:ext cx="10545775" cy="914400"/>
+          <a:ext cx="10545775" cy="2523744"/>
         </p:xfrm>
         <a:graphic>
           <a:graphicData uri="http://schemas.openxmlformats.org/drawingml/2006/table">
@@ -3753,7 +3607,7 @@
                     <a:bodyPr/>
                     <a:lstStyle/>
                     <a:p>
-                      <a:pPr algn="l" indent="0" marL="0">
+                      <a:pPr marL="0" indent="0" algn="l">
                         <a:buNone/>
                       </a:pPr>
                       <a:r>
@@ -3761,20 +3615,20 @@
                           <a:solidFill>
                             <a:srgbClr val="1F4E9C"/>
                           </a:solidFill>
-                          <a:latin typeface="微软雅黑" pitchFamily="34" charset="0"/>
-                          <a:ea typeface="微软雅黑" pitchFamily="34" charset="-122"/>
-                          <a:cs typeface="微软雅黑" pitchFamily="34" charset="-120"/>
+                          <a:latin typeface="微软雅黑" panose="020B0503020204020204" pitchFamily="34" charset="-122"/>
+                          <a:ea typeface="微软雅黑" panose="020B0503020204020204" pitchFamily="34" charset="-122"/>
+                          <a:cs typeface="微软雅黑" panose="020B0503020204020204" pitchFamily="34" charset="-120"/>
                         </a:rPr>
                         <a:t>题号</a:t>
                       </a:r>
                       <a:endParaRPr lang="en-US" sz="1500" dirty="0">
-                        <a:latin typeface="微软雅黑" charset="0"/>
-                        <a:ea typeface="微软雅黑" charset="0"/>
-                        <a:cs typeface="微软雅黑" charset="0"/>
+                        <a:latin typeface="微软雅黑" panose="020B0503020204020204" pitchFamily="34" charset="-122"/>
+                        <a:ea typeface="微软雅黑" panose="020B0503020204020204" pitchFamily="34" charset="-122"/>
+                        <a:cs typeface="微软雅黑" panose="020B0503020204020204" pitchFamily="34" charset="-122"/>
                       </a:endParaRPr>
                     </a:p>
                   </a:txBody>
-                  <a:tcPr marL="91440" marR="91440" marT="45720" marB="45720" anchor="ctr">
+                  <a:tcPr anchor="ctr">
                     <a:lnL w="9525" cap="flat" cmpd="sng" algn="ctr">
                       <a:solidFill>
                         <a:srgbClr val="D8DBE0"/>
@@ -3821,7 +3675,7 @@
                     <a:bodyPr/>
                     <a:lstStyle/>
                     <a:p>
-                      <a:pPr algn="l" indent="0" marL="0">
+                      <a:pPr marL="0" indent="0" algn="l">
                         <a:buNone/>
                       </a:pPr>
                       <a:r>
@@ -3829,20 +3683,20 @@
                           <a:solidFill>
                             <a:srgbClr val="1F4E9C"/>
                           </a:solidFill>
-                          <a:latin typeface="微软雅黑" pitchFamily="34" charset="0"/>
-                          <a:ea typeface="微软雅黑" pitchFamily="34" charset="-122"/>
-                          <a:cs typeface="微软雅黑" pitchFamily="34" charset="-120"/>
+                          <a:latin typeface="微软雅黑" panose="020B0503020204020204" pitchFamily="34" charset="-122"/>
+                          <a:ea typeface="微软雅黑" panose="020B0503020204020204" pitchFamily="34" charset="-122"/>
+                          <a:cs typeface="微软雅黑" panose="020B0503020204020204" pitchFamily="34" charset="-120"/>
                         </a:rPr>
                         <a:t>考点</a:t>
                       </a:r>
                       <a:endParaRPr lang="en-US" sz="1500" dirty="0">
-                        <a:latin typeface="微软雅黑" charset="0"/>
-                        <a:ea typeface="微软雅黑" charset="0"/>
-                        <a:cs typeface="微软雅黑" charset="0"/>
+                        <a:latin typeface="微软雅黑" panose="020B0503020204020204" pitchFamily="34" charset="-122"/>
+                        <a:ea typeface="微软雅黑" panose="020B0503020204020204" pitchFamily="34" charset="-122"/>
+                        <a:cs typeface="微软雅黑" panose="020B0503020204020204" pitchFamily="34" charset="-122"/>
                       </a:endParaRPr>
                     </a:p>
                   </a:txBody>
-                  <a:tcPr marL="91440" marR="91440" marT="45720" marB="45720" anchor="ctr">
+                  <a:tcPr anchor="ctr">
                     <a:lnL w="9525" cap="flat" cmpd="sng" algn="ctr">
                       <a:solidFill>
                         <a:srgbClr val="D8DBE0"/>
@@ -3889,7 +3743,7 @@
                     <a:bodyPr/>
                     <a:lstStyle/>
                     <a:p>
-                      <a:pPr algn="l" indent="0" marL="0">
+                      <a:pPr marL="0" indent="0" algn="l">
                         <a:buNone/>
                       </a:pPr>
                       <a:r>
@@ -3897,20 +3751,20 @@
                           <a:solidFill>
                             <a:srgbClr val="1F4E9C"/>
                           </a:solidFill>
-                          <a:latin typeface="微软雅黑" pitchFamily="34" charset="0"/>
-                          <a:ea typeface="微软雅黑" pitchFamily="34" charset="-122"/>
-                          <a:cs typeface="微软雅黑" pitchFamily="34" charset="-120"/>
+                          <a:latin typeface="微软雅黑" panose="020B0503020204020204" pitchFamily="34" charset="-122"/>
+                          <a:ea typeface="微软雅黑" panose="020B0503020204020204" pitchFamily="34" charset="-122"/>
+                          <a:cs typeface="微软雅黑" panose="020B0503020204020204" pitchFamily="34" charset="-120"/>
                         </a:rPr>
                         <a:t>价值</a:t>
                       </a:r>
                       <a:endParaRPr lang="en-US" sz="1500" dirty="0">
-                        <a:latin typeface="微软雅黑" charset="0"/>
-                        <a:ea typeface="微软雅黑" charset="0"/>
-                        <a:cs typeface="微软雅黑" charset="0"/>
+                        <a:latin typeface="微软雅黑" panose="020B0503020204020204" pitchFamily="34" charset="-122"/>
+                        <a:ea typeface="微软雅黑" panose="020B0503020204020204" pitchFamily="34" charset="-122"/>
+                        <a:cs typeface="微软雅黑" panose="020B0503020204020204" pitchFamily="34" charset="-122"/>
                       </a:endParaRPr>
                     </a:p>
                   </a:txBody>
-                  <a:tcPr marL="91440" marR="91440" marT="45720" marB="45720" anchor="ctr">
+                  <a:tcPr anchor="ctr">
                     <a:lnL w="9525" cap="flat" cmpd="sng" algn="ctr">
                       <a:solidFill>
                         <a:srgbClr val="D8DBE0"/>
@@ -3959,7 +3813,7 @@
                     <a:bodyPr/>
                     <a:lstStyle/>
                     <a:p>
-                      <a:pPr algn="l" indent="0" marL="0">
+                      <a:pPr marL="0" indent="0" algn="l">
                         <a:buNone/>
                       </a:pPr>
                       <a:r>
@@ -3967,20 +3821,20 @@
                           <a:solidFill>
                             <a:srgbClr val="1F2329"/>
                           </a:solidFill>
-                          <a:latin typeface="微软雅黑" pitchFamily="34" charset="0"/>
-                          <a:ea typeface="微软雅黑" pitchFamily="34" charset="-122"/>
-                          <a:cs typeface="微软雅黑" pitchFamily="34" charset="-120"/>
+                          <a:latin typeface="微软雅黑" panose="020B0503020204020204" pitchFamily="34" charset="-122"/>
+                          <a:ea typeface="微软雅黑" panose="020B0503020204020204" pitchFamily="34" charset="-122"/>
+                          <a:cs typeface="微软雅黑" panose="020B0503020204020204" pitchFamily="34" charset="-120"/>
                         </a:rPr>
                         <a:t>5选2</a:t>
                       </a:r>
                       <a:endParaRPr lang="en-US" sz="1500" dirty="0">
-                        <a:latin typeface="微软雅黑" charset="0"/>
-                        <a:ea typeface="微软雅黑" charset="0"/>
-                        <a:cs typeface="微软雅黑" charset="0"/>
+                        <a:latin typeface="微软雅黑" panose="020B0503020204020204" pitchFamily="34" charset="-122"/>
+                        <a:ea typeface="微软雅黑" panose="020B0503020204020204" pitchFamily="34" charset="-122"/>
+                        <a:cs typeface="微软雅黑" panose="020B0503020204020204" pitchFamily="34" charset="-122"/>
                       </a:endParaRPr>
                     </a:p>
                   </a:txBody>
-                  <a:tcPr marL="91440" marR="91440" marT="45720" marB="45720" anchor="ctr">
+                  <a:tcPr anchor="ctr">
                     <a:lnL w="9525" cap="flat" cmpd="sng" algn="ctr">
                       <a:solidFill>
                         <a:srgbClr val="D8DBE0"/>
@@ -4027,7 +3881,7 @@
                     <a:bodyPr/>
                     <a:lstStyle/>
                     <a:p>
-                      <a:pPr algn="l" indent="0" marL="0">
+                      <a:pPr marL="0" indent="0" algn="l">
                         <a:buNone/>
                       </a:pPr>
                       <a:r>
@@ -4035,20 +3889,20 @@
                           <a:solidFill>
                             <a:srgbClr val="1F2329"/>
                           </a:solidFill>
-                          <a:latin typeface="微软雅黑" pitchFamily="34" charset="0"/>
-                          <a:ea typeface="微软雅黑" pitchFamily="34" charset="-122"/>
-                          <a:cs typeface="微软雅黑" pitchFamily="34" charset="-120"/>
+                          <a:latin typeface="微软雅黑" panose="020B0503020204020204" pitchFamily="34" charset="-122"/>
+                          <a:ea typeface="微软雅黑" panose="020B0503020204020204" pitchFamily="34" charset="-122"/>
+                          <a:cs typeface="微软雅黑" panose="020B0503020204020204" pitchFamily="34" charset="-120"/>
                         </a:rPr>
                         <a:t>二维数组地址</a:t>
                       </a:r>
                       <a:endParaRPr lang="en-US" sz="1500" dirty="0">
-                        <a:latin typeface="微软雅黑" charset="0"/>
-                        <a:ea typeface="微软雅黑" charset="0"/>
-                        <a:cs typeface="微软雅黑" charset="0"/>
+                        <a:latin typeface="微软雅黑" panose="020B0503020204020204" pitchFamily="34" charset="-122"/>
+                        <a:ea typeface="微软雅黑" panose="020B0503020204020204" pitchFamily="34" charset="-122"/>
+                        <a:cs typeface="微软雅黑" panose="020B0503020204020204" pitchFamily="34" charset="-122"/>
                       </a:endParaRPr>
                     </a:p>
                   </a:txBody>
-                  <a:tcPr marL="91440" marR="91440" marT="45720" marB="45720" anchor="ctr">
+                  <a:tcPr anchor="ctr">
                     <a:lnL w="9525" cap="flat" cmpd="sng" algn="ctr">
                       <a:solidFill>
                         <a:srgbClr val="D8DBE0"/>
@@ -4095,7 +3949,7 @@
                     <a:bodyPr/>
                     <a:lstStyle/>
                     <a:p>
-                      <a:pPr algn="l" indent="0" marL="0">
+                      <a:pPr marL="0" indent="0" algn="l">
                         <a:buNone/>
                       </a:pPr>
                       <a:r>
@@ -4103,20 +3957,20 @@
                           <a:solidFill>
                             <a:srgbClr val="1F2329"/>
                           </a:solidFill>
-                          <a:latin typeface="微软雅黑" pitchFamily="34" charset="0"/>
-                          <a:ea typeface="微软雅黑" pitchFamily="34" charset="-122"/>
-                          <a:cs typeface="微软雅黑" pitchFamily="34" charset="-120"/>
+                          <a:latin typeface="微软雅黑" panose="020B0503020204020204" pitchFamily="34" charset="-122"/>
+                          <a:ea typeface="微软雅黑" panose="020B0503020204020204" pitchFamily="34" charset="-122"/>
+                          <a:cs typeface="微软雅黑" panose="020B0503020204020204" pitchFamily="34" charset="-120"/>
                         </a:rPr>
                         <a:t>列优先+两已知地址反推，2024填6/2026填8族</a:t>
                       </a:r>
                       <a:endParaRPr lang="en-US" sz="1500" dirty="0">
-                        <a:latin typeface="微软雅黑" charset="0"/>
-                        <a:ea typeface="微软雅黑" charset="0"/>
-                        <a:cs typeface="微软雅黑" charset="0"/>
+                        <a:latin typeface="微软雅黑" panose="020B0503020204020204" pitchFamily="34" charset="-122"/>
+                        <a:ea typeface="微软雅黑" panose="020B0503020204020204" pitchFamily="34" charset="-122"/>
+                        <a:cs typeface="微软雅黑" panose="020B0503020204020204" pitchFamily="34" charset="-122"/>
                       </a:endParaRPr>
                     </a:p>
                   </a:txBody>
-                  <a:tcPr marL="91440" marR="91440" marT="45720" marB="45720" anchor="ctr">
+                  <a:tcPr anchor="ctr">
                     <a:lnL w="9525" cap="flat" cmpd="sng" algn="ctr">
                       <a:solidFill>
                         <a:srgbClr val="D8DBE0"/>
@@ -4165,7 +4019,7 @@
                     <a:bodyPr/>
                     <a:lstStyle/>
                     <a:p>
-                      <a:pPr algn="l" indent="0" marL="0">
+                      <a:pPr marL="0" indent="0" algn="l">
                         <a:buNone/>
                       </a:pPr>
                       <a:r>
@@ -4173,20 +4027,20 @@
                           <a:solidFill>
                             <a:srgbClr val="1F2329"/>
                           </a:solidFill>
-                          <a:latin typeface="微软雅黑" pitchFamily="34" charset="0"/>
-                          <a:ea typeface="微软雅黑" pitchFamily="34" charset="-122"/>
-                          <a:cs typeface="微软雅黑" pitchFamily="34" charset="-120"/>
+                          <a:latin typeface="微软雅黑" panose="020B0503020204020204" pitchFamily="34" charset="-122"/>
+                          <a:ea typeface="微软雅黑" panose="020B0503020204020204" pitchFamily="34" charset="-122"/>
+                          <a:cs typeface="微软雅黑" panose="020B0503020204020204" pitchFamily="34" charset="-120"/>
                         </a:rPr>
                         <a:t>5选3</a:t>
                       </a:r>
                       <a:endParaRPr lang="en-US" sz="1500" dirty="0">
-                        <a:latin typeface="微软雅黑" charset="0"/>
-                        <a:ea typeface="微软雅黑" charset="0"/>
-                        <a:cs typeface="微软雅黑" charset="0"/>
+                        <a:latin typeface="微软雅黑" panose="020B0503020204020204" pitchFamily="34" charset="-122"/>
+                        <a:ea typeface="微软雅黑" panose="020B0503020204020204" pitchFamily="34" charset="-122"/>
+                        <a:cs typeface="微软雅黑" panose="020B0503020204020204" pitchFamily="34" charset="-122"/>
                       </a:endParaRPr>
                     </a:p>
                   </a:txBody>
-                  <a:tcPr marL="91440" marR="91440" marT="45720" marB="45720" anchor="ctr">
+                  <a:tcPr anchor="ctr">
                     <a:lnL w="9525" cap="flat" cmpd="sng" algn="ctr">
                       <a:solidFill>
                         <a:srgbClr val="D8DBE0"/>
@@ -4233,7 +4087,7 @@
                     <a:bodyPr/>
                     <a:lstStyle/>
                     <a:p>
-                      <a:pPr algn="l" indent="0" marL="0">
+                      <a:pPr marL="0" indent="0" algn="l">
                         <a:buNone/>
                       </a:pPr>
                       <a:r>
@@ -4241,20 +4095,20 @@
                           <a:solidFill>
                             <a:srgbClr val="1F2329"/>
                           </a:solidFill>
-                          <a:latin typeface="微软雅黑" pitchFamily="34" charset="0"/>
-                          <a:ea typeface="微软雅黑" pitchFamily="34" charset="-122"/>
-                          <a:cs typeface="微软雅黑" pitchFamily="34" charset="-120"/>
+                          <a:latin typeface="微软雅黑" panose="020B0503020204020204" pitchFamily="34" charset="-122"/>
+                          <a:ea typeface="微软雅黑" panose="020B0503020204020204" pitchFamily="34" charset="-122"/>
+                          <a:cs typeface="微软雅黑" panose="020B0503020204020204" pitchFamily="34" charset="-120"/>
                         </a:rPr>
                         <a:t>二维数组地址</a:t>
                       </a:r>
                       <a:endParaRPr lang="en-US" sz="1500" dirty="0">
-                        <a:latin typeface="微软雅黑" charset="0"/>
-                        <a:ea typeface="微软雅黑" charset="0"/>
-                        <a:cs typeface="微软雅黑" charset="0"/>
+                        <a:latin typeface="微软雅黑" panose="020B0503020204020204" pitchFamily="34" charset="-122"/>
+                        <a:ea typeface="微软雅黑" panose="020B0503020204020204" pitchFamily="34" charset="-122"/>
+                        <a:cs typeface="微软雅黑" panose="020B0503020204020204" pitchFamily="34" charset="-122"/>
                       </a:endParaRPr>
                     </a:p>
                   </a:txBody>
-                  <a:tcPr marL="91440" marR="91440" marT="45720" marB="45720" anchor="ctr">
+                  <a:tcPr anchor="ctr">
                     <a:lnL w="9525" cap="flat" cmpd="sng" algn="ctr">
                       <a:solidFill>
                         <a:srgbClr val="D8DBE0"/>
@@ -4301,7 +4155,7 @@
                     <a:bodyPr/>
                     <a:lstStyle/>
                     <a:p>
-                      <a:pPr algn="l" indent="0" marL="0">
+                      <a:pPr marL="0" indent="0" algn="l">
                         <a:buNone/>
                       </a:pPr>
                       <a:r>
@@ -4309,20 +4163,20 @@
                           <a:solidFill>
                             <a:srgbClr val="1F2329"/>
                           </a:solidFill>
-                          <a:latin typeface="微软雅黑" pitchFamily="34" charset="0"/>
-                          <a:ea typeface="微软雅黑" pitchFamily="34" charset="-122"/>
-                          <a:cs typeface="微软雅黑" pitchFamily="34" charset="-120"/>
+                          <a:latin typeface="微软雅黑" panose="020B0503020204020204" pitchFamily="34" charset="-122"/>
+                          <a:ea typeface="微软雅黑" panose="020B0503020204020204" pitchFamily="34" charset="-122"/>
+                          <a:cs typeface="微软雅黑" panose="020B0503020204020204" pitchFamily="34" charset="-120"/>
                         </a:rPr>
                         <a:t>列优先求A[5][7]，2024填6原题形态</a:t>
                       </a:r>
                       <a:endParaRPr lang="en-US" sz="1500" dirty="0">
-                        <a:latin typeface="微软雅黑" charset="0"/>
-                        <a:ea typeface="微软雅黑" charset="0"/>
-                        <a:cs typeface="微软雅黑" charset="0"/>
+                        <a:latin typeface="微软雅黑" panose="020B0503020204020204" pitchFamily="34" charset="-122"/>
+                        <a:ea typeface="微软雅黑" panose="020B0503020204020204" pitchFamily="34" charset="-122"/>
+                        <a:cs typeface="微软雅黑" panose="020B0503020204020204" pitchFamily="34" charset="-122"/>
                       </a:endParaRPr>
                     </a:p>
                   </a:txBody>
-                  <a:tcPr marL="91440" marR="91440" marT="45720" marB="45720" anchor="ctr">
+                  <a:tcPr anchor="ctr">
                     <a:lnL w="9525" cap="flat" cmpd="sng" algn="ctr">
                       <a:solidFill>
                         <a:srgbClr val="D8DBE0"/>
@@ -4371,7 +4225,7 @@
                     <a:bodyPr/>
                     <a:lstStyle/>
                     <a:p>
-                      <a:pPr algn="l" indent="0" marL="0">
+                      <a:pPr marL="0" indent="0" algn="l">
                         <a:buNone/>
                       </a:pPr>
                       <a:r>
@@ -4379,20 +4233,20 @@
                           <a:solidFill>
                             <a:srgbClr val="1F2329"/>
                           </a:solidFill>
-                          <a:latin typeface="微软雅黑" pitchFamily="34" charset="0"/>
-                          <a:ea typeface="微软雅黑" pitchFamily="34" charset="-122"/>
-                          <a:cs typeface="微软雅黑" pitchFamily="34" charset="-120"/>
+                          <a:latin typeface="微软雅黑" panose="020B0503020204020204" pitchFamily="34" charset="-122"/>
+                          <a:ea typeface="微软雅黑" panose="020B0503020204020204" pitchFamily="34" charset="-122"/>
+                          <a:cs typeface="微软雅黑" panose="020B0503020204020204" pitchFamily="34" charset="-120"/>
                         </a:rPr>
                         <a:t>5选4</a:t>
                       </a:r>
                       <a:endParaRPr lang="en-US" sz="1500" dirty="0">
-                        <a:latin typeface="微软雅黑" charset="0"/>
-                        <a:ea typeface="微软雅黑" charset="0"/>
-                        <a:cs typeface="微软雅黑" charset="0"/>
+                        <a:latin typeface="微软雅黑" panose="020B0503020204020204" pitchFamily="34" charset="-122"/>
+                        <a:ea typeface="微软雅黑" panose="020B0503020204020204" pitchFamily="34" charset="-122"/>
+                        <a:cs typeface="微软雅黑" panose="020B0503020204020204" pitchFamily="34" charset="-122"/>
                       </a:endParaRPr>
                     </a:p>
                   </a:txBody>
-                  <a:tcPr marL="91440" marR="91440" marT="45720" marB="45720" anchor="ctr">
+                  <a:tcPr anchor="ctr">
                     <a:lnL w="9525" cap="flat" cmpd="sng" algn="ctr">
                       <a:solidFill>
                         <a:srgbClr val="D8DBE0"/>
@@ -4439,7 +4293,7 @@
                     <a:bodyPr/>
                     <a:lstStyle/>
                     <a:p>
-                      <a:pPr algn="l" indent="0" marL="0">
+                      <a:pPr marL="0" indent="0" algn="l">
                         <a:buNone/>
                       </a:pPr>
                       <a:r>
@@ -4447,20 +4301,20 @@
                           <a:solidFill>
                             <a:srgbClr val="1F2329"/>
                           </a:solidFill>
-                          <a:latin typeface="微软雅黑" pitchFamily="34" charset="0"/>
-                          <a:ea typeface="微软雅黑" pitchFamily="34" charset="-122"/>
-                          <a:cs typeface="微软雅黑" pitchFamily="34" charset="-120"/>
+                          <a:latin typeface="微软雅黑" panose="020B0503020204020204" pitchFamily="34" charset="-122"/>
+                          <a:ea typeface="微软雅黑" panose="020B0503020204020204" pitchFamily="34" charset="-122"/>
+                          <a:cs typeface="微软雅黑" panose="020B0503020204020204" pitchFamily="34" charset="-120"/>
                         </a:rPr>
                         <a:t>二维数组地址</a:t>
                       </a:r>
                       <a:endParaRPr lang="en-US" sz="1500" dirty="0">
-                        <a:latin typeface="微软雅黑" charset="0"/>
-                        <a:ea typeface="微软雅黑" charset="0"/>
-                        <a:cs typeface="微软雅黑" charset="0"/>
+                        <a:latin typeface="微软雅黑" panose="020B0503020204020204" pitchFamily="34" charset="-122"/>
+                        <a:ea typeface="微软雅黑" panose="020B0503020204020204" pitchFamily="34" charset="-122"/>
+                        <a:cs typeface="微软雅黑" panose="020B0503020204020204" pitchFamily="34" charset="-122"/>
                       </a:endParaRPr>
                     </a:p>
                   </a:txBody>
-                  <a:tcPr marL="91440" marR="91440" marT="45720" marB="45720" anchor="ctr">
+                  <a:tcPr anchor="ctr">
                     <a:lnL w="9525" cap="flat" cmpd="sng" algn="ctr">
                       <a:solidFill>
                         <a:srgbClr val="D8DBE0"/>
@@ -4507,7 +4361,7 @@
                     <a:bodyPr/>
                     <a:lstStyle/>
                     <a:p>
-                      <a:pPr algn="l" indent="0" marL="0">
+                      <a:pPr marL="0" indent="0" algn="l">
                         <a:buNone/>
                       </a:pPr>
                       <a:r>
@@ -4515,20 +4369,20 @@
                           <a:solidFill>
                             <a:srgbClr val="1F2329"/>
                           </a:solidFill>
-                          <a:latin typeface="微软雅黑" pitchFamily="34" charset="0"/>
-                          <a:ea typeface="微软雅黑" pitchFamily="34" charset="-122"/>
-                          <a:cs typeface="微软雅黑" pitchFamily="34" charset="-120"/>
+                          <a:latin typeface="微软雅黑" panose="020B0503020204020204" pitchFamily="34" charset="-122"/>
+                          <a:ea typeface="微软雅黑" panose="020B0503020204020204" pitchFamily="34" charset="-122"/>
+                          <a:cs typeface="微软雅黑" panose="020B0503020204020204" pitchFamily="34" charset="-120"/>
                         </a:rPr>
                         <a:t>行优先两点反推维度，2026填8推导型</a:t>
                       </a:r>
                       <a:endParaRPr lang="en-US" sz="1500" dirty="0">
-                        <a:latin typeface="微软雅黑" charset="0"/>
-                        <a:ea typeface="微软雅黑" charset="0"/>
-                        <a:cs typeface="微软雅黑" charset="0"/>
+                        <a:latin typeface="微软雅黑" panose="020B0503020204020204" pitchFamily="34" charset="-122"/>
+                        <a:ea typeface="微软雅黑" panose="020B0503020204020204" pitchFamily="34" charset="-122"/>
+                        <a:cs typeface="微软雅黑" panose="020B0503020204020204" pitchFamily="34" charset="-122"/>
                       </a:endParaRPr>
                     </a:p>
                   </a:txBody>
-                  <a:tcPr marL="91440" marR="91440" marT="45720" marB="45720" anchor="ctr">
+                  <a:tcPr anchor="ctr">
                     <a:lnL w="9525" cap="flat" cmpd="sng" algn="ctr">
                       <a:solidFill>
                         <a:srgbClr val="D8DBE0"/>
@@ -4577,7 +4431,7 @@
                     <a:bodyPr/>
                     <a:lstStyle/>
                     <a:p>
-                      <a:pPr algn="l" indent="0" marL="0">
+                      <a:pPr marL="0" indent="0" algn="l">
                         <a:buNone/>
                       </a:pPr>
                       <a:r>
@@ -4585,20 +4439,20 @@
                           <a:solidFill>
                             <a:srgbClr val="1F2329"/>
                           </a:solidFill>
-                          <a:latin typeface="微软雅黑" pitchFamily="34" charset="0"/>
-                          <a:ea typeface="微软雅黑" pitchFamily="34" charset="-122"/>
-                          <a:cs typeface="微软雅黑" pitchFamily="34" charset="-120"/>
+                          <a:latin typeface="微软雅黑" panose="020B0503020204020204" pitchFamily="34" charset="-122"/>
+                          <a:ea typeface="微软雅黑" panose="020B0503020204020204" pitchFamily="34" charset="-122"/>
+                          <a:cs typeface="微软雅黑" panose="020B0503020204020204" pitchFamily="34" charset="-120"/>
                         </a:rPr>
                         <a:t>5选5</a:t>
                       </a:r>
                       <a:endParaRPr lang="en-US" sz="1500" dirty="0">
-                        <a:latin typeface="微软雅黑" charset="0"/>
-                        <a:ea typeface="微软雅黑" charset="0"/>
-                        <a:cs typeface="微软雅黑" charset="0"/>
+                        <a:latin typeface="微软雅黑" panose="020B0503020204020204" pitchFamily="34" charset="-122"/>
+                        <a:ea typeface="微软雅黑" panose="020B0503020204020204" pitchFamily="34" charset="-122"/>
+                        <a:cs typeface="微软雅黑" panose="020B0503020204020204" pitchFamily="34" charset="-122"/>
                       </a:endParaRPr>
                     </a:p>
                   </a:txBody>
-                  <a:tcPr marL="91440" marR="91440" marT="45720" marB="45720" anchor="ctr">
+                  <a:tcPr anchor="ctr">
                     <a:lnL w="9525" cap="flat" cmpd="sng" algn="ctr">
                       <a:solidFill>
                         <a:srgbClr val="D8DBE0"/>
@@ -4645,7 +4499,7 @@
                     <a:bodyPr/>
                     <a:lstStyle/>
                     <a:p>
-                      <a:pPr algn="l" indent="0" marL="0">
+                      <a:pPr marL="0" indent="0" algn="l">
                         <a:buNone/>
                       </a:pPr>
                       <a:r>
@@ -4653,20 +4507,20 @@
                           <a:solidFill>
                             <a:srgbClr val="1F2329"/>
                           </a:solidFill>
-                          <a:latin typeface="微软雅黑" pitchFamily="34" charset="0"/>
-                          <a:ea typeface="微软雅黑" pitchFamily="34" charset="-122"/>
-                          <a:cs typeface="微软雅黑" pitchFamily="34" charset="-120"/>
+                          <a:latin typeface="微软雅黑" panose="020B0503020204020204" pitchFamily="34" charset="-122"/>
+                          <a:ea typeface="微软雅黑" panose="020B0503020204020204" pitchFamily="34" charset="-122"/>
+                          <a:cs typeface="微软雅黑" panose="020B0503020204020204" pitchFamily="34" charset="-120"/>
                         </a:rPr>
                         <a:t>二维数组地址</a:t>
                       </a:r>
                       <a:endParaRPr lang="en-US" sz="1500" dirty="0">
-                        <a:latin typeface="微软雅黑" charset="0"/>
-                        <a:ea typeface="微软雅黑" charset="0"/>
-                        <a:cs typeface="微软雅黑" charset="0"/>
+                        <a:latin typeface="微软雅黑" panose="020B0503020204020204" pitchFamily="34" charset="-122"/>
+                        <a:ea typeface="微软雅黑" panose="020B0503020204020204" pitchFamily="34" charset="-122"/>
+                        <a:cs typeface="微软雅黑" panose="020B0503020204020204" pitchFamily="34" charset="-122"/>
                       </a:endParaRPr>
                     </a:p>
                   </a:txBody>
-                  <a:tcPr marL="91440" marR="91440" marT="45720" marB="45720" anchor="ctr">
+                  <a:tcPr anchor="ctr">
                     <a:lnL w="9525" cap="flat" cmpd="sng" algn="ctr">
                       <a:solidFill>
                         <a:srgbClr val="D8DBE0"/>
@@ -4713,7 +4567,7 @@
                     <a:bodyPr/>
                     <a:lstStyle/>
                     <a:p>
-                      <a:pPr algn="l" indent="0" marL="0">
+                      <a:pPr marL="0" indent="0" algn="l">
                         <a:buNone/>
                       </a:pPr>
                       <a:r>
@@ -4721,20 +4575,20 @@
                           <a:solidFill>
                             <a:srgbClr val="1F2329"/>
                           </a:solidFill>
-                          <a:latin typeface="微软雅黑" pitchFamily="34" charset="0"/>
-                          <a:ea typeface="微软雅黑" pitchFamily="34" charset="-122"/>
-                          <a:cs typeface="微软雅黑" pitchFamily="34" charset="-120"/>
+                          <a:latin typeface="微软雅黑" panose="020B0503020204020204" pitchFamily="34" charset="-122"/>
+                          <a:ea typeface="微软雅黑" panose="020B0503020204020204" pitchFamily="34" charset="-122"/>
+                          <a:cs typeface="微软雅黑" panose="020B0503020204020204" pitchFamily="34" charset="-120"/>
                         </a:rPr>
                         <a:t>行优先两元素地址反推A[?]，2026填8同型</a:t>
                       </a:r>
                       <a:endParaRPr lang="en-US" sz="1500" dirty="0">
-                        <a:latin typeface="微软雅黑" charset="0"/>
-                        <a:ea typeface="微软雅黑" charset="0"/>
-                        <a:cs typeface="微软雅黑" charset="0"/>
+                        <a:latin typeface="微软雅黑" panose="020B0503020204020204" pitchFamily="34" charset="-122"/>
+                        <a:ea typeface="微软雅黑" panose="020B0503020204020204" pitchFamily="34" charset="-122"/>
+                        <a:cs typeface="微软雅黑" panose="020B0503020204020204" pitchFamily="34" charset="-122"/>
                       </a:endParaRPr>
                     </a:p>
                   </a:txBody>
-                  <a:tcPr marL="91440" marR="91440" marT="45720" marB="45720" anchor="ctr">
+                  <a:tcPr anchor="ctr">
                     <a:lnL w="9525" cap="flat" cmpd="sng" algn="ctr">
                       <a:solidFill>
                         <a:srgbClr val="D8DBE0"/>
@@ -4783,7 +4637,7 @@
                     <a:bodyPr/>
                     <a:lstStyle/>
                     <a:p>
-                      <a:pPr algn="l" indent="0" marL="0">
+                      <a:pPr marL="0" indent="0" algn="l">
                         <a:buNone/>
                       </a:pPr>
                       <a:r>
@@ -4791,20 +4645,20 @@
                           <a:solidFill>
                             <a:srgbClr val="1F2329"/>
                           </a:solidFill>
-                          <a:latin typeface="微软雅黑" pitchFamily="34" charset="0"/>
-                          <a:ea typeface="微软雅黑" pitchFamily="34" charset="-122"/>
-                          <a:cs typeface="微软雅黑" pitchFamily="34" charset="-120"/>
+                          <a:latin typeface="微软雅黑" panose="020B0503020204020204" pitchFamily="34" charset="-122"/>
+                          <a:ea typeface="微软雅黑" panose="020B0503020204020204" pitchFamily="34" charset="-122"/>
+                          <a:cs typeface="微软雅黑" panose="020B0503020204020204" pitchFamily="34" charset="-120"/>
                         </a:rPr>
                         <a:t>5选6</a:t>
                       </a:r>
                       <a:endParaRPr lang="en-US" sz="1500" dirty="0">
-                        <a:latin typeface="微软雅黑" charset="0"/>
-                        <a:ea typeface="微软雅黑" charset="0"/>
-                        <a:cs typeface="微软雅黑" charset="0"/>
+                        <a:latin typeface="微软雅黑" panose="020B0503020204020204" pitchFamily="34" charset="-122"/>
+                        <a:ea typeface="微软雅黑" panose="020B0503020204020204" pitchFamily="34" charset="-122"/>
+                        <a:cs typeface="微软雅黑" panose="020B0503020204020204" pitchFamily="34" charset="-122"/>
                       </a:endParaRPr>
                     </a:p>
                   </a:txBody>
-                  <a:tcPr marL="91440" marR="91440" marT="45720" marB="45720" anchor="ctr">
+                  <a:tcPr anchor="ctr">
                     <a:lnL w="9525" cap="flat" cmpd="sng" algn="ctr">
                       <a:solidFill>
                         <a:srgbClr val="D8DBE0"/>
@@ -4851,7 +4705,7 @@
                     <a:bodyPr/>
                     <a:lstStyle/>
                     <a:p>
-                      <a:pPr algn="l" indent="0" marL="0">
+                      <a:pPr marL="0" indent="0" algn="l">
                         <a:buNone/>
                       </a:pPr>
                       <a:r>
@@ -4859,20 +4713,20 @@
                           <a:solidFill>
                             <a:srgbClr val="1F2329"/>
                           </a:solidFill>
-                          <a:latin typeface="微软雅黑" pitchFamily="34" charset="0"/>
-                          <a:ea typeface="微软雅黑" pitchFamily="34" charset="-122"/>
-                          <a:cs typeface="微软雅黑" pitchFamily="34" charset="-120"/>
+                          <a:latin typeface="微软雅黑" panose="020B0503020204020204" pitchFamily="34" charset="-122"/>
+                          <a:ea typeface="微软雅黑" panose="020B0503020204020204" pitchFamily="34" charset="-122"/>
+                          <a:cs typeface="微软雅黑" panose="020B0503020204020204" pitchFamily="34" charset="-120"/>
                         </a:rPr>
                         <a:t>二维数组地址</a:t>
                       </a:r>
                       <a:endParaRPr lang="en-US" sz="1500" dirty="0">
-                        <a:latin typeface="微软雅黑" charset="0"/>
-                        <a:ea typeface="微软雅黑" charset="0"/>
-                        <a:cs typeface="微软雅黑" charset="0"/>
+                        <a:latin typeface="微软雅黑" panose="020B0503020204020204" pitchFamily="34" charset="-122"/>
+                        <a:ea typeface="微软雅黑" panose="020B0503020204020204" pitchFamily="34" charset="-122"/>
+                        <a:cs typeface="微软雅黑" panose="020B0503020204020204" pitchFamily="34" charset="-122"/>
                       </a:endParaRPr>
                     </a:p>
                   </a:txBody>
-                  <a:tcPr marL="91440" marR="91440" marT="45720" marB="45720" anchor="ctr">
+                  <a:tcPr anchor="ctr">
                     <a:lnL w="9525" cap="flat" cmpd="sng" algn="ctr">
                       <a:solidFill>
                         <a:srgbClr val="D8DBE0"/>
@@ -4919,7 +4773,7 @@
                     <a:bodyPr/>
                     <a:lstStyle/>
                     <a:p>
-                      <a:pPr algn="l" indent="0" marL="0">
+                      <a:pPr marL="0" indent="0" algn="l">
                         <a:buNone/>
                       </a:pPr>
                       <a:r>
@@ -4927,20 +4781,20 @@
                           <a:solidFill>
                             <a:srgbClr val="1F2329"/>
                           </a:solidFill>
-                          <a:latin typeface="微软雅黑" pitchFamily="34" charset="0"/>
-                          <a:ea typeface="微软雅黑" pitchFamily="34" charset="-122"/>
-                          <a:cs typeface="微软雅黑" pitchFamily="34" charset="-120"/>
+                          <a:latin typeface="微软雅黑" panose="020B0503020204020204" pitchFamily="34" charset="-122"/>
+                          <a:ea typeface="微软雅黑" panose="020B0503020204020204" pitchFamily="34" charset="-122"/>
+                          <a:cs typeface="微软雅黑" panose="020B0503020204020204" pitchFamily="34" charset="-120"/>
                         </a:rPr>
                         <a:t>列优先求A[8][9]</a:t>
                       </a:r>
                       <a:endParaRPr lang="en-US" sz="1500" dirty="0">
-                        <a:latin typeface="微软雅黑" charset="0"/>
-                        <a:ea typeface="微软雅黑" charset="0"/>
-                        <a:cs typeface="微软雅黑" charset="0"/>
+                        <a:latin typeface="微软雅黑" panose="020B0503020204020204" pitchFamily="34" charset="-122"/>
+                        <a:ea typeface="微软雅黑" panose="020B0503020204020204" pitchFamily="34" charset="-122"/>
+                        <a:cs typeface="微软雅黑" panose="020B0503020204020204" pitchFamily="34" charset="-122"/>
                       </a:endParaRPr>
                     </a:p>
                   </a:txBody>
-                  <a:tcPr marL="91440" marR="91440" marT="45720" marB="45720" anchor="ctr">
+                  <a:tcPr anchor="ctr">
                     <a:lnL w="9525" cap="flat" cmpd="sng" algn="ctr">
                       <a:solidFill>
                         <a:srgbClr val="D8DBE0"/>
@@ -4997,7 +4851,7 @@
 
 <file path=ppt/slides/slide4.xml><?xml version="1.0" encoding="utf-8"?>
 <p:sld xmlns:a="http://schemas.openxmlformats.org/drawingml/2006/main" xmlns:r="http://schemas.openxmlformats.org/officeDocument/2006/relationships" xmlns:p="http://schemas.openxmlformats.org/presentationml/2006/main">
-  <p:cSld name="Slide 4">
+  <p:cSld>
     <p:bg>
       <p:bgPr>
         <a:blipFill dpi="0" rotWithShape="1">
@@ -5041,13 +4895,12 @@
             <a:avLst/>
           </a:prstGeom>
           <a:noFill/>
-          <a:ln/>
         </p:spPr>
         <p:txBody>
           <a:bodyPr wrap="square" rtlCol="0" anchor="ctr"/>
           <a:lstStyle/>
           <a:p>
-            <a:pPr algn="r" indent="0" marL="0">
+            <a:pPr marL="0" indent="0" algn="r">
               <a:buNone/>
             </a:pPr>
             <a:r>
@@ -5055,9 +4908,9 @@
                 <a:solidFill>
                   <a:srgbClr val="8A9099"/>
                 </a:solidFill>
-                <a:latin typeface="微软雅黑" pitchFamily="34" charset="0"/>
-                <a:ea typeface="微软雅黑" pitchFamily="34" charset="-122"/>
-                <a:cs typeface="微软雅黑" pitchFamily="34" charset="-120"/>
+                <a:latin typeface="微软雅黑" panose="020B0503020204020204" pitchFamily="34" charset="-122"/>
+                <a:ea typeface="微软雅黑" panose="020B0503020204020204" pitchFamily="34" charset="-122"/>
+                <a:cs typeface="微软雅黑" panose="020B0503020204020204" pitchFamily="34" charset="-120"/>
               </a:rPr>
               <a:t>4 / 10</a:t>
             </a:r>
@@ -5080,13 +4933,12 @@
             <a:avLst/>
           </a:prstGeom>
           <a:noFill/>
-          <a:ln/>
         </p:spPr>
         <p:txBody>
           <a:bodyPr wrap="square" rtlCol="0" anchor="ctr"/>
           <a:lstStyle/>
           <a:p>
-            <a:pPr algn="l" indent="0" marL="0">
+            <a:pPr marL="0" indent="0" algn="l">
               <a:buNone/>
             </a:pPr>
             <a:r>
@@ -5094,9 +4946,9 @@
                 <a:solidFill>
                   <a:srgbClr val="1F4E9C"/>
                 </a:solidFill>
-                <a:latin typeface="微软雅黑" pitchFamily="34" charset="0"/>
-                <a:ea typeface="微软雅黑" pitchFamily="34" charset="-122"/>
-                <a:cs typeface="微软雅黑" pitchFamily="34" charset="-120"/>
+                <a:latin typeface="微软雅黑" panose="020B0503020204020204" pitchFamily="34" charset="-122"/>
+                <a:ea typeface="微软雅黑" panose="020B0503020204020204" pitchFamily="34" charset="-122"/>
+                <a:cs typeface="微软雅黑" panose="020B0503020204020204" pitchFamily="34" charset="-120"/>
               </a:rPr>
               <a:t>有价值必做</a:t>
             </a:r>
@@ -5119,13 +4971,12 @@
             <a:avLst/>
           </a:prstGeom>
           <a:noFill/>
-          <a:ln/>
         </p:spPr>
         <p:txBody>
           <a:bodyPr wrap="square" rtlCol="0" anchor="ctr"/>
           <a:lstStyle/>
           <a:p>
-            <a:pPr algn="l" indent="0" marL="0">
+            <a:pPr marL="0" indent="0" algn="l">
               <a:buNone/>
             </a:pPr>
             <a:r>
@@ -5133,9 +4984,9 @@
                 <a:solidFill>
                   <a:srgbClr val="1F2329"/>
                 </a:solidFill>
-                <a:latin typeface="微软雅黑" pitchFamily="34" charset="0"/>
-                <a:ea typeface="微软雅黑" pitchFamily="34" charset="-122"/>
-                <a:cs typeface="微软雅黑" pitchFamily="34" charset="-120"/>
+                <a:latin typeface="微软雅黑" panose="020B0503020204020204" pitchFamily="34" charset="-122"/>
+                <a:ea typeface="微软雅黑" panose="020B0503020204020204" pitchFamily="34" charset="-122"/>
+                <a:cs typeface="微软雅黑" panose="020B0503020204020204" pitchFamily="34" charset="-120"/>
               </a:rPr>
               <a:t>必做题（2/4）</a:t>
             </a:r>
@@ -5149,17 +5000,11 @@
           <p:cNvGraphicFramePr>
             <a:graphicFrameLocks noGrp="1"/>
           </p:cNvGraphicFramePr>
-          <p:nvPr>
-            <p:extLst>
-              <p:ext uri="{D42A27DB-BD31-4B8C-83A1-F6EECF244321}">
-                <p14:modId xmlns:p14="http://schemas.microsoft.com/office/powerpoint/2010/main" val="1579011935"/>
-              </p:ext>
-            </p:extLst>
-          </p:nvPr>
+          <p:nvPr/>
         </p:nvGraphicFramePr>
         <p:xfrm>
           <a:off x="822960" y="2395728"/>
-          <a:ext cx="10545775" cy="914400"/>
+          <a:ext cx="10545775" cy="2523744"/>
         </p:xfrm>
         <a:graphic>
           <a:graphicData uri="http://schemas.openxmlformats.org/drawingml/2006/table">
@@ -5176,7 +5021,7 @@
                     <a:bodyPr/>
                     <a:lstStyle/>
                     <a:p>
-                      <a:pPr algn="l" indent="0" marL="0">
+                      <a:pPr marL="0" indent="0" algn="l">
                         <a:buNone/>
                       </a:pPr>
                       <a:r>
@@ -5184,20 +5029,20 @@
                           <a:solidFill>
                             <a:srgbClr val="1F4E9C"/>
                           </a:solidFill>
-                          <a:latin typeface="微软雅黑" pitchFamily="34" charset="0"/>
-                          <a:ea typeface="微软雅黑" pitchFamily="34" charset="-122"/>
-                          <a:cs typeface="微软雅黑" pitchFamily="34" charset="-120"/>
+                          <a:latin typeface="微软雅黑" panose="020B0503020204020204" pitchFamily="34" charset="-122"/>
+                          <a:ea typeface="微软雅黑" panose="020B0503020204020204" pitchFamily="34" charset="-122"/>
+                          <a:cs typeface="微软雅黑" panose="020B0503020204020204" pitchFamily="34" charset="-120"/>
                         </a:rPr>
                         <a:t>题号</a:t>
                       </a:r>
                       <a:endParaRPr lang="en-US" sz="1500" dirty="0">
-                        <a:latin typeface="微软雅黑" charset="0"/>
-                        <a:ea typeface="微软雅黑" charset="0"/>
-                        <a:cs typeface="微软雅黑" charset="0"/>
+                        <a:latin typeface="微软雅黑" panose="020B0503020204020204" pitchFamily="34" charset="-122"/>
+                        <a:ea typeface="微软雅黑" panose="020B0503020204020204" pitchFamily="34" charset="-122"/>
+                        <a:cs typeface="微软雅黑" panose="020B0503020204020204" pitchFamily="34" charset="-122"/>
                       </a:endParaRPr>
                     </a:p>
                   </a:txBody>
-                  <a:tcPr marL="91440" marR="91440" marT="45720" marB="45720" anchor="ctr">
+                  <a:tcPr anchor="ctr">
                     <a:lnL w="9525" cap="flat" cmpd="sng" algn="ctr">
                       <a:solidFill>
                         <a:srgbClr val="D8DBE0"/>
@@ -5244,7 +5089,7 @@
                     <a:bodyPr/>
                     <a:lstStyle/>
                     <a:p>
-                      <a:pPr algn="l" indent="0" marL="0">
+                      <a:pPr marL="0" indent="0" algn="l">
                         <a:buNone/>
                       </a:pPr>
                       <a:r>
@@ -5252,20 +5097,20 @@
                           <a:solidFill>
                             <a:srgbClr val="1F4E9C"/>
                           </a:solidFill>
-                          <a:latin typeface="微软雅黑" pitchFamily="34" charset="0"/>
-                          <a:ea typeface="微软雅黑" pitchFamily="34" charset="-122"/>
-                          <a:cs typeface="微软雅黑" pitchFamily="34" charset="-120"/>
+                          <a:latin typeface="微软雅黑" panose="020B0503020204020204" pitchFamily="34" charset="-122"/>
+                          <a:ea typeface="微软雅黑" panose="020B0503020204020204" pitchFamily="34" charset="-122"/>
+                          <a:cs typeface="微软雅黑" panose="020B0503020204020204" pitchFamily="34" charset="-120"/>
                         </a:rPr>
                         <a:t>考点</a:t>
                       </a:r>
                       <a:endParaRPr lang="en-US" sz="1500" dirty="0">
-                        <a:latin typeface="微软雅黑" charset="0"/>
-                        <a:ea typeface="微软雅黑" charset="0"/>
-                        <a:cs typeface="微软雅黑" charset="0"/>
+                        <a:latin typeface="微软雅黑" panose="020B0503020204020204" pitchFamily="34" charset="-122"/>
+                        <a:ea typeface="微软雅黑" panose="020B0503020204020204" pitchFamily="34" charset="-122"/>
+                        <a:cs typeface="微软雅黑" panose="020B0503020204020204" pitchFamily="34" charset="-122"/>
                       </a:endParaRPr>
                     </a:p>
                   </a:txBody>
-                  <a:tcPr marL="91440" marR="91440" marT="45720" marB="45720" anchor="ctr">
+                  <a:tcPr anchor="ctr">
                     <a:lnL w="9525" cap="flat" cmpd="sng" algn="ctr">
                       <a:solidFill>
                         <a:srgbClr val="D8DBE0"/>
@@ -5312,7 +5157,7 @@
                     <a:bodyPr/>
                     <a:lstStyle/>
                     <a:p>
-                      <a:pPr algn="l" indent="0" marL="0">
+                      <a:pPr marL="0" indent="0" algn="l">
                         <a:buNone/>
                       </a:pPr>
                       <a:r>
@@ -5320,20 +5165,20 @@
                           <a:solidFill>
                             <a:srgbClr val="1F4E9C"/>
                           </a:solidFill>
-                          <a:latin typeface="微软雅黑" pitchFamily="34" charset="0"/>
-                          <a:ea typeface="微软雅黑" pitchFamily="34" charset="-122"/>
-                          <a:cs typeface="微软雅黑" pitchFamily="34" charset="-120"/>
+                          <a:latin typeface="微软雅黑" panose="020B0503020204020204" pitchFamily="34" charset="-122"/>
+                          <a:ea typeface="微软雅黑" panose="020B0503020204020204" pitchFamily="34" charset="-122"/>
+                          <a:cs typeface="微软雅黑" panose="020B0503020204020204" pitchFamily="34" charset="-120"/>
                         </a:rPr>
                         <a:t>价值</a:t>
                       </a:r>
                       <a:endParaRPr lang="en-US" sz="1500" dirty="0">
-                        <a:latin typeface="微软雅黑" charset="0"/>
-                        <a:ea typeface="微软雅黑" charset="0"/>
-                        <a:cs typeface="微软雅黑" charset="0"/>
+                        <a:latin typeface="微软雅黑" panose="020B0503020204020204" pitchFamily="34" charset="-122"/>
+                        <a:ea typeface="微软雅黑" panose="020B0503020204020204" pitchFamily="34" charset="-122"/>
+                        <a:cs typeface="微软雅黑" panose="020B0503020204020204" pitchFamily="34" charset="-122"/>
                       </a:endParaRPr>
                     </a:p>
                   </a:txBody>
-                  <a:tcPr marL="91440" marR="91440" marT="45720" marB="45720" anchor="ctr">
+                  <a:tcPr anchor="ctr">
                     <a:lnL w="9525" cap="flat" cmpd="sng" algn="ctr">
                       <a:solidFill>
                         <a:srgbClr val="D8DBE0"/>
@@ -5382,7 +5227,7 @@
                     <a:bodyPr/>
                     <a:lstStyle/>
                     <a:p>
-                      <a:pPr algn="l" indent="0" marL="0">
+                      <a:pPr marL="0" indent="0" algn="l">
                         <a:buNone/>
                       </a:pPr>
                       <a:r>
@@ -5390,20 +5235,20 @@
                           <a:solidFill>
                             <a:srgbClr val="1F2329"/>
                           </a:solidFill>
-                          <a:latin typeface="微软雅黑" pitchFamily="34" charset="0"/>
-                          <a:ea typeface="微软雅黑" pitchFamily="34" charset="-122"/>
-                          <a:cs typeface="微软雅黑" pitchFamily="34" charset="-120"/>
+                          <a:latin typeface="微软雅黑" panose="020B0503020204020204" pitchFamily="34" charset="-122"/>
+                          <a:ea typeface="微软雅黑" panose="020B0503020204020204" pitchFamily="34" charset="-122"/>
+                          <a:cs typeface="微软雅黑" panose="020B0503020204020204" pitchFamily="34" charset="-120"/>
                         </a:rPr>
                         <a:t>5选7</a:t>
                       </a:r>
                       <a:endParaRPr lang="en-US" sz="1500" dirty="0">
-                        <a:latin typeface="微软雅黑" charset="0"/>
-                        <a:ea typeface="微软雅黑" charset="0"/>
-                        <a:cs typeface="微软雅黑" charset="0"/>
+                        <a:latin typeface="微软雅黑" panose="020B0503020204020204" pitchFamily="34" charset="-122"/>
+                        <a:ea typeface="微软雅黑" panose="020B0503020204020204" pitchFamily="34" charset="-122"/>
+                        <a:cs typeface="微软雅黑" panose="020B0503020204020204" pitchFamily="34" charset="-122"/>
                       </a:endParaRPr>
                     </a:p>
                   </a:txBody>
-                  <a:tcPr marL="91440" marR="91440" marT="45720" marB="45720" anchor="ctr">
+                  <a:tcPr anchor="ctr">
                     <a:lnL w="9525" cap="flat" cmpd="sng" algn="ctr">
                       <a:solidFill>
                         <a:srgbClr val="D8DBE0"/>
@@ -5450,7 +5295,7 @@
                     <a:bodyPr/>
                     <a:lstStyle/>
                     <a:p>
-                      <a:pPr algn="l" indent="0" marL="0">
+                      <a:pPr marL="0" indent="0" algn="l">
                         <a:buNone/>
                       </a:pPr>
                       <a:r>
@@ -5458,20 +5303,20 @@
                           <a:solidFill>
                             <a:srgbClr val="1F2329"/>
                           </a:solidFill>
-                          <a:latin typeface="微软雅黑" pitchFamily="34" charset="0"/>
-                          <a:ea typeface="微软雅黑" pitchFamily="34" charset="-122"/>
-                          <a:cs typeface="微软雅黑" pitchFamily="34" charset="-120"/>
+                          <a:latin typeface="微软雅黑" panose="020B0503020204020204" pitchFamily="34" charset="-122"/>
+                          <a:ea typeface="微软雅黑" panose="020B0503020204020204" pitchFamily="34" charset="-122"/>
+                          <a:cs typeface="微软雅黑" panose="020B0503020204020204" pitchFamily="34" charset="-120"/>
                         </a:rPr>
                         <a:t>三维数组地址</a:t>
                       </a:r>
                       <a:endParaRPr lang="en-US" sz="1500" dirty="0">
-                        <a:latin typeface="微软雅黑" charset="0"/>
-                        <a:ea typeface="微软雅黑" charset="0"/>
-                        <a:cs typeface="微软雅黑" charset="0"/>
+                        <a:latin typeface="微软雅黑" panose="020B0503020204020204" pitchFamily="34" charset="-122"/>
+                        <a:ea typeface="微软雅黑" panose="020B0503020204020204" pitchFamily="34" charset="-122"/>
+                        <a:cs typeface="微软雅黑" panose="020B0503020204020204" pitchFamily="34" charset="-122"/>
                       </a:endParaRPr>
                     </a:p>
                   </a:txBody>
-                  <a:tcPr marL="91440" marR="91440" marT="45720" marB="45720" anchor="ctr">
+                  <a:tcPr anchor="ctr">
                     <a:lnL w="9525" cap="flat" cmpd="sng" algn="ctr">
                       <a:solidFill>
                         <a:srgbClr val="D8DBE0"/>
@@ -5518,7 +5363,7 @@
                     <a:bodyPr/>
                     <a:lstStyle/>
                     <a:p>
-                      <a:pPr algn="l" indent="0" marL="0">
+                      <a:pPr marL="0" indent="0" algn="l">
                         <a:buNone/>
                       </a:pPr>
                       <a:r>
@@ -5526,20 +5371,20 @@
                           <a:solidFill>
                             <a:srgbClr val="1F2329"/>
                           </a:solidFill>
-                          <a:latin typeface="微软雅黑" pitchFamily="34" charset="0"/>
-                          <a:ea typeface="微软雅黑" pitchFamily="34" charset="-122"/>
-                          <a:cs typeface="微软雅黑" pitchFamily="34" charset="-120"/>
+                          <a:latin typeface="微软雅黑" panose="020B0503020204020204" pitchFamily="34" charset="-122"/>
+                          <a:ea typeface="微软雅黑" panose="020B0503020204020204" pitchFamily="34" charset="-122"/>
+                          <a:cs typeface="微软雅黑" panose="020B0503020204020204" pitchFamily="34" charset="-120"/>
                         </a:rPr>
                         <a:t>行优先三维R[6][9][6]求地址，多维推广</a:t>
                       </a:r>
                       <a:endParaRPr lang="en-US" sz="1500" dirty="0">
-                        <a:latin typeface="微软雅黑" charset="0"/>
-                        <a:ea typeface="微软雅黑" charset="0"/>
-                        <a:cs typeface="微软雅黑" charset="0"/>
+                        <a:latin typeface="微软雅黑" panose="020B0503020204020204" pitchFamily="34" charset="-122"/>
+                        <a:ea typeface="微软雅黑" panose="020B0503020204020204" pitchFamily="34" charset="-122"/>
+                        <a:cs typeface="微软雅黑" panose="020B0503020204020204" pitchFamily="34" charset="-122"/>
                       </a:endParaRPr>
                     </a:p>
                   </a:txBody>
-                  <a:tcPr marL="91440" marR="91440" marT="45720" marB="45720" anchor="ctr">
+                  <a:tcPr anchor="ctr">
                     <a:lnL w="9525" cap="flat" cmpd="sng" algn="ctr">
                       <a:solidFill>
                         <a:srgbClr val="D8DBE0"/>
@@ -5588,7 +5433,7 @@
                     <a:bodyPr/>
                     <a:lstStyle/>
                     <a:p>
-                      <a:pPr algn="l" indent="0" marL="0">
+                      <a:pPr marL="0" indent="0" algn="l">
                         <a:buNone/>
                       </a:pPr>
                       <a:r>
@@ -5596,20 +5441,20 @@
                           <a:solidFill>
                             <a:srgbClr val="1F2329"/>
                           </a:solidFill>
-                          <a:latin typeface="微软雅黑" pitchFamily="34" charset="0"/>
-                          <a:ea typeface="微软雅黑" pitchFamily="34" charset="-122"/>
-                          <a:cs typeface="微软雅黑" pitchFamily="34" charset="-120"/>
+                          <a:latin typeface="微软雅黑" panose="020B0503020204020204" pitchFamily="34" charset="-122"/>
+                          <a:ea typeface="微软雅黑" panose="020B0503020204020204" pitchFamily="34" charset="-122"/>
+                          <a:cs typeface="微软雅黑" panose="020B0503020204020204" pitchFamily="34" charset="-120"/>
                         </a:rPr>
                         <a:t>5选15</a:t>
                       </a:r>
                       <a:endParaRPr lang="en-US" sz="1500" dirty="0">
-                        <a:latin typeface="微软雅黑" charset="0"/>
-                        <a:ea typeface="微软雅黑" charset="0"/>
-                        <a:cs typeface="微软雅黑" charset="0"/>
+                        <a:latin typeface="微软雅黑" panose="020B0503020204020204" pitchFamily="34" charset="-122"/>
+                        <a:ea typeface="微软雅黑" panose="020B0503020204020204" pitchFamily="34" charset="-122"/>
+                        <a:cs typeface="微软雅黑" panose="020B0503020204020204" pitchFamily="34" charset="-122"/>
                       </a:endParaRPr>
                     </a:p>
                   </a:txBody>
-                  <a:tcPr marL="91440" marR="91440" marT="45720" marB="45720" anchor="ctr">
+                  <a:tcPr anchor="ctr">
                     <a:lnL w="9525" cap="flat" cmpd="sng" algn="ctr">
                       <a:solidFill>
                         <a:srgbClr val="D8DBE0"/>
@@ -5656,7 +5501,7 @@
                     <a:bodyPr/>
                     <a:lstStyle/>
                     <a:p>
-                      <a:pPr algn="l" indent="0" marL="0">
+                      <a:pPr marL="0" indent="0" algn="l">
                         <a:buNone/>
                       </a:pPr>
                       <a:r>
@@ -5664,20 +5509,20 @@
                           <a:solidFill>
                             <a:srgbClr val="1F2329"/>
                           </a:solidFill>
-                          <a:latin typeface="微软雅黑" pitchFamily="34" charset="0"/>
-                          <a:ea typeface="微软雅黑" pitchFamily="34" charset="-122"/>
-                          <a:cs typeface="微软雅黑" pitchFamily="34" charset="-120"/>
+                          <a:latin typeface="微软雅黑" panose="020B0503020204020204" pitchFamily="34" charset="-122"/>
+                          <a:ea typeface="微软雅黑" panose="020B0503020204020204" pitchFamily="34" charset="-122"/>
+                          <a:cs typeface="微软雅黑" panose="020B0503020204020204" pitchFamily="34" charset="-120"/>
                         </a:rPr>
                         <a:t>广义表长度</a:t>
                       </a:r>
                       <a:endParaRPr lang="en-US" sz="1500" dirty="0">
-                        <a:latin typeface="微软雅黑" charset="0"/>
-                        <a:ea typeface="微软雅黑" charset="0"/>
-                        <a:cs typeface="微软雅黑" charset="0"/>
+                        <a:latin typeface="微软雅黑" panose="020B0503020204020204" pitchFamily="34" charset="-122"/>
+                        <a:ea typeface="微软雅黑" panose="020B0503020204020204" pitchFamily="34" charset="-122"/>
+                        <a:cs typeface="微软雅黑" panose="020B0503020204020204" pitchFamily="34" charset="-122"/>
                       </a:endParaRPr>
                     </a:p>
                   </a:txBody>
-                  <a:tcPr marL="91440" marR="91440" marT="45720" marB="45720" anchor="ctr">
+                  <a:tcPr anchor="ctr">
                     <a:lnL w="9525" cap="flat" cmpd="sng" algn="ctr">
                       <a:solidFill>
                         <a:srgbClr val="D8DBE0"/>
@@ -5724,7 +5569,7 @@
                     <a:bodyPr/>
                     <a:lstStyle/>
                     <a:p>
-                      <a:pPr algn="l" indent="0" marL="0">
+                      <a:pPr marL="0" indent="0" algn="l">
                         <a:buNone/>
                       </a:pPr>
                       <a:r>
@@ -5732,20 +5577,20 @@
                           <a:solidFill>
                             <a:srgbClr val="1F2329"/>
                           </a:solidFill>
-                          <a:latin typeface="微软雅黑" pitchFamily="34" charset="0"/>
-                          <a:ea typeface="微软雅黑" pitchFamily="34" charset="-122"/>
-                          <a:cs typeface="微软雅黑" pitchFamily="34" charset="-120"/>
+                          <a:latin typeface="微软雅黑" panose="020B0503020204020204" pitchFamily="34" charset="-122"/>
+                          <a:ea typeface="微软雅黑" panose="020B0503020204020204" pitchFamily="34" charset="-122"/>
+                          <a:cs typeface="微软雅黑" panose="020B0503020204020204" pitchFamily="34" charset="-120"/>
                         </a:rPr>
                         <a:t>广义表长度计数，概念手算</a:t>
                       </a:r>
                       <a:endParaRPr lang="en-US" sz="1500" dirty="0">
-                        <a:latin typeface="微软雅黑" charset="0"/>
-                        <a:ea typeface="微软雅黑" charset="0"/>
-                        <a:cs typeface="微软雅黑" charset="0"/>
+                        <a:latin typeface="微软雅黑" panose="020B0503020204020204" pitchFamily="34" charset="-122"/>
+                        <a:ea typeface="微软雅黑" panose="020B0503020204020204" pitchFamily="34" charset="-122"/>
+                        <a:cs typeface="微软雅黑" panose="020B0503020204020204" pitchFamily="34" charset="-122"/>
                       </a:endParaRPr>
                     </a:p>
                   </a:txBody>
-                  <a:tcPr marL="91440" marR="91440" marT="45720" marB="45720" anchor="ctr">
+                  <a:tcPr anchor="ctr">
                     <a:lnL w="9525" cap="flat" cmpd="sng" algn="ctr">
                       <a:solidFill>
                         <a:srgbClr val="D8DBE0"/>
@@ -5794,7 +5639,7 @@
                     <a:bodyPr/>
                     <a:lstStyle/>
                     <a:p>
-                      <a:pPr algn="l" indent="0" marL="0">
+                      <a:pPr marL="0" indent="0" algn="l">
                         <a:buNone/>
                       </a:pPr>
                       <a:r>
@@ -5802,20 +5647,20 @@
                           <a:solidFill>
                             <a:srgbClr val="1F2329"/>
                           </a:solidFill>
-                          <a:latin typeface="微软雅黑" pitchFamily="34" charset="0"/>
-                          <a:ea typeface="微软雅黑" pitchFamily="34" charset="-122"/>
-                          <a:cs typeface="微软雅黑" pitchFamily="34" charset="-120"/>
+                          <a:latin typeface="微软雅黑" panose="020B0503020204020204" pitchFamily="34" charset="-122"/>
+                          <a:ea typeface="微软雅黑" panose="020B0503020204020204" pitchFamily="34" charset="-122"/>
+                          <a:cs typeface="微软雅黑" panose="020B0503020204020204" pitchFamily="34" charset="-120"/>
                         </a:rPr>
                         <a:t>5选16</a:t>
                       </a:r>
                       <a:endParaRPr lang="en-US" sz="1500" dirty="0">
-                        <a:latin typeface="微软雅黑" charset="0"/>
-                        <a:ea typeface="微软雅黑" charset="0"/>
-                        <a:cs typeface="微软雅黑" charset="0"/>
+                        <a:latin typeface="微软雅黑" panose="020B0503020204020204" pitchFamily="34" charset="-122"/>
+                        <a:ea typeface="微软雅黑" panose="020B0503020204020204" pitchFamily="34" charset="-122"/>
+                        <a:cs typeface="微软雅黑" panose="020B0503020204020204" pitchFamily="34" charset="-122"/>
                       </a:endParaRPr>
                     </a:p>
                   </a:txBody>
-                  <a:tcPr marL="91440" marR="91440" marT="45720" marB="45720" anchor="ctr">
+                  <a:tcPr anchor="ctr">
                     <a:lnL w="9525" cap="flat" cmpd="sng" algn="ctr">
                       <a:solidFill>
                         <a:srgbClr val="D8DBE0"/>
@@ -5862,7 +5707,7 @@
                     <a:bodyPr/>
                     <a:lstStyle/>
                     <a:p>
-                      <a:pPr algn="l" indent="0" marL="0">
+                      <a:pPr marL="0" indent="0" algn="l">
                         <a:buNone/>
                       </a:pPr>
                       <a:r>
@@ -5870,20 +5715,20 @@
                           <a:solidFill>
                             <a:srgbClr val="1F2329"/>
                           </a:solidFill>
-                          <a:latin typeface="微软雅黑" pitchFamily="34" charset="0"/>
-                          <a:ea typeface="微软雅黑" pitchFamily="34" charset="-122"/>
-                          <a:cs typeface="微软雅黑" pitchFamily="34" charset="-120"/>
+                          <a:latin typeface="微软雅黑" panose="020B0503020204020204" pitchFamily="34" charset="-122"/>
+                          <a:ea typeface="微软雅黑" panose="020B0503020204020204" pitchFamily="34" charset="-122"/>
+                          <a:cs typeface="微软雅黑" panose="020B0503020204020204" pitchFamily="34" charset="-120"/>
                         </a:rPr>
                         <a:t>表头概念</a:t>
                       </a:r>
                       <a:endParaRPr lang="en-US" sz="1500" dirty="0">
-                        <a:latin typeface="微软雅黑" charset="0"/>
-                        <a:ea typeface="微软雅黑" charset="0"/>
-                        <a:cs typeface="微软雅黑" charset="0"/>
+                        <a:latin typeface="微软雅黑" panose="020B0503020204020204" pitchFamily="34" charset="-122"/>
+                        <a:ea typeface="微软雅黑" panose="020B0503020204020204" pitchFamily="34" charset="-122"/>
+                        <a:cs typeface="微软雅黑" panose="020B0503020204020204" pitchFamily="34" charset="-122"/>
                       </a:endParaRPr>
                     </a:p>
                   </a:txBody>
-                  <a:tcPr marL="91440" marR="91440" marT="45720" marB="45720" anchor="ctr">
+                  <a:tcPr anchor="ctr">
                     <a:lnL w="9525" cap="flat" cmpd="sng" algn="ctr">
                       <a:solidFill>
                         <a:srgbClr val="D8DBE0"/>
@@ -5930,7 +5775,7 @@
                     <a:bodyPr/>
                     <a:lstStyle/>
                     <a:p>
-                      <a:pPr algn="l" indent="0" marL="0">
+                      <a:pPr marL="0" indent="0" algn="l">
                         <a:buNone/>
                       </a:pPr>
                       <a:r>
@@ -5938,20 +5783,20 @@
                           <a:solidFill>
                             <a:srgbClr val="1F2329"/>
                           </a:solidFill>
-                          <a:latin typeface="微软雅黑" pitchFamily="34" charset="0"/>
-                          <a:ea typeface="微软雅黑" pitchFamily="34" charset="-122"/>
-                          <a:cs typeface="微软雅黑" pitchFamily="34" charset="-120"/>
+                          <a:latin typeface="微软雅黑" panose="020B0503020204020204" pitchFamily="34" charset="-122"/>
+                          <a:ea typeface="微软雅黑" panose="020B0503020204020204" pitchFamily="34" charset="-122"/>
+                          <a:cs typeface="微软雅黑" panose="020B0503020204020204" pitchFamily="34" charset="-120"/>
                         </a:rPr>
                         <a:t>表头可为原子或子表，head/tail运算前置</a:t>
                       </a:r>
                       <a:endParaRPr lang="en-US" sz="1500" dirty="0">
-                        <a:latin typeface="微软雅黑" charset="0"/>
-                        <a:ea typeface="微软雅黑" charset="0"/>
-                        <a:cs typeface="微软雅黑" charset="0"/>
+                        <a:latin typeface="微软雅黑" panose="020B0503020204020204" pitchFamily="34" charset="-122"/>
+                        <a:ea typeface="微软雅黑" panose="020B0503020204020204" pitchFamily="34" charset="-122"/>
+                        <a:cs typeface="微软雅黑" panose="020B0503020204020204" pitchFamily="34" charset="-122"/>
                       </a:endParaRPr>
                     </a:p>
                   </a:txBody>
-                  <a:tcPr marL="91440" marR="91440" marT="45720" marB="45720" anchor="ctr">
+                  <a:tcPr anchor="ctr">
                     <a:lnL w="9525" cap="flat" cmpd="sng" algn="ctr">
                       <a:solidFill>
                         <a:srgbClr val="D8DBE0"/>
@@ -6000,7 +5845,7 @@
                     <a:bodyPr/>
                     <a:lstStyle/>
                     <a:p>
-                      <a:pPr algn="l" indent="0" marL="0">
+                      <a:pPr marL="0" indent="0" algn="l">
                         <a:buNone/>
                       </a:pPr>
                       <a:r>
@@ -6008,20 +5853,20 @@
                           <a:solidFill>
                             <a:srgbClr val="1F2329"/>
                           </a:solidFill>
-                          <a:latin typeface="微软雅黑" pitchFamily="34" charset="0"/>
-                          <a:ea typeface="微软雅黑" pitchFamily="34" charset="-122"/>
-                          <a:cs typeface="微软雅黑" pitchFamily="34" charset="-120"/>
+                          <a:latin typeface="微软雅黑" panose="020B0503020204020204" pitchFamily="34" charset="-122"/>
+                          <a:ea typeface="微软雅黑" panose="020B0503020204020204" pitchFamily="34" charset="-122"/>
+                          <a:cs typeface="微软雅黑" panose="020B0503020204020204" pitchFamily="34" charset="-120"/>
                         </a:rPr>
                         <a:t>5选17</a:t>
                       </a:r>
                       <a:endParaRPr lang="en-US" sz="1500" dirty="0">
-                        <a:latin typeface="微软雅黑" charset="0"/>
-                        <a:ea typeface="微软雅黑" charset="0"/>
-                        <a:cs typeface="微软雅黑" charset="0"/>
+                        <a:latin typeface="微软雅黑" panose="020B0503020204020204" pitchFamily="34" charset="-122"/>
+                        <a:ea typeface="微软雅黑" panose="020B0503020204020204" pitchFamily="34" charset="-122"/>
+                        <a:cs typeface="微软雅黑" panose="020B0503020204020204" pitchFamily="34" charset="-122"/>
                       </a:endParaRPr>
                     </a:p>
                   </a:txBody>
-                  <a:tcPr marL="91440" marR="91440" marT="45720" marB="45720" anchor="ctr">
+                  <a:tcPr anchor="ctr">
                     <a:lnL w="9525" cap="flat" cmpd="sng" algn="ctr">
                       <a:solidFill>
                         <a:srgbClr val="D8DBE0"/>
@@ -6068,7 +5913,7 @@
                     <a:bodyPr/>
                     <a:lstStyle/>
                     <a:p>
-                      <a:pPr algn="l" indent="0" marL="0">
+                      <a:pPr marL="0" indent="0" algn="l">
                         <a:buNone/>
                       </a:pPr>
                       <a:r>
@@ -6076,20 +5921,20 @@
                           <a:solidFill>
                             <a:srgbClr val="1F2329"/>
                           </a:solidFill>
-                          <a:latin typeface="微软雅黑" pitchFamily="34" charset="0"/>
-                          <a:ea typeface="微软雅黑" pitchFamily="34" charset="-122"/>
-                          <a:cs typeface="微软雅黑" pitchFamily="34" charset="-120"/>
+                          <a:latin typeface="微软雅黑" panose="020B0503020204020204" pitchFamily="34" charset="-122"/>
+                          <a:ea typeface="微软雅黑" panose="020B0503020204020204" pitchFamily="34" charset="-122"/>
+                          <a:cs typeface="微软雅黑" panose="020B0503020204020204" pitchFamily="34" charset="-120"/>
                         </a:rPr>
                         <a:t>表头表尾还原</a:t>
                       </a:r>
                       <a:endParaRPr lang="en-US" sz="1500" dirty="0">
-                        <a:latin typeface="微软雅黑" charset="0"/>
-                        <a:ea typeface="微软雅黑" charset="0"/>
-                        <a:cs typeface="微软雅黑" charset="0"/>
+                        <a:latin typeface="微软雅黑" panose="020B0503020204020204" pitchFamily="34" charset="-122"/>
+                        <a:ea typeface="微软雅黑" panose="020B0503020204020204" pitchFamily="34" charset="-122"/>
+                        <a:cs typeface="微软雅黑" panose="020B0503020204020204" pitchFamily="34" charset="-122"/>
                       </a:endParaRPr>
                     </a:p>
                   </a:txBody>
-                  <a:tcPr marL="91440" marR="91440" marT="45720" marB="45720" anchor="ctr">
+                  <a:tcPr anchor="ctr">
                     <a:lnL w="9525" cap="flat" cmpd="sng" algn="ctr">
                       <a:solidFill>
                         <a:srgbClr val="D8DBE0"/>
@@ -6136,7 +5981,7 @@
                     <a:bodyPr/>
                     <a:lstStyle/>
                     <a:p>
-                      <a:pPr algn="l" indent="0" marL="0">
+                      <a:pPr marL="0" indent="0" algn="l">
                         <a:buNone/>
                       </a:pPr>
                       <a:r>
@@ -6144,20 +5989,20 @@
                           <a:solidFill>
                             <a:srgbClr val="1F2329"/>
                           </a:solidFill>
-                          <a:latin typeface="微软雅黑" pitchFamily="34" charset="0"/>
-                          <a:ea typeface="微软雅黑" pitchFamily="34" charset="-122"/>
-                          <a:cs typeface="微软雅黑" pitchFamily="34" charset="-120"/>
+                          <a:latin typeface="微软雅黑" panose="020B0503020204020204" pitchFamily="34" charset="-122"/>
+                          <a:ea typeface="微软雅黑" panose="020B0503020204020204" pitchFamily="34" charset="-122"/>
+                          <a:cs typeface="微软雅黑" panose="020B0503020204020204" pitchFamily="34" charset="-120"/>
                         </a:rPr>
                         <a:t>由表头表尾反推广义表</a:t>
                       </a:r>
                       <a:endParaRPr lang="en-US" sz="1500" dirty="0">
-                        <a:latin typeface="微软雅黑" charset="0"/>
-                        <a:ea typeface="微软雅黑" charset="0"/>
-                        <a:cs typeface="微软雅黑" charset="0"/>
+                        <a:latin typeface="微软雅黑" panose="020B0503020204020204" pitchFamily="34" charset="-122"/>
+                        <a:ea typeface="微软雅黑" panose="020B0503020204020204" pitchFamily="34" charset="-122"/>
+                        <a:cs typeface="微软雅黑" panose="020B0503020204020204" pitchFamily="34" charset="-122"/>
                       </a:endParaRPr>
                     </a:p>
                   </a:txBody>
-                  <a:tcPr marL="91440" marR="91440" marT="45720" marB="45720" anchor="ctr">
+                  <a:tcPr anchor="ctr">
                     <a:lnL w="9525" cap="flat" cmpd="sng" algn="ctr">
                       <a:solidFill>
                         <a:srgbClr val="D8DBE0"/>
@@ -6206,7 +6051,7 @@
                     <a:bodyPr/>
                     <a:lstStyle/>
                     <a:p>
-                      <a:pPr algn="l" indent="0" marL="0">
+                      <a:pPr marL="0" indent="0" algn="l">
                         <a:buNone/>
                       </a:pPr>
                       <a:r>
@@ -6214,20 +6059,20 @@
                           <a:solidFill>
                             <a:srgbClr val="1F2329"/>
                           </a:solidFill>
-                          <a:latin typeface="微软雅黑" pitchFamily="34" charset="0"/>
-                          <a:ea typeface="微软雅黑" pitchFamily="34" charset="-122"/>
-                          <a:cs typeface="微软雅黑" pitchFamily="34" charset="-120"/>
+                          <a:latin typeface="微软雅黑" panose="020B0503020204020204" pitchFamily="34" charset="-122"/>
+                          <a:ea typeface="微软雅黑" panose="020B0503020204020204" pitchFamily="34" charset="-122"/>
+                          <a:cs typeface="微软雅黑" panose="020B0503020204020204" pitchFamily="34" charset="-120"/>
                         </a:rPr>
                         <a:t>5选18</a:t>
                       </a:r>
                       <a:endParaRPr lang="en-US" sz="1500" dirty="0">
-                        <a:latin typeface="微软雅黑" charset="0"/>
-                        <a:ea typeface="微软雅黑" charset="0"/>
-                        <a:cs typeface="微软雅黑" charset="0"/>
+                        <a:latin typeface="微软雅黑" panose="020B0503020204020204" pitchFamily="34" charset="-122"/>
+                        <a:ea typeface="微软雅黑" panose="020B0503020204020204" pitchFamily="34" charset="-122"/>
+                        <a:cs typeface="微软雅黑" panose="020B0503020204020204" pitchFamily="34" charset="-122"/>
                       </a:endParaRPr>
                     </a:p>
                   </a:txBody>
-                  <a:tcPr marL="91440" marR="91440" marT="45720" marB="45720" anchor="ctr">
+                  <a:tcPr anchor="ctr">
                     <a:lnL w="9525" cap="flat" cmpd="sng" algn="ctr">
                       <a:solidFill>
                         <a:srgbClr val="D8DBE0"/>
@@ -6274,7 +6119,7 @@
                     <a:bodyPr/>
                     <a:lstStyle/>
                     <a:p>
-                      <a:pPr algn="l" indent="0" marL="0">
+                      <a:pPr marL="0" indent="0" algn="l">
                         <a:buNone/>
                       </a:pPr>
                       <a:r>
@@ -6282,20 +6127,20 @@
                           <a:solidFill>
                             <a:srgbClr val="1F2329"/>
                           </a:solidFill>
-                          <a:latin typeface="微软雅黑" pitchFamily="34" charset="0"/>
-                          <a:ea typeface="微软雅黑" pitchFamily="34" charset="-122"/>
-                          <a:cs typeface="微软雅黑" pitchFamily="34" charset="-120"/>
+                          <a:latin typeface="微软雅黑" panose="020B0503020204020204" pitchFamily="34" charset="-122"/>
+                          <a:ea typeface="微软雅黑" panose="020B0503020204020204" pitchFamily="34" charset="-122"/>
+                          <a:cs typeface="微软雅黑" panose="020B0503020204020204" pitchFamily="34" charset="-120"/>
                         </a:rPr>
                         <a:t>head/tail复合运算</a:t>
                       </a:r>
                       <a:endParaRPr lang="en-US" sz="1500" dirty="0">
-                        <a:latin typeface="微软雅黑" charset="0"/>
-                        <a:ea typeface="微软雅黑" charset="0"/>
-                        <a:cs typeface="微软雅黑" charset="0"/>
+                        <a:latin typeface="微软雅黑" panose="020B0503020204020204" pitchFamily="34" charset="-122"/>
+                        <a:ea typeface="微软雅黑" panose="020B0503020204020204" pitchFamily="34" charset="-122"/>
+                        <a:cs typeface="微软雅黑" panose="020B0503020204020204" pitchFamily="34" charset="-122"/>
                       </a:endParaRPr>
                     </a:p>
                   </a:txBody>
-                  <a:tcPr marL="91440" marR="91440" marT="45720" marB="45720" anchor="ctr">
+                  <a:tcPr anchor="ctr">
                     <a:lnL w="9525" cap="flat" cmpd="sng" algn="ctr">
                       <a:solidFill>
                         <a:srgbClr val="D8DBE0"/>
@@ -6342,7 +6187,7 @@
                     <a:bodyPr/>
                     <a:lstStyle/>
                     <a:p>
-                      <a:pPr algn="l" indent="0" marL="0">
+                      <a:pPr marL="0" indent="0" algn="l">
                         <a:buNone/>
                       </a:pPr>
                       <a:r>
@@ -6350,20 +6195,20 @@
                           <a:solidFill>
                             <a:srgbClr val="1F2329"/>
                           </a:solidFill>
-                          <a:latin typeface="微软雅黑" pitchFamily="34" charset="0"/>
-                          <a:ea typeface="微软雅黑" pitchFamily="34" charset="-122"/>
-                          <a:cs typeface="微软雅黑" pitchFamily="34" charset="-120"/>
+                          <a:latin typeface="微软雅黑" panose="020B0503020204020204" pitchFamily="34" charset="-122"/>
+                          <a:ea typeface="微软雅黑" panose="020B0503020204020204" pitchFamily="34" charset="-122"/>
+                          <a:cs typeface="微软雅黑" panose="020B0503020204020204" pitchFamily="34" charset="-120"/>
                         </a:rPr>
                         <a:t>分解原子q的运算式，2025填7/2026填14同型</a:t>
                       </a:r>
                       <a:endParaRPr lang="en-US" sz="1500" dirty="0">
-                        <a:latin typeface="微软雅黑" charset="0"/>
-                        <a:ea typeface="微软雅黑" charset="0"/>
-                        <a:cs typeface="微软雅黑" charset="0"/>
+                        <a:latin typeface="微软雅黑" panose="020B0503020204020204" pitchFamily="34" charset="-122"/>
+                        <a:ea typeface="微软雅黑" panose="020B0503020204020204" pitchFamily="34" charset="-122"/>
+                        <a:cs typeface="微软雅黑" panose="020B0503020204020204" pitchFamily="34" charset="-122"/>
                       </a:endParaRPr>
                     </a:p>
                   </a:txBody>
-                  <a:tcPr marL="91440" marR="91440" marT="45720" marB="45720" anchor="ctr">
+                  <a:tcPr anchor="ctr">
                     <a:lnL w="9525" cap="flat" cmpd="sng" algn="ctr">
                       <a:solidFill>
                         <a:srgbClr val="D8DBE0"/>
@@ -6420,7 +6265,7 @@
 
 <file path=ppt/slides/slide5.xml><?xml version="1.0" encoding="utf-8"?>
 <p:sld xmlns:a="http://schemas.openxmlformats.org/drawingml/2006/main" xmlns:r="http://schemas.openxmlformats.org/officeDocument/2006/relationships" xmlns:p="http://schemas.openxmlformats.org/presentationml/2006/main">
-  <p:cSld name="Slide 5">
+  <p:cSld>
     <p:bg>
       <p:bgPr>
         <a:blipFill dpi="0" rotWithShape="1">
@@ -6464,13 +6309,12 @@
             <a:avLst/>
           </a:prstGeom>
           <a:noFill/>
-          <a:ln/>
         </p:spPr>
         <p:txBody>
           <a:bodyPr wrap="square" rtlCol="0" anchor="ctr"/>
           <a:lstStyle/>
           <a:p>
-            <a:pPr algn="r" indent="0" marL="0">
+            <a:pPr marL="0" indent="0" algn="r">
               <a:buNone/>
             </a:pPr>
             <a:r>
@@ -6478,9 +6322,9 @@
                 <a:solidFill>
                   <a:srgbClr val="8A9099"/>
                 </a:solidFill>
-                <a:latin typeface="微软雅黑" pitchFamily="34" charset="0"/>
-                <a:ea typeface="微软雅黑" pitchFamily="34" charset="-122"/>
-                <a:cs typeface="微软雅黑" pitchFamily="34" charset="-120"/>
+                <a:latin typeface="微软雅黑" panose="020B0503020204020204" pitchFamily="34" charset="-122"/>
+                <a:ea typeface="微软雅黑" panose="020B0503020204020204" pitchFamily="34" charset="-122"/>
+                <a:cs typeface="微软雅黑" panose="020B0503020204020204" pitchFamily="34" charset="-120"/>
               </a:rPr>
               <a:t>5 / 10</a:t>
             </a:r>
@@ -6503,13 +6347,12 @@
             <a:avLst/>
           </a:prstGeom>
           <a:noFill/>
-          <a:ln/>
         </p:spPr>
         <p:txBody>
           <a:bodyPr wrap="square" rtlCol="0" anchor="ctr"/>
           <a:lstStyle/>
           <a:p>
-            <a:pPr algn="l" indent="0" marL="0">
+            <a:pPr marL="0" indent="0" algn="l">
               <a:buNone/>
             </a:pPr>
             <a:r>
@@ -6517,9 +6360,9 @@
                 <a:solidFill>
                   <a:srgbClr val="1F4E9C"/>
                 </a:solidFill>
-                <a:latin typeface="微软雅黑" pitchFamily="34" charset="0"/>
-                <a:ea typeface="微软雅黑" pitchFamily="34" charset="-122"/>
-                <a:cs typeface="微软雅黑" pitchFamily="34" charset="-120"/>
+                <a:latin typeface="微软雅黑" panose="020B0503020204020204" pitchFamily="34" charset="-122"/>
+                <a:ea typeface="微软雅黑" panose="020B0503020204020204" pitchFamily="34" charset="-122"/>
+                <a:cs typeface="微软雅黑" panose="020B0503020204020204" pitchFamily="34" charset="-120"/>
               </a:rPr>
               <a:t>有价值必做</a:t>
             </a:r>
@@ -6542,13 +6385,12 @@
             <a:avLst/>
           </a:prstGeom>
           <a:noFill/>
-          <a:ln/>
         </p:spPr>
         <p:txBody>
           <a:bodyPr wrap="square" rtlCol="0" anchor="ctr"/>
           <a:lstStyle/>
           <a:p>
-            <a:pPr algn="l" indent="0" marL="0">
+            <a:pPr marL="0" indent="0" algn="l">
               <a:buNone/>
             </a:pPr>
             <a:r>
@@ -6556,9 +6398,9 @@
                 <a:solidFill>
                   <a:srgbClr val="1F2329"/>
                 </a:solidFill>
-                <a:latin typeface="微软雅黑" pitchFamily="34" charset="0"/>
-                <a:ea typeface="微软雅黑" pitchFamily="34" charset="-122"/>
-                <a:cs typeface="微软雅黑" pitchFamily="34" charset="-120"/>
+                <a:latin typeface="微软雅黑" panose="020B0503020204020204" pitchFamily="34" charset="-122"/>
+                <a:ea typeface="微软雅黑" panose="020B0503020204020204" pitchFamily="34" charset="-122"/>
+                <a:cs typeface="微软雅黑" panose="020B0503020204020204" pitchFamily="34" charset="-120"/>
               </a:rPr>
               <a:t>必做题（3/4）</a:t>
             </a:r>
@@ -6572,17 +6414,11 @@
           <p:cNvGraphicFramePr>
             <a:graphicFrameLocks noGrp="1"/>
           </p:cNvGraphicFramePr>
-          <p:nvPr>
-            <p:extLst>
-              <p:ext uri="{D42A27DB-BD31-4B8C-83A1-F6EECF244321}">
-                <p14:modId xmlns:p14="http://schemas.microsoft.com/office/powerpoint/2010/main" val="1579011935"/>
-              </p:ext>
-            </p:extLst>
-          </p:nvPr>
+          <p:nvPr/>
         </p:nvGraphicFramePr>
         <p:xfrm>
           <a:off x="822960" y="2395728"/>
-          <a:ext cx="10545775" cy="914400"/>
+          <a:ext cx="10545775" cy="2523744"/>
         </p:xfrm>
         <a:graphic>
           <a:graphicData uri="http://schemas.openxmlformats.org/drawingml/2006/table">
@@ -6599,7 +6435,7 @@
                     <a:bodyPr/>
                     <a:lstStyle/>
                     <a:p>
-                      <a:pPr algn="l" indent="0" marL="0">
+                      <a:pPr marL="0" indent="0" algn="l">
                         <a:buNone/>
                       </a:pPr>
                       <a:r>
@@ -6607,20 +6443,20 @@
                           <a:solidFill>
                             <a:srgbClr val="1F4E9C"/>
                           </a:solidFill>
-                          <a:latin typeface="微软雅黑" pitchFamily="34" charset="0"/>
-                          <a:ea typeface="微软雅黑" pitchFamily="34" charset="-122"/>
-                          <a:cs typeface="微软雅黑" pitchFamily="34" charset="-120"/>
+                          <a:latin typeface="微软雅黑" panose="020B0503020204020204" pitchFamily="34" charset="-122"/>
+                          <a:ea typeface="微软雅黑" panose="020B0503020204020204" pitchFamily="34" charset="-122"/>
+                          <a:cs typeface="微软雅黑" panose="020B0503020204020204" pitchFamily="34" charset="-120"/>
                         </a:rPr>
                         <a:t>题号</a:t>
                       </a:r>
                       <a:endParaRPr lang="en-US" sz="1500" dirty="0">
-                        <a:latin typeface="微软雅黑" charset="0"/>
-                        <a:ea typeface="微软雅黑" charset="0"/>
-                        <a:cs typeface="微软雅黑" charset="0"/>
+                        <a:latin typeface="微软雅黑" panose="020B0503020204020204" pitchFamily="34" charset="-122"/>
+                        <a:ea typeface="微软雅黑" panose="020B0503020204020204" pitchFamily="34" charset="-122"/>
+                        <a:cs typeface="微软雅黑" panose="020B0503020204020204" pitchFamily="34" charset="-122"/>
                       </a:endParaRPr>
                     </a:p>
                   </a:txBody>
-                  <a:tcPr marL="91440" marR="91440" marT="45720" marB="45720" anchor="ctr">
+                  <a:tcPr anchor="ctr">
                     <a:lnL w="9525" cap="flat" cmpd="sng" algn="ctr">
                       <a:solidFill>
                         <a:srgbClr val="D8DBE0"/>
@@ -6667,7 +6503,7 @@
                     <a:bodyPr/>
                     <a:lstStyle/>
                     <a:p>
-                      <a:pPr algn="l" indent="0" marL="0">
+                      <a:pPr marL="0" indent="0" algn="l">
                         <a:buNone/>
                       </a:pPr>
                       <a:r>
@@ -6675,20 +6511,20 @@
                           <a:solidFill>
                             <a:srgbClr val="1F4E9C"/>
                           </a:solidFill>
-                          <a:latin typeface="微软雅黑" pitchFamily="34" charset="0"/>
-                          <a:ea typeface="微软雅黑" pitchFamily="34" charset="-122"/>
-                          <a:cs typeface="微软雅黑" pitchFamily="34" charset="-120"/>
+                          <a:latin typeface="微软雅黑" panose="020B0503020204020204" pitchFamily="34" charset="-122"/>
+                          <a:ea typeface="微软雅黑" panose="020B0503020204020204" pitchFamily="34" charset="-122"/>
+                          <a:cs typeface="微软雅黑" panose="020B0503020204020204" pitchFamily="34" charset="-120"/>
                         </a:rPr>
                         <a:t>考点</a:t>
                       </a:r>
                       <a:endParaRPr lang="en-US" sz="1500" dirty="0">
-                        <a:latin typeface="微软雅黑" charset="0"/>
-                        <a:ea typeface="微软雅黑" charset="0"/>
-                        <a:cs typeface="微软雅黑" charset="0"/>
+                        <a:latin typeface="微软雅黑" panose="020B0503020204020204" pitchFamily="34" charset="-122"/>
+                        <a:ea typeface="微软雅黑" panose="020B0503020204020204" pitchFamily="34" charset="-122"/>
+                        <a:cs typeface="微软雅黑" panose="020B0503020204020204" pitchFamily="34" charset="-122"/>
                       </a:endParaRPr>
                     </a:p>
                   </a:txBody>
-                  <a:tcPr marL="91440" marR="91440" marT="45720" marB="45720" anchor="ctr">
+                  <a:tcPr anchor="ctr">
                     <a:lnL w="9525" cap="flat" cmpd="sng" algn="ctr">
                       <a:solidFill>
                         <a:srgbClr val="D8DBE0"/>
@@ -6735,7 +6571,7 @@
                     <a:bodyPr/>
                     <a:lstStyle/>
                     <a:p>
-                      <a:pPr algn="l" indent="0" marL="0">
+                      <a:pPr marL="0" indent="0" algn="l">
                         <a:buNone/>
                       </a:pPr>
                       <a:r>
@@ -6743,20 +6579,20 @@
                           <a:solidFill>
                             <a:srgbClr val="1F4E9C"/>
                           </a:solidFill>
-                          <a:latin typeface="微软雅黑" pitchFamily="34" charset="0"/>
-                          <a:ea typeface="微软雅黑" pitchFamily="34" charset="-122"/>
-                          <a:cs typeface="微软雅黑" pitchFamily="34" charset="-120"/>
+                          <a:latin typeface="微软雅黑" panose="020B0503020204020204" pitchFamily="34" charset="-122"/>
+                          <a:ea typeface="微软雅黑" panose="020B0503020204020204" pitchFamily="34" charset="-122"/>
+                          <a:cs typeface="微软雅黑" panose="020B0503020204020204" pitchFamily="34" charset="-120"/>
                         </a:rPr>
                         <a:t>价值</a:t>
                       </a:r>
                       <a:endParaRPr lang="en-US" sz="1500" dirty="0">
-                        <a:latin typeface="微软雅黑" charset="0"/>
-                        <a:ea typeface="微软雅黑" charset="0"/>
-                        <a:cs typeface="微软雅黑" charset="0"/>
+                        <a:latin typeface="微软雅黑" panose="020B0503020204020204" pitchFamily="34" charset="-122"/>
+                        <a:ea typeface="微软雅黑" panose="020B0503020204020204" pitchFamily="34" charset="-122"/>
+                        <a:cs typeface="微软雅黑" panose="020B0503020204020204" pitchFamily="34" charset="-122"/>
                       </a:endParaRPr>
                     </a:p>
                   </a:txBody>
-                  <a:tcPr marL="91440" marR="91440" marT="45720" marB="45720" anchor="ctr">
+                  <a:tcPr anchor="ctr">
                     <a:lnL w="9525" cap="flat" cmpd="sng" algn="ctr">
                       <a:solidFill>
                         <a:srgbClr val="D8DBE0"/>
@@ -6805,7 +6641,7 @@
                     <a:bodyPr/>
                     <a:lstStyle/>
                     <a:p>
-                      <a:pPr algn="l" indent="0" marL="0">
+                      <a:pPr marL="0" indent="0" algn="l">
                         <a:buNone/>
                       </a:pPr>
                       <a:r>
@@ -6813,20 +6649,20 @@
                           <a:solidFill>
                             <a:srgbClr val="1F2329"/>
                           </a:solidFill>
-                          <a:latin typeface="微软雅黑" pitchFamily="34" charset="0"/>
-                          <a:ea typeface="微软雅黑" pitchFamily="34" charset="-122"/>
-                          <a:cs typeface="微软雅黑" pitchFamily="34" charset="-120"/>
+                          <a:latin typeface="微软雅黑" panose="020B0503020204020204" pitchFamily="34" charset="-122"/>
+                          <a:ea typeface="微软雅黑" panose="020B0503020204020204" pitchFamily="34" charset="-122"/>
+                          <a:cs typeface="微软雅黑" panose="020B0503020204020204" pitchFamily="34" charset="-120"/>
                         </a:rPr>
                         <a:t>5选19</a:t>
                       </a:r>
                       <a:endParaRPr lang="en-US" sz="1500" dirty="0">
-                        <a:latin typeface="微软雅黑" charset="0"/>
-                        <a:ea typeface="微软雅黑" charset="0"/>
-                        <a:cs typeface="微软雅黑" charset="0"/>
+                        <a:latin typeface="微软雅黑" panose="020B0503020204020204" pitchFamily="34" charset="-122"/>
+                        <a:ea typeface="微软雅黑" panose="020B0503020204020204" pitchFamily="34" charset="-122"/>
+                        <a:cs typeface="微软雅黑" panose="020B0503020204020204" pitchFamily="34" charset="-122"/>
                       </a:endParaRPr>
                     </a:p>
                   </a:txBody>
-                  <a:tcPr marL="91440" marR="91440" marT="45720" marB="45720" anchor="ctr">
+                  <a:tcPr anchor="ctr">
                     <a:lnL w="9525" cap="flat" cmpd="sng" algn="ctr">
                       <a:solidFill>
                         <a:srgbClr val="D8DBE0"/>
@@ -6873,7 +6709,7 @@
                     <a:bodyPr/>
                     <a:lstStyle/>
                     <a:p>
-                      <a:pPr algn="l" indent="0" marL="0">
+                      <a:pPr marL="0" indent="0" algn="l">
                         <a:buNone/>
                       </a:pPr>
                       <a:r>
@@ -6881,20 +6717,20 @@
                           <a:solidFill>
                             <a:srgbClr val="1F2329"/>
                           </a:solidFill>
-                          <a:latin typeface="微软雅黑" pitchFamily="34" charset="0"/>
-                          <a:ea typeface="微软雅黑" pitchFamily="34" charset="-122"/>
-                          <a:cs typeface="微软雅黑" pitchFamily="34" charset="-120"/>
+                          <a:latin typeface="微软雅黑" panose="020B0503020204020204" pitchFamily="34" charset="-122"/>
+                          <a:ea typeface="微软雅黑" panose="020B0503020204020204" pitchFamily="34" charset="-122"/>
+                          <a:cs typeface="微软雅黑" panose="020B0503020204020204" pitchFamily="34" charset="-120"/>
                         </a:rPr>
                         <a:t>head/tail运算</a:t>
                       </a:r>
                       <a:endParaRPr lang="en-US" sz="1500" dirty="0">
-                        <a:latin typeface="微软雅黑" charset="0"/>
-                        <a:ea typeface="微软雅黑" charset="0"/>
-                        <a:cs typeface="微软雅黑" charset="0"/>
+                        <a:latin typeface="微软雅黑" panose="020B0503020204020204" pitchFamily="34" charset="-122"/>
+                        <a:ea typeface="微软雅黑" panose="020B0503020204020204" pitchFamily="34" charset="-122"/>
+                        <a:cs typeface="微软雅黑" panose="020B0503020204020204" pitchFamily="34" charset="-122"/>
                       </a:endParaRPr>
                     </a:p>
                   </a:txBody>
-                  <a:tcPr marL="91440" marR="91440" marT="45720" marB="45720" anchor="ctr">
+                  <a:tcPr anchor="ctr">
                     <a:lnL w="9525" cap="flat" cmpd="sng" algn="ctr">
                       <a:solidFill>
                         <a:srgbClr val="D8DBE0"/>
@@ -6941,7 +6777,7 @@
                     <a:bodyPr/>
                     <a:lstStyle/>
                     <a:p>
-                      <a:pPr algn="l" indent="0" marL="0">
+                      <a:pPr marL="0" indent="0" algn="l">
                         <a:buNone/>
                       </a:pPr>
                       <a:r>
@@ -6949,20 +6785,20 @@
                           <a:solidFill>
                             <a:srgbClr val="1F2329"/>
                           </a:solidFill>
-                          <a:latin typeface="微软雅黑" pitchFamily="34" charset="0"/>
-                          <a:ea typeface="微软雅黑" pitchFamily="34" charset="-122"/>
-                          <a:cs typeface="微软雅黑" pitchFamily="34" charset="-120"/>
+                          <a:latin typeface="微软雅黑" panose="020B0503020204020204" pitchFamily="34" charset="-122"/>
+                          <a:ea typeface="微软雅黑" panose="020B0503020204020204" pitchFamily="34" charset="-122"/>
+                          <a:cs typeface="微软雅黑" panose="020B0503020204020204" pitchFamily="34" charset="-120"/>
                         </a:rPr>
                         <a:t>tail(head(L))求值</a:t>
                       </a:r>
                       <a:endParaRPr lang="en-US" sz="1500" dirty="0">
-                        <a:latin typeface="微软雅黑" charset="0"/>
-                        <a:ea typeface="微软雅黑" charset="0"/>
-                        <a:cs typeface="微软雅黑" charset="0"/>
+                        <a:latin typeface="微软雅黑" panose="020B0503020204020204" pitchFamily="34" charset="-122"/>
+                        <a:ea typeface="微软雅黑" panose="020B0503020204020204" pitchFamily="34" charset="-122"/>
+                        <a:cs typeface="微软雅黑" panose="020B0503020204020204" pitchFamily="34" charset="-122"/>
                       </a:endParaRPr>
                     </a:p>
                   </a:txBody>
-                  <a:tcPr marL="91440" marR="91440" marT="45720" marB="45720" anchor="ctr">
+                  <a:tcPr anchor="ctr">
                     <a:lnL w="9525" cap="flat" cmpd="sng" algn="ctr">
                       <a:solidFill>
                         <a:srgbClr val="D8DBE0"/>
@@ -7011,7 +6847,7 @@
                     <a:bodyPr/>
                     <a:lstStyle/>
                     <a:p>
-                      <a:pPr algn="l" indent="0" marL="0">
+                      <a:pPr marL="0" indent="0" algn="l">
                         <a:buNone/>
                       </a:pPr>
                       <a:r>
@@ -7019,20 +6855,20 @@
                           <a:solidFill>
                             <a:srgbClr val="1F2329"/>
                           </a:solidFill>
-                          <a:latin typeface="微软雅黑" pitchFamily="34" charset="0"/>
-                          <a:ea typeface="微软雅黑" pitchFamily="34" charset="-122"/>
-                          <a:cs typeface="微软雅黑" pitchFamily="34" charset="-120"/>
+                          <a:latin typeface="微软雅黑" panose="020B0503020204020204" pitchFamily="34" charset="-122"/>
+                          <a:ea typeface="微软雅黑" panose="020B0503020204020204" pitchFamily="34" charset="-122"/>
+                          <a:cs typeface="微软雅黑" panose="020B0503020204020204" pitchFamily="34" charset="-120"/>
                         </a:rPr>
                         <a:t>5选20</a:t>
                       </a:r>
                       <a:endParaRPr lang="en-US" sz="1500" dirty="0">
-                        <a:latin typeface="微软雅黑" charset="0"/>
-                        <a:ea typeface="微软雅黑" charset="0"/>
-                        <a:cs typeface="微软雅黑" charset="0"/>
+                        <a:latin typeface="微软雅黑" panose="020B0503020204020204" pitchFamily="34" charset="-122"/>
+                        <a:ea typeface="微软雅黑" panose="020B0503020204020204" pitchFamily="34" charset="-122"/>
+                        <a:cs typeface="微软雅黑" panose="020B0503020204020204" pitchFamily="34" charset="-122"/>
                       </a:endParaRPr>
                     </a:p>
                   </a:txBody>
-                  <a:tcPr marL="91440" marR="91440" marT="45720" marB="45720" anchor="ctr">
+                  <a:tcPr anchor="ctr">
                     <a:lnL w="9525" cap="flat" cmpd="sng" algn="ctr">
                       <a:solidFill>
                         <a:srgbClr val="D8DBE0"/>
@@ -7079,7 +6915,7 @@
                     <a:bodyPr/>
                     <a:lstStyle/>
                     <a:p>
-                      <a:pPr algn="l" indent="0" marL="0">
+                      <a:pPr marL="0" indent="0" algn="l">
                         <a:buNone/>
                       </a:pPr>
                       <a:r>
@@ -7087,20 +6923,20 @@
                           <a:solidFill>
                             <a:srgbClr val="1F2329"/>
                           </a:solidFill>
-                          <a:latin typeface="微软雅黑" pitchFamily="34" charset="0"/>
-                          <a:ea typeface="微软雅黑" pitchFamily="34" charset="-122"/>
-                          <a:cs typeface="微软雅黑" pitchFamily="34" charset="-120"/>
+                          <a:latin typeface="微软雅黑" panose="020B0503020204020204" pitchFamily="34" charset="-122"/>
+                          <a:ea typeface="微软雅黑" panose="020B0503020204020204" pitchFamily="34" charset="-122"/>
+                          <a:cs typeface="微软雅黑" panose="020B0503020204020204" pitchFamily="34" charset="-120"/>
                         </a:rPr>
                         <a:t>head/tail运算</a:t>
                       </a:r>
                       <a:endParaRPr lang="en-US" sz="1500" dirty="0">
-                        <a:latin typeface="微软雅黑" charset="0"/>
-                        <a:ea typeface="微软雅黑" charset="0"/>
-                        <a:cs typeface="微软雅黑" charset="0"/>
+                        <a:latin typeface="微软雅黑" panose="020B0503020204020204" pitchFamily="34" charset="-122"/>
+                        <a:ea typeface="微软雅黑" panose="020B0503020204020204" pitchFamily="34" charset="-122"/>
+                        <a:cs typeface="微软雅黑" panose="020B0503020204020204" pitchFamily="34" charset="-122"/>
                       </a:endParaRPr>
                     </a:p>
                   </a:txBody>
-                  <a:tcPr marL="91440" marR="91440" marT="45720" marB="45720" anchor="ctr">
+                  <a:tcPr anchor="ctr">
                     <a:lnL w="9525" cap="flat" cmpd="sng" algn="ctr">
                       <a:solidFill>
                         <a:srgbClr val="D8DBE0"/>
@@ -7147,7 +6983,7 @@
                     <a:bodyPr/>
                     <a:lstStyle/>
                     <a:p>
-                      <a:pPr algn="l" indent="0" marL="0">
+                      <a:pPr marL="0" indent="0" algn="l">
                         <a:buNone/>
                       </a:pPr>
                       <a:r>
@@ -7155,20 +6991,20 @@
                           <a:solidFill>
                             <a:srgbClr val="1F2329"/>
                           </a:solidFill>
-                          <a:latin typeface="微软雅黑" pitchFamily="34" charset="0"/>
-                          <a:ea typeface="微软雅黑" pitchFamily="34" charset="-122"/>
-                          <a:cs typeface="微软雅黑" pitchFamily="34" charset="-120"/>
+                          <a:latin typeface="微软雅黑" panose="020B0503020204020204" pitchFamily="34" charset="-122"/>
+                          <a:ea typeface="微软雅黑" panose="020B0503020204020204" pitchFamily="34" charset="-122"/>
+                          <a:cs typeface="微软雅黑" panose="020B0503020204020204" pitchFamily="34" charset="-120"/>
                         </a:rPr>
                         <a:t>tail(tail(L))求值</a:t>
                       </a:r>
                       <a:endParaRPr lang="en-US" sz="1500" dirty="0">
-                        <a:latin typeface="微软雅黑" charset="0"/>
-                        <a:ea typeface="微软雅黑" charset="0"/>
-                        <a:cs typeface="微软雅黑" charset="0"/>
+                        <a:latin typeface="微软雅黑" panose="020B0503020204020204" pitchFamily="34" charset="-122"/>
+                        <a:ea typeface="微软雅黑" panose="020B0503020204020204" pitchFamily="34" charset="-122"/>
+                        <a:cs typeface="微软雅黑" panose="020B0503020204020204" pitchFamily="34" charset="-122"/>
                       </a:endParaRPr>
                     </a:p>
                   </a:txBody>
-                  <a:tcPr marL="91440" marR="91440" marT="45720" marB="45720" anchor="ctr">
+                  <a:tcPr anchor="ctr">
                     <a:lnL w="9525" cap="flat" cmpd="sng" algn="ctr">
                       <a:solidFill>
                         <a:srgbClr val="D8DBE0"/>
@@ -7217,7 +7053,7 @@
                     <a:bodyPr/>
                     <a:lstStyle/>
                     <a:p>
-                      <a:pPr algn="l" indent="0" marL="0">
+                      <a:pPr marL="0" indent="0" algn="l">
                         <a:buNone/>
                       </a:pPr>
                       <a:r>
@@ -7225,20 +7061,20 @@
                           <a:solidFill>
                             <a:srgbClr val="1F2329"/>
                           </a:solidFill>
-                          <a:latin typeface="微软雅黑" pitchFamily="34" charset="0"/>
-                          <a:ea typeface="微软雅黑" pitchFamily="34" charset="-122"/>
-                          <a:cs typeface="微软雅黑" pitchFamily="34" charset="-120"/>
+                          <a:latin typeface="微软雅黑" panose="020B0503020204020204" pitchFamily="34" charset="-122"/>
+                          <a:ea typeface="微软雅黑" panose="020B0503020204020204" pitchFamily="34" charset="-122"/>
+                          <a:cs typeface="微软雅黑" panose="020B0503020204020204" pitchFamily="34" charset="-120"/>
                         </a:rPr>
                         <a:t>5选21</a:t>
                       </a:r>
                       <a:endParaRPr lang="en-US" sz="1500" dirty="0">
-                        <a:latin typeface="微软雅黑" charset="0"/>
-                        <a:ea typeface="微软雅黑" charset="0"/>
-                        <a:cs typeface="微软雅黑" charset="0"/>
+                        <a:latin typeface="微软雅黑" panose="020B0503020204020204" pitchFamily="34" charset="-122"/>
+                        <a:ea typeface="微软雅黑" panose="020B0503020204020204" pitchFamily="34" charset="-122"/>
+                        <a:cs typeface="微软雅黑" panose="020B0503020204020204" pitchFamily="34" charset="-122"/>
                       </a:endParaRPr>
                     </a:p>
                   </a:txBody>
-                  <a:tcPr marL="91440" marR="91440" marT="45720" marB="45720" anchor="ctr">
+                  <a:tcPr anchor="ctr">
                     <a:lnL w="9525" cap="flat" cmpd="sng" algn="ctr">
                       <a:solidFill>
                         <a:srgbClr val="D8DBE0"/>
@@ -7285,7 +7121,7 @@
                     <a:bodyPr/>
                     <a:lstStyle/>
                     <a:p>
-                      <a:pPr algn="l" indent="0" marL="0">
+                      <a:pPr marL="0" indent="0" algn="l">
                         <a:buNone/>
                       </a:pPr>
                       <a:r>
@@ -7293,20 +7129,20 @@
                           <a:solidFill>
                             <a:srgbClr val="1F2329"/>
                           </a:solidFill>
-                          <a:latin typeface="微软雅黑" pitchFamily="34" charset="0"/>
-                          <a:ea typeface="微软雅黑" pitchFamily="34" charset="-122"/>
-                          <a:cs typeface="微软雅黑" pitchFamily="34" charset="-120"/>
+                          <a:latin typeface="微软雅黑" panose="020B0503020204020204" pitchFamily="34" charset="-122"/>
+                          <a:ea typeface="微软雅黑" panose="020B0503020204020204" pitchFamily="34" charset="-122"/>
+                          <a:cs typeface="微软雅黑" panose="020B0503020204020204" pitchFamily="34" charset="-120"/>
                         </a:rPr>
                         <a:t>head/tail复合运算</a:t>
                       </a:r>
                       <a:endParaRPr lang="en-US" sz="1500" dirty="0">
-                        <a:latin typeface="微软雅黑" charset="0"/>
-                        <a:ea typeface="微软雅黑" charset="0"/>
-                        <a:cs typeface="微软雅黑" charset="0"/>
+                        <a:latin typeface="微软雅黑" panose="020B0503020204020204" pitchFamily="34" charset="-122"/>
+                        <a:ea typeface="微软雅黑" panose="020B0503020204020204" pitchFamily="34" charset="-122"/>
+                        <a:cs typeface="微软雅黑" panose="020B0503020204020204" pitchFamily="34" charset="-122"/>
                       </a:endParaRPr>
                     </a:p>
                   </a:txBody>
-                  <a:tcPr marL="91440" marR="91440" marT="45720" marB="45720" anchor="ctr">
+                  <a:tcPr anchor="ctr">
                     <a:lnL w="9525" cap="flat" cmpd="sng" algn="ctr">
                       <a:solidFill>
                         <a:srgbClr val="D8DBE0"/>
@@ -7353,7 +7189,7 @@
                     <a:bodyPr/>
                     <a:lstStyle/>
                     <a:p>
-                      <a:pPr algn="l" indent="0" marL="0">
+                      <a:pPr marL="0" indent="0" algn="l">
                         <a:buNone/>
                       </a:pPr>
                       <a:r>
@@ -7361,20 +7197,20 @@
                           <a:solidFill>
                             <a:srgbClr val="1F2329"/>
                           </a:solidFill>
-                          <a:latin typeface="微软雅黑" pitchFamily="34" charset="0"/>
-                          <a:ea typeface="微软雅黑" pitchFamily="34" charset="-122"/>
-                          <a:cs typeface="微软雅黑" pitchFamily="34" charset="-120"/>
+                          <a:latin typeface="微软雅黑" panose="020B0503020204020204" pitchFamily="34" charset="-122"/>
+                          <a:ea typeface="微软雅黑" panose="020B0503020204020204" pitchFamily="34" charset="-122"/>
+                          <a:cs typeface="微软雅黑" panose="020B0503020204020204" pitchFamily="34" charset="-120"/>
                         </a:rPr>
                         <a:t>复合运算求值，2025填7同型</a:t>
                       </a:r>
                       <a:endParaRPr lang="en-US" sz="1500" dirty="0">
-                        <a:latin typeface="微软雅黑" charset="0"/>
-                        <a:ea typeface="微软雅黑" charset="0"/>
-                        <a:cs typeface="微软雅黑" charset="0"/>
+                        <a:latin typeface="微软雅黑" panose="020B0503020204020204" pitchFamily="34" charset="-122"/>
+                        <a:ea typeface="微软雅黑" panose="020B0503020204020204" pitchFamily="34" charset="-122"/>
+                        <a:cs typeface="微软雅黑" panose="020B0503020204020204" pitchFamily="34" charset="-122"/>
                       </a:endParaRPr>
                     </a:p>
                   </a:txBody>
-                  <a:tcPr marL="91440" marR="91440" marT="45720" marB="45720" anchor="ctr">
+                  <a:tcPr anchor="ctr">
                     <a:lnL w="9525" cap="flat" cmpd="sng" algn="ctr">
                       <a:solidFill>
                         <a:srgbClr val="D8DBE0"/>
@@ -7423,7 +7259,7 @@
                     <a:bodyPr/>
                     <a:lstStyle/>
                     <a:p>
-                      <a:pPr algn="l" indent="0" marL="0">
+                      <a:pPr marL="0" indent="0" algn="l">
                         <a:buNone/>
                       </a:pPr>
                       <a:r>
@@ -7431,20 +7267,20 @@
                           <a:solidFill>
                             <a:srgbClr val="1F2329"/>
                           </a:solidFill>
-                          <a:latin typeface="微软雅黑" pitchFamily="34" charset="0"/>
-                          <a:ea typeface="微软雅黑" pitchFamily="34" charset="-122"/>
-                          <a:cs typeface="微软雅黑" pitchFamily="34" charset="-120"/>
+                          <a:latin typeface="微软雅黑" panose="020B0503020204020204" pitchFamily="34" charset="-122"/>
+                          <a:ea typeface="微软雅黑" panose="020B0503020204020204" pitchFamily="34" charset="-122"/>
+                          <a:cs typeface="微软雅黑" panose="020B0503020204020204" pitchFamily="34" charset="-120"/>
                         </a:rPr>
                         <a:t>5选22</a:t>
                       </a:r>
                       <a:endParaRPr lang="en-US" sz="1500" dirty="0">
-                        <a:latin typeface="微软雅黑" charset="0"/>
-                        <a:ea typeface="微软雅黑" charset="0"/>
-                        <a:cs typeface="微软雅黑" charset="0"/>
+                        <a:latin typeface="微软雅黑" panose="020B0503020204020204" pitchFamily="34" charset="-122"/>
+                        <a:ea typeface="微软雅黑" panose="020B0503020204020204" pitchFamily="34" charset="-122"/>
+                        <a:cs typeface="微软雅黑" panose="020B0503020204020204" pitchFamily="34" charset="-122"/>
                       </a:endParaRPr>
                     </a:p>
                   </a:txBody>
-                  <a:tcPr marL="91440" marR="91440" marT="45720" marB="45720" anchor="ctr">
+                  <a:tcPr anchor="ctr">
                     <a:lnL w="9525" cap="flat" cmpd="sng" algn="ctr">
                       <a:solidFill>
                         <a:srgbClr val="D8DBE0"/>
@@ -7491,7 +7327,7 @@
                     <a:bodyPr/>
                     <a:lstStyle/>
                     <a:p>
-                      <a:pPr algn="l" indent="0" marL="0">
+                      <a:pPr marL="0" indent="0" algn="l">
                         <a:buNone/>
                       </a:pPr>
                       <a:r>
@@ -7499,20 +7335,20 @@
                           <a:solidFill>
                             <a:srgbClr val="1F2329"/>
                           </a:solidFill>
-                          <a:latin typeface="微软雅黑" pitchFamily="34" charset="0"/>
-                          <a:ea typeface="微软雅黑" pitchFamily="34" charset="-122"/>
-                          <a:cs typeface="微软雅黑" pitchFamily="34" charset="-120"/>
+                          <a:latin typeface="微软雅黑" panose="020B0503020204020204" pitchFamily="34" charset="-122"/>
+                          <a:ea typeface="微软雅黑" panose="020B0503020204020204" pitchFamily="34" charset="-122"/>
+                          <a:cs typeface="微软雅黑" panose="020B0503020204020204" pitchFamily="34" charset="-120"/>
                         </a:rPr>
                         <a:t>head/tail复合运算</a:t>
                       </a:r>
                       <a:endParaRPr lang="en-US" sz="1500" dirty="0">
-                        <a:latin typeface="微软雅黑" charset="0"/>
-                        <a:ea typeface="微软雅黑" charset="0"/>
-                        <a:cs typeface="微软雅黑" charset="0"/>
+                        <a:latin typeface="微软雅黑" panose="020B0503020204020204" pitchFamily="34" charset="-122"/>
+                        <a:ea typeface="微软雅黑" panose="020B0503020204020204" pitchFamily="34" charset="-122"/>
+                        <a:cs typeface="微软雅黑" panose="020B0503020204020204" pitchFamily="34" charset="-122"/>
                       </a:endParaRPr>
                     </a:p>
                   </a:txBody>
-                  <a:tcPr marL="91440" marR="91440" marT="45720" marB="45720" anchor="ctr">
+                  <a:tcPr anchor="ctr">
                     <a:lnL w="9525" cap="flat" cmpd="sng" algn="ctr">
                       <a:solidFill>
                         <a:srgbClr val="D8DBE0"/>
@@ -7559,7 +7395,7 @@
                     <a:bodyPr/>
                     <a:lstStyle/>
                     <a:p>
-                      <a:pPr algn="l" indent="0" marL="0">
+                      <a:pPr marL="0" indent="0" algn="l">
                         <a:buNone/>
                       </a:pPr>
                       <a:r>
@@ -7567,20 +7403,20 @@
                           <a:solidFill>
                             <a:srgbClr val="1F2329"/>
                           </a:solidFill>
-                          <a:latin typeface="微软雅黑" pitchFamily="34" charset="0"/>
-                          <a:ea typeface="微软雅黑" pitchFamily="34" charset="-122"/>
-                          <a:cs typeface="微软雅黑" pitchFamily="34" charset="-120"/>
+                          <a:latin typeface="微软雅黑" panose="020B0503020204020204" pitchFamily="34" charset="-122"/>
+                          <a:ea typeface="微软雅黑" panose="020B0503020204020204" pitchFamily="34" charset="-122"/>
+                          <a:cs typeface="微软雅黑" panose="020B0503020204020204" pitchFamily="34" charset="-120"/>
                         </a:rPr>
                         <a:t>分解(b)的运算式，逆向+正向双训练</a:t>
                       </a:r>
                       <a:endParaRPr lang="en-US" sz="1500" dirty="0">
-                        <a:latin typeface="微软雅黑" charset="0"/>
-                        <a:ea typeface="微软雅黑" charset="0"/>
-                        <a:cs typeface="微软雅黑" charset="0"/>
+                        <a:latin typeface="微软雅黑" panose="020B0503020204020204" pitchFamily="34" charset="-122"/>
+                        <a:ea typeface="微软雅黑" panose="020B0503020204020204" pitchFamily="34" charset="-122"/>
+                        <a:cs typeface="微软雅黑" panose="020B0503020204020204" pitchFamily="34" charset="-122"/>
                       </a:endParaRPr>
                     </a:p>
                   </a:txBody>
-                  <a:tcPr marL="91440" marR="91440" marT="45720" marB="45720" anchor="ctr">
+                  <a:tcPr anchor="ctr">
                     <a:lnL w="9525" cap="flat" cmpd="sng" algn="ctr">
                       <a:solidFill>
                         <a:srgbClr val="D8DBE0"/>
@@ -7629,7 +7465,7 @@
                     <a:bodyPr/>
                     <a:lstStyle/>
                     <a:p>
-                      <a:pPr algn="l" indent="0" marL="0">
+                      <a:pPr marL="0" indent="0" algn="l">
                         <a:buNone/>
                       </a:pPr>
                       <a:r>
@@ -7637,20 +7473,20 @@
                           <a:solidFill>
                             <a:srgbClr val="1F2329"/>
                           </a:solidFill>
-                          <a:latin typeface="微软雅黑" pitchFamily="34" charset="0"/>
-                          <a:ea typeface="微软雅黑" pitchFamily="34" charset="-122"/>
-                          <a:cs typeface="微软雅黑" pitchFamily="34" charset="-120"/>
+                          <a:latin typeface="微软雅黑" panose="020B0503020204020204" pitchFamily="34" charset="-122"/>
+                          <a:ea typeface="微软雅黑" panose="020B0503020204020204" pitchFamily="34" charset="-122"/>
+                          <a:cs typeface="微软雅黑" panose="020B0503020204020204" pitchFamily="34" charset="-120"/>
                         </a:rPr>
                         <a:t>5答1</a:t>
                       </a:r>
                       <a:endParaRPr lang="en-US" sz="1500" dirty="0">
-                        <a:latin typeface="微软雅黑" charset="0"/>
-                        <a:ea typeface="微软雅黑" charset="0"/>
-                        <a:cs typeface="微软雅黑" charset="0"/>
+                        <a:latin typeface="微软雅黑" panose="020B0503020204020204" pitchFamily="34" charset="-122"/>
+                        <a:ea typeface="微软雅黑" panose="020B0503020204020204" pitchFamily="34" charset="-122"/>
+                        <a:cs typeface="微软雅黑" panose="020B0503020204020204" pitchFamily="34" charset="-122"/>
                       </a:endParaRPr>
                     </a:p>
                   </a:txBody>
-                  <a:tcPr marL="91440" marR="91440" marT="45720" marB="45720" anchor="ctr">
+                  <a:tcPr anchor="ctr">
                     <a:lnL w="9525" cap="flat" cmpd="sng" algn="ctr">
                       <a:solidFill>
                         <a:srgbClr val="D8DBE0"/>
@@ -7697,7 +7533,7 @@
                     <a:bodyPr/>
                     <a:lstStyle/>
                     <a:p>
-                      <a:pPr algn="l" indent="0" marL="0">
+                      <a:pPr marL="0" indent="0" algn="l">
                         <a:buNone/>
                       </a:pPr>
                       <a:r>
@@ -7705,20 +7541,20 @@
                           <a:solidFill>
                             <a:srgbClr val="1F2329"/>
                           </a:solidFill>
-                          <a:latin typeface="微软雅黑" pitchFamily="34" charset="0"/>
-                          <a:ea typeface="微软雅黑" pitchFamily="34" charset="-122"/>
-                          <a:cs typeface="微软雅黑" pitchFamily="34" charset="-120"/>
+                          <a:latin typeface="微软雅黑" panose="020B0503020204020204" pitchFamily="34" charset="-122"/>
+                          <a:ea typeface="微软雅黑" panose="020B0503020204020204" pitchFamily="34" charset="-122"/>
+                          <a:cs typeface="微软雅黑" panose="020B0503020204020204" pitchFamily="34" charset="-120"/>
                         </a:rPr>
                         <a:t>数组地址计算</a:t>
                       </a:r>
                       <a:endParaRPr lang="en-US" sz="1500" dirty="0">
-                        <a:latin typeface="微软雅黑" charset="0"/>
-                        <a:ea typeface="微软雅黑" charset="0"/>
-                        <a:cs typeface="微软雅黑" charset="0"/>
+                        <a:latin typeface="微软雅黑" panose="020B0503020204020204" pitchFamily="34" charset="-122"/>
+                        <a:ea typeface="微软雅黑" panose="020B0503020204020204" pitchFamily="34" charset="-122"/>
+                        <a:cs typeface="微软雅黑" panose="020B0503020204020204" pitchFamily="34" charset="-122"/>
                       </a:endParaRPr>
                     </a:p>
                   </a:txBody>
-                  <a:tcPr marL="91440" marR="91440" marT="45720" marB="45720" anchor="ctr">
+                  <a:tcPr anchor="ctr">
                     <a:lnL w="9525" cap="flat" cmpd="sng" algn="ctr">
                       <a:solidFill>
                         <a:srgbClr val="D8DBE0"/>
@@ -7765,7 +7601,7 @@
                     <a:bodyPr/>
                     <a:lstStyle/>
                     <a:p>
-                      <a:pPr algn="l" indent="0" marL="0">
+                      <a:pPr marL="0" indent="0" algn="l">
                         <a:buNone/>
                       </a:pPr>
                       <a:r>
@@ -7773,20 +7609,20 @@
                           <a:solidFill>
                             <a:srgbClr val="1F2329"/>
                           </a:solidFill>
-                          <a:latin typeface="微软雅黑" pitchFamily="34" charset="0"/>
-                          <a:ea typeface="微软雅黑" pitchFamily="34" charset="-122"/>
-                          <a:cs typeface="微软雅黑" pitchFamily="34" charset="-120"/>
+                          <a:latin typeface="微软雅黑" panose="020B0503020204020204" pitchFamily="34" charset="-122"/>
+                          <a:ea typeface="微软雅黑" panose="020B0503020204020204" pitchFamily="34" charset="-122"/>
+                          <a:cs typeface="微软雅黑" panose="020B0503020204020204" pitchFamily="34" charset="-120"/>
                         </a:rPr>
                         <a:t>6×8字节编址地址推算，含三维推广</a:t>
                       </a:r>
                       <a:endParaRPr lang="en-US" sz="1500" dirty="0">
-                        <a:latin typeface="微软雅黑" charset="0"/>
-                        <a:ea typeface="微软雅黑" charset="0"/>
-                        <a:cs typeface="微软雅黑" charset="0"/>
+                        <a:latin typeface="微软雅黑" panose="020B0503020204020204" pitchFamily="34" charset="-122"/>
+                        <a:ea typeface="微软雅黑" panose="020B0503020204020204" pitchFamily="34" charset="-122"/>
+                        <a:cs typeface="微软雅黑" panose="020B0503020204020204" pitchFamily="34" charset="-122"/>
                       </a:endParaRPr>
                     </a:p>
                   </a:txBody>
-                  <a:tcPr marL="91440" marR="91440" marT="45720" marB="45720" anchor="ctr">
+                  <a:tcPr anchor="ctr">
                     <a:lnL w="9525" cap="flat" cmpd="sng" algn="ctr">
                       <a:solidFill>
                         <a:srgbClr val="D8DBE0"/>
@@ -7843,7 +7679,7 @@
 
 <file path=ppt/slides/slide6.xml><?xml version="1.0" encoding="utf-8"?>
 <p:sld xmlns:a="http://schemas.openxmlformats.org/drawingml/2006/main" xmlns:r="http://schemas.openxmlformats.org/officeDocument/2006/relationships" xmlns:p="http://schemas.openxmlformats.org/presentationml/2006/main">
-  <p:cSld name="Slide 6">
+  <p:cSld>
     <p:bg>
       <p:bgPr>
         <a:blipFill dpi="0" rotWithShape="1">
@@ -7887,13 +7723,12 @@
             <a:avLst/>
           </a:prstGeom>
           <a:noFill/>
-          <a:ln/>
         </p:spPr>
         <p:txBody>
           <a:bodyPr wrap="square" rtlCol="0" anchor="ctr"/>
           <a:lstStyle/>
           <a:p>
-            <a:pPr algn="r" indent="0" marL="0">
+            <a:pPr marL="0" indent="0" algn="r">
               <a:buNone/>
             </a:pPr>
             <a:r>
@@ -7901,9 +7736,9 @@
                 <a:solidFill>
                   <a:srgbClr val="8A9099"/>
                 </a:solidFill>
-                <a:latin typeface="微软雅黑" pitchFamily="34" charset="0"/>
-                <a:ea typeface="微软雅黑" pitchFamily="34" charset="-122"/>
-                <a:cs typeface="微软雅黑" pitchFamily="34" charset="-120"/>
+                <a:latin typeface="微软雅黑" panose="020B0503020204020204" pitchFamily="34" charset="-122"/>
+                <a:ea typeface="微软雅黑" panose="020B0503020204020204" pitchFamily="34" charset="-122"/>
+                <a:cs typeface="微软雅黑" panose="020B0503020204020204" pitchFamily="34" charset="-120"/>
               </a:rPr>
               <a:t>6 / 10</a:t>
             </a:r>
@@ -7926,13 +7761,12 @@
             <a:avLst/>
           </a:prstGeom>
           <a:noFill/>
-          <a:ln/>
         </p:spPr>
         <p:txBody>
           <a:bodyPr wrap="square" rtlCol="0" anchor="ctr"/>
           <a:lstStyle/>
           <a:p>
-            <a:pPr algn="l" indent="0" marL="0">
+            <a:pPr marL="0" indent="0" algn="l">
               <a:buNone/>
             </a:pPr>
             <a:r>
@@ -7940,9 +7774,9 @@
                 <a:solidFill>
                   <a:srgbClr val="1F4E9C"/>
                 </a:solidFill>
-                <a:latin typeface="微软雅黑" pitchFamily="34" charset="0"/>
-                <a:ea typeface="微软雅黑" pitchFamily="34" charset="-122"/>
-                <a:cs typeface="微软雅黑" pitchFamily="34" charset="-120"/>
+                <a:latin typeface="微软雅黑" panose="020B0503020204020204" pitchFamily="34" charset="-122"/>
+                <a:ea typeface="微软雅黑" panose="020B0503020204020204" pitchFamily="34" charset="-122"/>
+                <a:cs typeface="微软雅黑" panose="020B0503020204020204" pitchFamily="34" charset="-120"/>
               </a:rPr>
               <a:t>有价值必做</a:t>
             </a:r>
@@ -7965,13 +7799,12 @@
             <a:avLst/>
           </a:prstGeom>
           <a:noFill/>
-          <a:ln/>
         </p:spPr>
         <p:txBody>
           <a:bodyPr wrap="square" rtlCol="0" anchor="ctr"/>
           <a:lstStyle/>
           <a:p>
-            <a:pPr algn="l" indent="0" marL="0">
+            <a:pPr marL="0" indent="0" algn="l">
               <a:buNone/>
             </a:pPr>
             <a:r>
@@ -7979,9 +7812,9 @@
                 <a:solidFill>
                   <a:srgbClr val="1F2329"/>
                 </a:solidFill>
-                <a:latin typeface="微软雅黑" pitchFamily="34" charset="0"/>
-                <a:ea typeface="微软雅黑" pitchFamily="34" charset="-122"/>
-                <a:cs typeface="微软雅黑" pitchFamily="34" charset="-120"/>
+                <a:latin typeface="微软雅黑" panose="020B0503020204020204" pitchFamily="34" charset="-122"/>
+                <a:ea typeface="微软雅黑" panose="020B0503020204020204" pitchFamily="34" charset="-122"/>
+                <a:cs typeface="微软雅黑" panose="020B0503020204020204" pitchFamily="34" charset="-120"/>
               </a:rPr>
               <a:t>必做题（4/4）</a:t>
             </a:r>
@@ -7995,17 +7828,11 @@
           <p:cNvGraphicFramePr>
             <a:graphicFrameLocks noGrp="1"/>
           </p:cNvGraphicFramePr>
-          <p:nvPr>
-            <p:extLst>
-              <p:ext uri="{D42A27DB-BD31-4B8C-83A1-F6EECF244321}">
-                <p14:modId xmlns:p14="http://schemas.microsoft.com/office/powerpoint/2010/main" val="1579011935"/>
-              </p:ext>
-            </p:extLst>
-          </p:nvPr>
+          <p:nvPr/>
         </p:nvGraphicFramePr>
         <p:xfrm>
           <a:off x="822960" y="2395728"/>
-          <a:ext cx="10545775" cy="914400"/>
+          <a:ext cx="10545775" cy="2523744"/>
         </p:xfrm>
         <a:graphic>
           <a:graphicData uri="http://schemas.openxmlformats.org/drawingml/2006/table">
@@ -8022,7 +7849,7 @@
                     <a:bodyPr/>
                     <a:lstStyle/>
                     <a:p>
-                      <a:pPr algn="l" indent="0" marL="0">
+                      <a:pPr marL="0" indent="0" algn="l">
                         <a:buNone/>
                       </a:pPr>
                       <a:r>
@@ -8030,20 +7857,20 @@
                           <a:solidFill>
                             <a:srgbClr val="1F4E9C"/>
                           </a:solidFill>
-                          <a:latin typeface="微软雅黑" pitchFamily="34" charset="0"/>
-                          <a:ea typeface="微软雅黑" pitchFamily="34" charset="-122"/>
-                          <a:cs typeface="微软雅黑" pitchFamily="34" charset="-120"/>
+                          <a:latin typeface="微软雅黑" panose="020B0503020204020204" pitchFamily="34" charset="-122"/>
+                          <a:ea typeface="微软雅黑" panose="020B0503020204020204" pitchFamily="34" charset="-122"/>
+                          <a:cs typeface="微软雅黑" panose="020B0503020204020204" pitchFamily="34" charset="-120"/>
                         </a:rPr>
                         <a:t>题号</a:t>
                       </a:r>
                       <a:endParaRPr lang="en-US" sz="1500" dirty="0">
-                        <a:latin typeface="微软雅黑" charset="0"/>
-                        <a:ea typeface="微软雅黑" charset="0"/>
-                        <a:cs typeface="微软雅黑" charset="0"/>
+                        <a:latin typeface="微软雅黑" panose="020B0503020204020204" pitchFamily="34" charset="-122"/>
+                        <a:ea typeface="微软雅黑" panose="020B0503020204020204" pitchFamily="34" charset="-122"/>
+                        <a:cs typeface="微软雅黑" panose="020B0503020204020204" pitchFamily="34" charset="-122"/>
                       </a:endParaRPr>
                     </a:p>
                   </a:txBody>
-                  <a:tcPr marL="91440" marR="91440" marT="45720" marB="45720" anchor="ctr">
+                  <a:tcPr anchor="ctr">
                     <a:lnL w="9525" cap="flat" cmpd="sng" algn="ctr">
                       <a:solidFill>
                         <a:srgbClr val="D8DBE0"/>
@@ -8090,7 +7917,7 @@
                     <a:bodyPr/>
                     <a:lstStyle/>
                     <a:p>
-                      <a:pPr algn="l" indent="0" marL="0">
+                      <a:pPr marL="0" indent="0" algn="l">
                         <a:buNone/>
                       </a:pPr>
                       <a:r>
@@ -8098,20 +7925,20 @@
                           <a:solidFill>
                             <a:srgbClr val="1F4E9C"/>
                           </a:solidFill>
-                          <a:latin typeface="微软雅黑" pitchFamily="34" charset="0"/>
-                          <a:ea typeface="微软雅黑" pitchFamily="34" charset="-122"/>
-                          <a:cs typeface="微软雅黑" pitchFamily="34" charset="-120"/>
+                          <a:latin typeface="微软雅黑" panose="020B0503020204020204" pitchFamily="34" charset="-122"/>
+                          <a:ea typeface="微软雅黑" panose="020B0503020204020204" pitchFamily="34" charset="-122"/>
+                          <a:cs typeface="微软雅黑" panose="020B0503020204020204" pitchFamily="34" charset="-120"/>
                         </a:rPr>
                         <a:t>考点</a:t>
                       </a:r>
                       <a:endParaRPr lang="en-US" sz="1500" dirty="0">
-                        <a:latin typeface="微软雅黑" charset="0"/>
-                        <a:ea typeface="微软雅黑" charset="0"/>
-                        <a:cs typeface="微软雅黑" charset="0"/>
+                        <a:latin typeface="微软雅黑" panose="020B0503020204020204" pitchFamily="34" charset="-122"/>
+                        <a:ea typeface="微软雅黑" panose="020B0503020204020204" pitchFamily="34" charset="-122"/>
+                        <a:cs typeface="微软雅黑" panose="020B0503020204020204" pitchFamily="34" charset="-122"/>
                       </a:endParaRPr>
                     </a:p>
                   </a:txBody>
-                  <a:tcPr marL="91440" marR="91440" marT="45720" marB="45720" anchor="ctr">
+                  <a:tcPr anchor="ctr">
                     <a:lnL w="9525" cap="flat" cmpd="sng" algn="ctr">
                       <a:solidFill>
                         <a:srgbClr val="D8DBE0"/>
@@ -8158,7 +7985,7 @@
                     <a:bodyPr/>
                     <a:lstStyle/>
                     <a:p>
-                      <a:pPr algn="l" indent="0" marL="0">
+                      <a:pPr marL="0" indent="0" algn="l">
                         <a:buNone/>
                       </a:pPr>
                       <a:r>
@@ -8166,20 +7993,20 @@
                           <a:solidFill>
                             <a:srgbClr val="1F4E9C"/>
                           </a:solidFill>
-                          <a:latin typeface="微软雅黑" pitchFamily="34" charset="0"/>
-                          <a:ea typeface="微软雅黑" pitchFamily="34" charset="-122"/>
-                          <a:cs typeface="微软雅黑" pitchFamily="34" charset="-120"/>
+                          <a:latin typeface="微软雅黑" panose="020B0503020204020204" pitchFamily="34" charset="-122"/>
+                          <a:ea typeface="微软雅黑" panose="020B0503020204020204" pitchFamily="34" charset="-122"/>
+                          <a:cs typeface="微软雅黑" panose="020B0503020204020204" pitchFamily="34" charset="-120"/>
                         </a:rPr>
                         <a:t>价值</a:t>
                       </a:r>
                       <a:endParaRPr lang="en-US" sz="1500" dirty="0">
-                        <a:latin typeface="微软雅黑" charset="0"/>
-                        <a:ea typeface="微软雅黑" charset="0"/>
-                        <a:cs typeface="微软雅黑" charset="0"/>
+                        <a:latin typeface="微软雅黑" panose="020B0503020204020204" pitchFamily="34" charset="-122"/>
+                        <a:ea typeface="微软雅黑" panose="020B0503020204020204" pitchFamily="34" charset="-122"/>
+                        <a:cs typeface="微软雅黑" panose="020B0503020204020204" pitchFamily="34" charset="-122"/>
                       </a:endParaRPr>
                     </a:p>
                   </a:txBody>
-                  <a:tcPr marL="91440" marR="91440" marT="45720" marB="45720" anchor="ctr">
+                  <a:tcPr anchor="ctr">
                     <a:lnL w="9525" cap="flat" cmpd="sng" algn="ctr">
                       <a:solidFill>
                         <a:srgbClr val="D8DBE0"/>
@@ -8228,7 +8055,7 @@
                     <a:bodyPr/>
                     <a:lstStyle/>
                     <a:p>
-                      <a:pPr algn="l" indent="0" marL="0">
+                      <a:pPr marL="0" indent="0" algn="l">
                         <a:buNone/>
                       </a:pPr>
                       <a:r>
@@ -8236,20 +8063,20 @@
                           <a:solidFill>
                             <a:srgbClr val="1F2329"/>
                           </a:solidFill>
-                          <a:latin typeface="微软雅黑" pitchFamily="34" charset="0"/>
-                          <a:ea typeface="微软雅黑" pitchFamily="34" charset="-122"/>
-                          <a:cs typeface="微软雅黑" pitchFamily="34" charset="-120"/>
+                          <a:latin typeface="微软雅黑" panose="020B0503020204020204" pitchFamily="34" charset="-122"/>
+                          <a:ea typeface="微软雅黑" panose="020B0503020204020204" pitchFamily="34" charset="-122"/>
+                          <a:cs typeface="微软雅黑" panose="020B0503020204020204" pitchFamily="34" charset="-120"/>
                         </a:rPr>
                         <a:t>5答2</a:t>
                       </a:r>
                       <a:endParaRPr lang="en-US" sz="1500" dirty="0">
-                        <a:latin typeface="微软雅黑" charset="0"/>
-                        <a:ea typeface="微软雅黑" charset="0"/>
-                        <a:cs typeface="微软雅黑" charset="0"/>
+                        <a:latin typeface="微软雅黑" panose="020B0503020204020204" pitchFamily="34" charset="-122"/>
+                        <a:ea typeface="微软雅黑" panose="020B0503020204020204" pitchFamily="34" charset="-122"/>
+                        <a:cs typeface="微软雅黑" panose="020B0503020204020204" pitchFamily="34" charset="-122"/>
                       </a:endParaRPr>
                     </a:p>
                   </a:txBody>
-                  <a:tcPr marL="91440" marR="91440" marT="45720" marB="45720" anchor="ctr">
+                  <a:tcPr anchor="ctr">
                     <a:lnL w="9525" cap="flat" cmpd="sng" algn="ctr">
                       <a:solidFill>
                         <a:srgbClr val="D8DBE0"/>
@@ -8296,7 +8123,7 @@
                     <a:bodyPr/>
                     <a:lstStyle/>
                     <a:p>
-                      <a:pPr algn="l" indent="0" marL="0">
+                      <a:pPr marL="0" indent="0" algn="l">
                         <a:buNone/>
                       </a:pPr>
                       <a:r>
@@ -8304,20 +8131,20 @@
                           <a:solidFill>
                             <a:srgbClr val="1F2329"/>
                           </a:solidFill>
-                          <a:latin typeface="微软雅黑" pitchFamily="34" charset="0"/>
-                          <a:ea typeface="微软雅黑" pitchFamily="34" charset="-122"/>
-                          <a:cs typeface="微软雅黑" pitchFamily="34" charset="-120"/>
+                          <a:latin typeface="微软雅黑" panose="020B0503020204020204" pitchFamily="34" charset="-122"/>
+                          <a:ea typeface="微软雅黑" panose="020B0503020204020204" pitchFamily="34" charset="-122"/>
+                          <a:cs typeface="微软雅黑" panose="020B0503020204020204" pitchFamily="34" charset="-120"/>
                         </a:rPr>
                         <a:t>四维数组地址</a:t>
                       </a:r>
                       <a:endParaRPr lang="en-US" sz="1500" dirty="0">
-                        <a:latin typeface="微软雅黑" charset="0"/>
-                        <a:ea typeface="微软雅黑" charset="0"/>
-                        <a:cs typeface="微软雅黑" charset="0"/>
+                        <a:latin typeface="微软雅黑" panose="020B0503020204020204" pitchFamily="34" charset="-122"/>
+                        <a:ea typeface="微软雅黑" panose="020B0503020204020204" pitchFamily="34" charset="-122"/>
+                        <a:cs typeface="微软雅黑" panose="020B0503020204020204" pitchFamily="34" charset="-122"/>
                       </a:endParaRPr>
                     </a:p>
                   </a:txBody>
-                  <a:tcPr marL="91440" marR="91440" marT="45720" marB="45720" anchor="ctr">
+                  <a:tcPr anchor="ctr">
                     <a:lnL w="9525" cap="flat" cmpd="sng" algn="ctr">
                       <a:solidFill>
                         <a:srgbClr val="D8DBE0"/>
@@ -8364,7 +8191,7 @@
                     <a:bodyPr/>
                     <a:lstStyle/>
                     <a:p>
-                      <a:pPr algn="l" indent="0" marL="0">
+                      <a:pPr marL="0" indent="0" algn="l">
                         <a:buNone/>
                       </a:pPr>
                       <a:r>
@@ -8372,20 +8199,20 @@
                           <a:solidFill>
                             <a:srgbClr val="1F2329"/>
                           </a:solidFill>
-                          <a:latin typeface="微软雅黑" pitchFamily="34" charset="0"/>
-                          <a:ea typeface="微软雅黑" pitchFamily="34" charset="-122"/>
-                          <a:cs typeface="微软雅黑" pitchFamily="34" charset="-120"/>
+                          <a:latin typeface="微软雅黑" panose="020B0503020204020204" pitchFamily="34" charset="-122"/>
+                          <a:ea typeface="微软雅黑" panose="020B0503020204020204" pitchFamily="34" charset="-122"/>
+                          <a:cs typeface="微软雅黑" panose="020B0503020204020204" pitchFamily="34" charset="-120"/>
                         </a:rPr>
                         <a:t>低下标优先四维数组求A[91..]，2025填3原题形态</a:t>
                       </a:r>
                       <a:endParaRPr lang="en-US" sz="1500" dirty="0">
-                        <a:latin typeface="微软雅黑" charset="0"/>
-                        <a:ea typeface="微软雅黑" charset="0"/>
-                        <a:cs typeface="微软雅黑" charset="0"/>
+                        <a:latin typeface="微软雅黑" panose="020B0503020204020204" pitchFamily="34" charset="-122"/>
+                        <a:ea typeface="微软雅黑" panose="020B0503020204020204" pitchFamily="34" charset="-122"/>
+                        <a:cs typeface="微软雅黑" panose="020B0503020204020204" pitchFamily="34" charset="-122"/>
                       </a:endParaRPr>
                     </a:p>
                   </a:txBody>
-                  <a:tcPr marL="91440" marR="91440" marT="45720" marB="45720" anchor="ctr">
+                  <a:tcPr anchor="ctr">
                     <a:lnL w="9525" cap="flat" cmpd="sng" algn="ctr">
                       <a:solidFill>
                         <a:srgbClr val="D8DBE0"/>
@@ -8434,7 +8261,7 @@
                     <a:bodyPr/>
                     <a:lstStyle/>
                     <a:p>
-                      <a:pPr algn="l" indent="0" marL="0">
+                      <a:pPr marL="0" indent="0" algn="l">
                         <a:buNone/>
                       </a:pPr>
                       <a:r>
@@ -8442,20 +8269,20 @@
                           <a:solidFill>
                             <a:srgbClr val="1F2329"/>
                           </a:solidFill>
-                          <a:latin typeface="微软雅黑" pitchFamily="34" charset="0"/>
-                          <a:ea typeface="微软雅黑" pitchFamily="34" charset="-122"/>
-                          <a:cs typeface="微软雅黑" pitchFamily="34" charset="-120"/>
+                          <a:latin typeface="微软雅黑" panose="020B0503020204020204" pitchFamily="34" charset="-122"/>
+                          <a:ea typeface="微软雅黑" panose="020B0503020204020204" pitchFamily="34" charset="-122"/>
+                          <a:cs typeface="微软雅黑" panose="020B0503020204020204" pitchFamily="34" charset="-120"/>
                         </a:rPr>
                         <a:t>5答3</a:t>
                       </a:r>
                       <a:endParaRPr lang="en-US" sz="1500" dirty="0">
-                        <a:latin typeface="微软雅黑" charset="0"/>
-                        <a:ea typeface="微软雅黑" charset="0"/>
-                        <a:cs typeface="微软雅黑" charset="0"/>
+                        <a:latin typeface="微软雅黑" panose="020B0503020204020204" pitchFamily="34" charset="-122"/>
+                        <a:ea typeface="微软雅黑" panose="020B0503020204020204" pitchFamily="34" charset="-122"/>
+                        <a:cs typeface="微软雅黑" panose="020B0503020204020204" pitchFamily="34" charset="-122"/>
                       </a:endParaRPr>
                     </a:p>
                   </a:txBody>
-                  <a:tcPr marL="91440" marR="91440" marT="45720" marB="45720" anchor="ctr">
+                  <a:tcPr anchor="ctr">
                     <a:lnL w="9525" cap="flat" cmpd="sng" algn="ctr">
                       <a:solidFill>
                         <a:srgbClr val="D8DBE0"/>
@@ -8502,7 +8329,7 @@
                     <a:bodyPr/>
                     <a:lstStyle/>
                     <a:p>
-                      <a:pPr algn="l" indent="0" marL="0">
+                      <a:pPr marL="0" indent="0" algn="l">
                         <a:buNone/>
                       </a:pPr>
                       <a:r>
@@ -8510,20 +8337,20 @@
                           <a:solidFill>
                             <a:srgbClr val="1F2329"/>
                           </a:solidFill>
-                          <a:latin typeface="微软雅黑" pitchFamily="34" charset="0"/>
-                          <a:ea typeface="微软雅黑" pitchFamily="34" charset="-122"/>
-                          <a:cs typeface="微软雅黑" pitchFamily="34" charset="-120"/>
+                          <a:latin typeface="微软雅黑" panose="020B0503020204020204" pitchFamily="34" charset="-122"/>
+                          <a:ea typeface="微软雅黑" panose="020B0503020204020204" pitchFamily="34" charset="-122"/>
+                          <a:cs typeface="微软雅黑" panose="020B0503020204020204" pitchFamily="34" charset="-120"/>
                         </a:rPr>
                         <a:t>高下标优先枚举</a:t>
                       </a:r>
                       <a:endParaRPr lang="en-US" sz="1500" dirty="0">
-                        <a:latin typeface="微软雅黑" charset="0"/>
-                        <a:ea typeface="微软雅黑" charset="0"/>
-                        <a:cs typeface="微软雅黑" charset="0"/>
+                        <a:latin typeface="微软雅黑" panose="020B0503020204020204" pitchFamily="34" charset="-122"/>
+                        <a:ea typeface="微软雅黑" panose="020B0503020204020204" pitchFamily="34" charset="-122"/>
+                        <a:cs typeface="微软雅黑" panose="020B0503020204020204" pitchFamily="34" charset="-122"/>
                       </a:endParaRPr>
                     </a:p>
                   </a:txBody>
-                  <a:tcPr marL="91440" marR="91440" marT="45720" marB="45720" anchor="ctr">
+                  <a:tcPr anchor="ctr">
                     <a:lnL w="9525" cap="flat" cmpd="sng" algn="ctr">
                       <a:solidFill>
                         <a:srgbClr val="D8DBE0"/>
@@ -8570,7 +8397,7 @@
                     <a:bodyPr/>
                     <a:lstStyle/>
                     <a:p>
-                      <a:pPr algn="l" indent="0" marL="0">
+                      <a:pPr marL="0" indent="0" algn="l">
                         <a:buNone/>
                       </a:pPr>
                       <a:r>
@@ -8578,20 +8405,20 @@
                           <a:solidFill>
                             <a:srgbClr val="1F2329"/>
                           </a:solidFill>
-                          <a:latin typeface="微软雅黑" pitchFamily="34" charset="0"/>
-                          <a:ea typeface="微软雅黑" pitchFamily="34" charset="-122"/>
-                          <a:cs typeface="微软雅黑" pitchFamily="34" charset="-120"/>
+                          <a:latin typeface="微软雅黑" panose="020B0503020204020204" pitchFamily="34" charset="-122"/>
+                          <a:ea typeface="微软雅黑" panose="020B0503020204020204" pitchFamily="34" charset="-122"/>
+                          <a:cs typeface="微软雅黑" panose="020B0503020204020204" pitchFamily="34" charset="-120"/>
                         </a:rPr>
                         <a:t>四维数组按序枚举元素，列优先理解</a:t>
                       </a:r>
                       <a:endParaRPr lang="en-US" sz="1500" dirty="0">
-                        <a:latin typeface="微软雅黑" charset="0"/>
-                        <a:ea typeface="微软雅黑" charset="0"/>
-                        <a:cs typeface="微软雅黑" charset="0"/>
+                        <a:latin typeface="微软雅黑" panose="020B0503020204020204" pitchFamily="34" charset="-122"/>
+                        <a:ea typeface="微软雅黑" panose="020B0503020204020204" pitchFamily="34" charset="-122"/>
+                        <a:cs typeface="微软雅黑" panose="020B0503020204020204" pitchFamily="34" charset="-122"/>
                       </a:endParaRPr>
                     </a:p>
                   </a:txBody>
-                  <a:tcPr marL="91440" marR="91440" marT="45720" marB="45720" anchor="ctr">
+                  <a:tcPr anchor="ctr">
                     <a:lnL w="9525" cap="flat" cmpd="sng" algn="ctr">
                       <a:solidFill>
                         <a:srgbClr val="D8DBE0"/>
@@ -8640,7 +8467,7 @@
                     <a:bodyPr/>
                     <a:lstStyle/>
                     <a:p>
-                      <a:pPr algn="l" indent="0" marL="0">
+                      <a:pPr marL="0" indent="0" algn="l">
                         <a:buNone/>
                       </a:pPr>
                       <a:r>
@@ -8648,20 +8475,20 @@
                           <a:solidFill>
                             <a:srgbClr val="1F2329"/>
                           </a:solidFill>
-                          <a:latin typeface="微软雅黑" pitchFamily="34" charset="0"/>
-                          <a:ea typeface="微软雅黑" pitchFamily="34" charset="-122"/>
-                          <a:cs typeface="微软雅黑" pitchFamily="34" charset="-120"/>
+                          <a:latin typeface="微软雅黑" panose="020B0503020204020204" pitchFamily="34" charset="-122"/>
+                          <a:ea typeface="微软雅黑" panose="020B0503020204020204" pitchFamily="34" charset="-122"/>
+                          <a:cs typeface="微软雅黑" panose="020B0503020204020204" pitchFamily="34" charset="-120"/>
                         </a:rPr>
                         <a:t>5答13</a:t>
                       </a:r>
                       <a:endParaRPr lang="en-US" sz="1500" dirty="0">
-                        <a:latin typeface="微软雅黑" charset="0"/>
-                        <a:ea typeface="微软雅黑" charset="0"/>
-                        <a:cs typeface="微软雅黑" charset="0"/>
+                        <a:latin typeface="微软雅黑" panose="020B0503020204020204" pitchFamily="34" charset="-122"/>
+                        <a:ea typeface="微软雅黑" panose="020B0503020204020204" pitchFamily="34" charset="-122"/>
+                        <a:cs typeface="微软雅黑" panose="020B0503020204020204" pitchFamily="34" charset="-122"/>
                       </a:endParaRPr>
                     </a:p>
                   </a:txBody>
-                  <a:tcPr marL="91440" marR="91440" marT="45720" marB="45720" anchor="ctr">
+                  <a:tcPr anchor="ctr">
                     <a:lnL w="9525" cap="flat" cmpd="sng" algn="ctr">
                       <a:solidFill>
                         <a:srgbClr val="D8DBE0"/>
@@ -8708,7 +8535,7 @@
                     <a:bodyPr/>
                     <a:lstStyle/>
                     <a:p>
-                      <a:pPr algn="l" indent="0" marL="0">
+                      <a:pPr marL="0" indent="0" algn="l">
                         <a:buNone/>
                       </a:pPr>
                       <a:r>
@@ -8716,20 +8543,20 @@
                           <a:solidFill>
                             <a:srgbClr val="1F2329"/>
                           </a:solidFill>
-                          <a:latin typeface="微软雅黑" pitchFamily="34" charset="0"/>
-                          <a:ea typeface="微软雅黑" pitchFamily="34" charset="-122"/>
-                          <a:cs typeface="微软雅黑" pitchFamily="34" charset="-120"/>
+                          <a:latin typeface="微软雅黑" panose="020B0503020204020204" pitchFamily="34" charset="-122"/>
+                          <a:ea typeface="微软雅黑" panose="020B0503020204020204" pitchFamily="34" charset="-122"/>
+                          <a:cs typeface="微软雅黑" panose="020B0503020204020204" pitchFamily="34" charset="-120"/>
                         </a:rPr>
                         <a:t>head/tail求值</a:t>
                       </a:r>
                       <a:endParaRPr lang="en-US" sz="1500" dirty="0">
-                        <a:latin typeface="微软雅黑" charset="0"/>
-                        <a:ea typeface="微软雅黑" charset="0"/>
-                        <a:cs typeface="微软雅黑" charset="0"/>
+                        <a:latin typeface="微软雅黑" panose="020B0503020204020204" pitchFamily="34" charset="-122"/>
+                        <a:ea typeface="微软雅黑" panose="020B0503020204020204" pitchFamily="34" charset="-122"/>
+                        <a:cs typeface="微软雅黑" panose="020B0503020204020204" pitchFamily="34" charset="-122"/>
                       </a:endParaRPr>
                     </a:p>
                   </a:txBody>
-                  <a:tcPr marL="91440" marR="91440" marT="45720" marB="45720" anchor="ctr">
+                  <a:tcPr anchor="ctr">
                     <a:lnL w="9525" cap="flat" cmpd="sng" algn="ctr">
                       <a:solidFill>
                         <a:srgbClr val="D8DBE0"/>
@@ -8776,7 +8603,7 @@
                     <a:bodyPr/>
                     <a:lstStyle/>
                     <a:p>
-                      <a:pPr algn="l" indent="0" marL="0">
+                      <a:pPr marL="0" indent="0" algn="l">
                         <a:buNone/>
                       </a:pPr>
                       <a:r>
@@ -8784,20 +8611,20 @@
                           <a:solidFill>
                             <a:srgbClr val="1F2329"/>
                           </a:solidFill>
-                          <a:latin typeface="微软雅黑" pitchFamily="34" charset="0"/>
-                          <a:ea typeface="微软雅黑" pitchFamily="34" charset="-122"/>
-                          <a:cs typeface="微软雅黑" pitchFamily="34" charset="-120"/>
+                          <a:latin typeface="微软雅黑" panose="020B0503020204020204" pitchFamily="34" charset="-122"/>
+                          <a:ea typeface="微软雅黑" panose="020B0503020204020204" pitchFamily="34" charset="-122"/>
+                          <a:cs typeface="微软雅黑" panose="020B0503020204020204" pitchFamily="34" charset="-120"/>
                         </a:rPr>
                         <a:t>多个复合运算求值，2026填14/2025填7同型</a:t>
                       </a:r>
                       <a:endParaRPr lang="en-US" sz="1500" dirty="0">
-                        <a:latin typeface="微软雅黑" charset="0"/>
-                        <a:ea typeface="微软雅黑" charset="0"/>
-                        <a:cs typeface="微软雅黑" charset="0"/>
+                        <a:latin typeface="微软雅黑" panose="020B0503020204020204" pitchFamily="34" charset="-122"/>
+                        <a:ea typeface="微软雅黑" panose="020B0503020204020204" pitchFamily="34" charset="-122"/>
+                        <a:cs typeface="微软雅黑" panose="020B0503020204020204" pitchFamily="34" charset="-122"/>
                       </a:endParaRPr>
                     </a:p>
                   </a:txBody>
-                  <a:tcPr marL="91440" marR="91440" marT="45720" marB="45720" anchor="ctr">
+                  <a:tcPr anchor="ctr">
                     <a:lnL w="9525" cap="flat" cmpd="sng" algn="ctr">
                       <a:solidFill>
                         <a:srgbClr val="D8DBE0"/>
@@ -8846,7 +8673,7 @@
                     <a:bodyPr/>
                     <a:lstStyle/>
                     <a:p>
-                      <a:pPr algn="l" indent="0" marL="0">
+                      <a:pPr marL="0" indent="0" algn="l">
                         <a:buNone/>
                       </a:pPr>
                       <a:r>
@@ -8854,20 +8681,20 @@
                           <a:solidFill>
                             <a:srgbClr val="1F2329"/>
                           </a:solidFill>
-                          <a:latin typeface="微软雅黑" pitchFamily="34" charset="0"/>
-                          <a:ea typeface="微软雅黑" pitchFamily="34" charset="-122"/>
-                          <a:cs typeface="微软雅黑" pitchFamily="34" charset="-120"/>
+                          <a:latin typeface="微软雅黑" panose="020B0503020204020204" pitchFamily="34" charset="-122"/>
+                          <a:ea typeface="微软雅黑" panose="020B0503020204020204" pitchFamily="34" charset="-122"/>
+                          <a:cs typeface="微软雅黑" panose="020B0503020204020204" pitchFamily="34" charset="-120"/>
                         </a:rPr>
                         <a:t>5答14</a:t>
                       </a:r>
                       <a:endParaRPr lang="en-US" sz="1500" dirty="0">
-                        <a:latin typeface="微软雅黑" charset="0"/>
-                        <a:ea typeface="微软雅黑" charset="0"/>
-                        <a:cs typeface="微软雅黑" charset="0"/>
+                        <a:latin typeface="微软雅黑" panose="020B0503020204020204" pitchFamily="34" charset="-122"/>
+                        <a:ea typeface="微软雅黑" panose="020B0503020204020204" pitchFamily="34" charset="-122"/>
+                        <a:cs typeface="微软雅黑" panose="020B0503020204020204" pitchFamily="34" charset="-122"/>
                       </a:endParaRPr>
                     </a:p>
                   </a:txBody>
-                  <a:tcPr marL="91440" marR="91440" marT="45720" marB="45720" anchor="ctr">
+                  <a:tcPr anchor="ctr">
                     <a:lnL w="9525" cap="flat" cmpd="sng" algn="ctr">
                       <a:solidFill>
                         <a:srgbClr val="D8DBE0"/>
@@ -8914,7 +8741,7 @@
                     <a:bodyPr/>
                     <a:lstStyle/>
                     <a:p>
-                      <a:pPr algn="l" indent="0" marL="0">
+                      <a:pPr marL="0" indent="0" algn="l">
                         <a:buNone/>
                       </a:pPr>
                       <a:r>
@@ -8922,20 +8749,20 @@
                           <a:solidFill>
                             <a:srgbClr val="1F2329"/>
                           </a:solidFill>
-                          <a:latin typeface="微软雅黑" pitchFamily="34" charset="0"/>
-                          <a:ea typeface="微软雅黑" pitchFamily="34" charset="-122"/>
-                          <a:cs typeface="微软雅黑" pitchFamily="34" charset="-120"/>
+                          <a:latin typeface="微软雅黑" panose="020B0503020204020204" pitchFamily="34" charset="-122"/>
+                          <a:ea typeface="微软雅黑" panose="020B0503020204020204" pitchFamily="34" charset="-122"/>
+                          <a:cs typeface="微软雅黑" panose="020B0503020204020204" pitchFamily="34" charset="-120"/>
                         </a:rPr>
                         <a:t>head/tail写表达式</a:t>
                       </a:r>
                       <a:endParaRPr lang="en-US" sz="1500" dirty="0">
-                        <a:latin typeface="微软雅黑" charset="0"/>
-                        <a:ea typeface="微软雅黑" charset="0"/>
-                        <a:cs typeface="微软雅黑" charset="0"/>
+                        <a:latin typeface="微软雅黑" panose="020B0503020204020204" pitchFamily="34" charset="-122"/>
+                        <a:ea typeface="微软雅黑" panose="020B0503020204020204" pitchFamily="34" charset="-122"/>
+                        <a:cs typeface="微软雅黑" panose="020B0503020204020204" pitchFamily="34" charset="-122"/>
                       </a:endParaRPr>
                     </a:p>
                   </a:txBody>
-                  <a:tcPr marL="91440" marR="91440" marT="45720" marB="45720" anchor="ctr">
+                  <a:tcPr anchor="ctr">
                     <a:lnL w="9525" cap="flat" cmpd="sng" algn="ctr">
                       <a:solidFill>
                         <a:srgbClr val="D8DBE0"/>
@@ -8982,7 +8809,7 @@
                     <a:bodyPr/>
                     <a:lstStyle/>
                     <a:p>
-                      <a:pPr algn="l" indent="0" marL="0">
+                      <a:pPr marL="0" indent="0" algn="l">
                         <a:buNone/>
                       </a:pPr>
                       <a:r>
@@ -8990,20 +8817,20 @@
                           <a:solidFill>
                             <a:srgbClr val="1F2329"/>
                           </a:solidFill>
-                          <a:latin typeface="微软雅黑" pitchFamily="34" charset="0"/>
-                          <a:ea typeface="微软雅黑" pitchFamily="34" charset="-122"/>
-                          <a:cs typeface="微软雅黑" pitchFamily="34" charset="-120"/>
+                          <a:latin typeface="微软雅黑" panose="020B0503020204020204" pitchFamily="34" charset="-122"/>
+                          <a:ea typeface="微软雅黑" panose="020B0503020204020204" pitchFamily="34" charset="-122"/>
+                          <a:cs typeface="微软雅黑" panose="020B0503020204020204" pitchFamily="34" charset="-120"/>
                         </a:rPr>
                         <a:t>用GetHead/GetTail写分离表达式，逆向运用</a:t>
                       </a:r>
                       <a:endParaRPr lang="en-US" sz="1500" dirty="0">
-                        <a:latin typeface="微软雅黑" charset="0"/>
-                        <a:ea typeface="微软雅黑" charset="0"/>
-                        <a:cs typeface="微软雅黑" charset="0"/>
+                        <a:latin typeface="微软雅黑" panose="020B0503020204020204" pitchFamily="34" charset="-122"/>
+                        <a:ea typeface="微软雅黑" panose="020B0503020204020204" pitchFamily="34" charset="-122"/>
+                        <a:cs typeface="微软雅黑" panose="020B0503020204020204" pitchFamily="34" charset="-122"/>
                       </a:endParaRPr>
                     </a:p>
                   </a:txBody>
-                  <a:tcPr marL="91440" marR="91440" marT="45720" marB="45720" anchor="ctr">
+                  <a:tcPr anchor="ctr">
                     <a:lnL w="9525" cap="flat" cmpd="sng" algn="ctr">
                       <a:solidFill>
                         <a:srgbClr val="D8DBE0"/>
@@ -9052,7 +8879,7 @@
                     <a:bodyPr/>
                     <a:lstStyle/>
                     <a:p>
-                      <a:pPr algn="l" indent="0" marL="0">
+                      <a:pPr marL="0" indent="0" algn="l">
                         <a:buNone/>
                       </a:pPr>
                       <a:r>
@@ -9060,20 +8887,20 @@
                           <a:solidFill>
                             <a:srgbClr val="1F2329"/>
                           </a:solidFill>
-                          <a:latin typeface="微软雅黑" pitchFamily="34" charset="0"/>
-                          <a:ea typeface="微软雅黑" pitchFamily="34" charset="-122"/>
-                          <a:cs typeface="微软雅黑" pitchFamily="34" charset="-120"/>
+                          <a:latin typeface="微软雅黑" panose="020B0503020204020204" pitchFamily="34" charset="-122"/>
+                          <a:ea typeface="微软雅黑" panose="020B0503020204020204" pitchFamily="34" charset="-122"/>
+                          <a:cs typeface="微软雅黑" panose="020B0503020204020204" pitchFamily="34" charset="-120"/>
                         </a:rPr>
                         <a:t>5算1</a:t>
                       </a:r>
                       <a:endParaRPr lang="en-US" sz="1500" dirty="0">
-                        <a:latin typeface="微软雅黑" charset="0"/>
-                        <a:ea typeface="微软雅黑" charset="0"/>
-                        <a:cs typeface="微软雅黑" charset="0"/>
+                        <a:latin typeface="微软雅黑" panose="020B0503020204020204" pitchFamily="34" charset="-122"/>
+                        <a:ea typeface="微软雅黑" panose="020B0503020204020204" pitchFamily="34" charset="-122"/>
+                        <a:cs typeface="微软雅黑" panose="020B0503020204020204" pitchFamily="34" charset="-122"/>
                       </a:endParaRPr>
                     </a:p>
                   </a:txBody>
-                  <a:tcPr marL="91440" marR="91440" marT="45720" marB="45720" anchor="ctr">
+                  <a:tcPr anchor="ctr">
                     <a:lnL w="9525" cap="flat" cmpd="sng" algn="ctr">
                       <a:solidFill>
                         <a:srgbClr val="D8DBE0"/>
@@ -9120,7 +8947,7 @@
                     <a:bodyPr/>
                     <a:lstStyle/>
                     <a:p>
-                      <a:pPr algn="l" indent="0" marL="0">
+                      <a:pPr marL="0" indent="0" algn="l">
                         <a:buNone/>
                       </a:pPr>
                       <a:r>
@@ -9128,20 +8955,20 @@
                           <a:solidFill>
                             <a:srgbClr val="1F2329"/>
                           </a:solidFill>
-                          <a:latin typeface="微软雅黑" pitchFamily="34" charset="0"/>
-                          <a:ea typeface="微软雅黑" pitchFamily="34" charset="-122"/>
-                          <a:cs typeface="微软雅黑" pitchFamily="34" charset="-120"/>
+                          <a:latin typeface="微软雅黑" panose="020B0503020204020204" pitchFamily="34" charset="-122"/>
+                          <a:ea typeface="微软雅黑" panose="020B0503020204020204" pitchFamily="34" charset="-122"/>
+                          <a:cs typeface="微软雅黑" panose="020B0503020204020204" pitchFamily="34" charset="-120"/>
                         </a:rPr>
                         <a:t>循环右移（逆置模板）</a:t>
                       </a:r>
                       <a:endParaRPr lang="en-US" sz="1500" dirty="0">
-                        <a:latin typeface="微软雅黑" charset="0"/>
-                        <a:ea typeface="微软雅黑" charset="0"/>
-                        <a:cs typeface="微软雅黑" charset="0"/>
+                        <a:latin typeface="微软雅黑" panose="020B0503020204020204" pitchFamily="34" charset="-122"/>
+                        <a:ea typeface="微软雅黑" panose="020B0503020204020204" pitchFamily="34" charset="-122"/>
+                        <a:cs typeface="微软雅黑" panose="020B0503020204020204" pitchFamily="34" charset="-122"/>
                       </a:endParaRPr>
                     </a:p>
                   </a:txBody>
-                  <a:tcPr marL="91440" marR="91440" marT="45720" marB="45720" anchor="ctr">
+                  <a:tcPr anchor="ctr">
                     <a:lnL w="9525" cap="flat" cmpd="sng" algn="ctr">
                       <a:solidFill>
                         <a:srgbClr val="D8DBE0"/>
@@ -9188,7 +9015,7 @@
                     <a:bodyPr/>
                     <a:lstStyle/>
                     <a:p>
-                      <a:pPr algn="l" indent="0" marL="0">
+                      <a:pPr marL="0" indent="0" algn="l">
                         <a:buNone/>
                       </a:pPr>
                       <a:r>
@@ -9196,20 +9023,20 @@
                           <a:solidFill>
                             <a:srgbClr val="1F2329"/>
                           </a:solidFill>
-                          <a:latin typeface="微软雅黑" pitchFamily="34" charset="0"/>
-                          <a:ea typeface="微软雅黑" pitchFamily="34" charset="-122"/>
-                          <a:cs typeface="微软雅黑" pitchFamily="34" charset="-120"/>
+                          <a:latin typeface="微软雅黑" panose="020B0503020204020204" pitchFamily="34" charset="-122"/>
+                          <a:ea typeface="微软雅黑" panose="020B0503020204020204" pitchFamily="34" charset="-122"/>
+                          <a:cs typeface="微软雅黑" panose="020B0503020204020204" pitchFamily="34" charset="-120"/>
                         </a:rPr>
                         <a:t>数组循环右移k位O(1)空间，三次逆置模板</a:t>
                       </a:r>
                       <a:endParaRPr lang="en-US" sz="1500" dirty="0">
-                        <a:latin typeface="微软雅黑" charset="0"/>
-                        <a:ea typeface="微软雅黑" charset="0"/>
-                        <a:cs typeface="微软雅黑" charset="0"/>
+                        <a:latin typeface="微软雅黑" panose="020B0503020204020204" pitchFamily="34" charset="-122"/>
+                        <a:ea typeface="微软雅黑" panose="020B0503020204020204" pitchFamily="34" charset="-122"/>
+                        <a:cs typeface="微软雅黑" panose="020B0503020204020204" pitchFamily="34" charset="-122"/>
                       </a:endParaRPr>
                     </a:p>
                   </a:txBody>
-                  <a:tcPr marL="91440" marR="91440" marT="45720" marB="45720" anchor="ctr">
+                  <a:tcPr anchor="ctr">
                     <a:lnL w="9525" cap="flat" cmpd="sng" algn="ctr">
                       <a:solidFill>
                         <a:srgbClr val="D8DBE0"/>
@@ -9266,7 +9093,7 @@
 
 <file path=ppt/slides/slide7.xml><?xml version="1.0" encoding="utf-8"?>
 <p:sld xmlns:a="http://schemas.openxmlformats.org/drawingml/2006/main" xmlns:r="http://schemas.openxmlformats.org/officeDocument/2006/relationships" xmlns:p="http://schemas.openxmlformats.org/presentationml/2006/main">
-  <p:cSld name="Slide 7">
+  <p:cSld>
     <p:bg>
       <p:bgPr>
         <a:blipFill dpi="0" rotWithShape="1">
@@ -9310,13 +9137,12 @@
             <a:avLst/>
           </a:prstGeom>
           <a:noFill/>
-          <a:ln/>
         </p:spPr>
         <p:txBody>
           <a:bodyPr wrap="square" rtlCol="0" anchor="ctr"/>
           <a:lstStyle/>
           <a:p>
-            <a:pPr algn="r" indent="0" marL="0">
+            <a:pPr marL="0" indent="0" algn="r">
               <a:buNone/>
             </a:pPr>
             <a:r>
@@ -9324,11 +9150,11 @@
                 <a:solidFill>
                   <a:srgbClr val="8A9099"/>
                 </a:solidFill>
-                <a:latin typeface="微软雅黑" pitchFamily="34" charset="0"/>
-                <a:ea typeface="微软雅黑" pitchFamily="34" charset="-122"/>
-                <a:cs typeface="微软雅黑" pitchFamily="34" charset="-120"/>
+                <a:latin typeface="微软雅黑" panose="020B0503020204020204" pitchFamily="34" charset="-122"/>
+                <a:ea typeface="微软雅黑" panose="020B0503020204020204" pitchFamily="34" charset="-122"/>
+                <a:cs typeface="微软雅黑" panose="020B0503020204020204" pitchFamily="34" charset="-120"/>
               </a:rPr>
-              <a:t>7 / 10</a:t>
+              <a:t>8 / 10</a:t>
             </a:r>
             <a:endParaRPr lang="en-US" sz="1000" dirty="0"/>
           </a:p>
@@ -9349,13 +9175,12 @@
             <a:avLst/>
           </a:prstGeom>
           <a:noFill/>
-          <a:ln/>
         </p:spPr>
         <p:txBody>
           <a:bodyPr wrap="square" rtlCol="0" anchor="ctr"/>
           <a:lstStyle/>
           <a:p>
-            <a:pPr algn="l" indent="0" marL="0">
+            <a:pPr marL="0" indent="0" algn="l">
               <a:buNone/>
             </a:pPr>
             <a:r>
@@ -9363,11 +9188,11 @@
                 <a:solidFill>
                   <a:srgbClr val="1F4E9C"/>
                 </a:solidFill>
-                <a:latin typeface="微软雅黑" pitchFamily="34" charset="0"/>
-                <a:ea typeface="微软雅黑" pitchFamily="34" charset="-122"/>
-                <a:cs typeface="微软雅黑" pitchFamily="34" charset="-120"/>
+                <a:latin typeface="微软雅黑" panose="020B0503020204020204" pitchFamily="34" charset="-122"/>
+                <a:ea typeface="微软雅黑" panose="020B0503020204020204" pitchFamily="34" charset="-122"/>
+                <a:cs typeface="微软雅黑" panose="020B0503020204020204" pitchFamily="34" charset="-120"/>
               </a:rPr>
-              <a:t>可做可不做</a:t>
+              <a:t>完全不做</a:t>
             </a:r>
             <a:endParaRPr lang="en-US" sz="1400" dirty="0"/>
           </a:p>
@@ -9388,13 +9213,12 @@
             <a:avLst/>
           </a:prstGeom>
           <a:noFill/>
-          <a:ln/>
         </p:spPr>
         <p:txBody>
           <a:bodyPr wrap="square" rtlCol="0" anchor="ctr"/>
           <a:lstStyle/>
           <a:p>
-            <a:pPr algn="l" indent="0" marL="0">
+            <a:pPr marL="0" indent="0" algn="l">
               <a:buNone/>
             </a:pPr>
             <a:r>
@@ -9402,11 +9226,11 @@
                 <a:solidFill>
                   <a:srgbClr val="1F2329"/>
                 </a:solidFill>
-                <a:latin typeface="微软雅黑" pitchFamily="34" charset="0"/>
-                <a:ea typeface="微软雅黑" pitchFamily="34" charset="-122"/>
-                <a:cs typeface="微软雅黑" pitchFamily="34" charset="-120"/>
+                <a:latin typeface="微软雅黑" panose="020B0503020204020204" pitchFamily="34" charset="-122"/>
+                <a:ea typeface="微软雅黑" panose="020B0503020204020204" pitchFamily="34" charset="-122"/>
+                <a:cs typeface="微软雅黑" panose="020B0503020204020204" pitchFamily="34" charset="-120"/>
               </a:rPr>
-              <a:t>可做可不做清单</a:t>
+              <a:t>完全不做清单（1/2）</a:t>
             </a:r>
             <a:endParaRPr lang="en-US" sz="2800" dirty="0"/>
           </a:p>
@@ -9414,21 +9238,15 @@
       </p:sp>
       <p:graphicFrame>
         <p:nvGraphicFramePr>
-          <p:cNvPr id="8" name="Table 0"/>
+          <p:cNvPr id="9" name="Table 0"/>
           <p:cNvGraphicFramePr>
             <a:graphicFrameLocks noGrp="1"/>
           </p:cNvGraphicFramePr>
-          <p:nvPr>
-            <p:extLst>
-              <p:ext uri="{D42A27DB-BD31-4B8C-83A1-F6EECF244321}">
-                <p14:modId xmlns:p14="http://schemas.microsoft.com/office/powerpoint/2010/main" val="1579011935"/>
-              </p:ext>
-            </p:extLst>
-          </p:nvPr>
+          <p:nvPr/>
         </p:nvGraphicFramePr>
         <p:xfrm>
           <a:off x="822960" y="2395728"/>
-          <a:ext cx="10545775" cy="914400"/>
+          <a:ext cx="10545775" cy="2103120"/>
         </p:xfrm>
         <a:graphic>
           <a:graphicData uri="http://schemas.openxmlformats.org/drawingml/2006/table">
@@ -9444,7 +9262,7 @@
                     <a:bodyPr/>
                     <a:lstStyle/>
                     <a:p>
-                      <a:pPr algn="l" indent="0" marL="0">
+                      <a:pPr marL="0" indent="0" algn="l">
                         <a:buNone/>
                       </a:pPr>
                       <a:r>
@@ -9452,20 +9270,20 @@
                           <a:solidFill>
                             <a:srgbClr val="1F4E9C"/>
                           </a:solidFill>
-                          <a:latin typeface="微软雅黑" pitchFamily="34" charset="0"/>
-                          <a:ea typeface="微软雅黑" pitchFamily="34" charset="-122"/>
-                          <a:cs typeface="微软雅黑" pitchFamily="34" charset="-120"/>
+                          <a:latin typeface="微软雅黑" panose="020B0503020204020204" pitchFamily="34" charset="-122"/>
+                          <a:ea typeface="微软雅黑" panose="020B0503020204020204" pitchFamily="34" charset="-122"/>
+                          <a:cs typeface="微软雅黑" panose="020B0503020204020204" pitchFamily="34" charset="-120"/>
                         </a:rPr>
-                        <a:t>分组</a:t>
+                        <a:t>内容</a:t>
                       </a:r>
                       <a:endParaRPr lang="en-US" sz="1500" dirty="0">
-                        <a:latin typeface="微软雅黑" charset="0"/>
-                        <a:ea typeface="微软雅黑" charset="0"/>
-                        <a:cs typeface="微软雅黑" charset="0"/>
+                        <a:latin typeface="微软雅黑" panose="020B0503020204020204" pitchFamily="34" charset="-122"/>
+                        <a:ea typeface="微软雅黑" panose="020B0503020204020204" pitchFamily="34" charset="-122"/>
+                        <a:cs typeface="微软雅黑" panose="020B0503020204020204" pitchFamily="34" charset="-122"/>
                       </a:endParaRPr>
                     </a:p>
                   </a:txBody>
-                  <a:tcPr marL="91440" marR="91440" marT="45720" marB="45720" anchor="ctr">
+                  <a:tcPr anchor="ctr">
                     <a:lnL w="9525" cap="flat" cmpd="sng" algn="ctr">
                       <a:solidFill>
                         <a:srgbClr val="D8DBE0"/>
@@ -9512,7 +9330,7 @@
                     <a:bodyPr/>
                     <a:lstStyle/>
                     <a:p>
-                      <a:pPr algn="l" indent="0" marL="0">
+                      <a:pPr marL="0" indent="0" algn="l">
                         <a:buNone/>
                       </a:pPr>
                       <a:r>
@@ -9520,20 +9338,20 @@
                           <a:solidFill>
                             <a:srgbClr val="1F4E9C"/>
                           </a:solidFill>
-                          <a:latin typeface="微软雅黑" pitchFamily="34" charset="0"/>
-                          <a:ea typeface="微软雅黑" pitchFamily="34" charset="-122"/>
-                          <a:cs typeface="微软雅黑" pitchFamily="34" charset="-120"/>
+                          <a:latin typeface="微软雅黑" panose="020B0503020204020204" pitchFamily="34" charset="-122"/>
+                          <a:ea typeface="微软雅黑" panose="020B0503020204020204" pitchFamily="34" charset="-122"/>
+                          <a:cs typeface="微软雅黑" panose="020B0503020204020204" pitchFamily="34" charset="-120"/>
                         </a:rPr>
                         <a:t>题号</a:t>
                       </a:r>
                       <a:endParaRPr lang="en-US" sz="1500" dirty="0">
-                        <a:latin typeface="微软雅黑" charset="0"/>
-                        <a:ea typeface="微软雅黑" charset="0"/>
-                        <a:cs typeface="微软雅黑" charset="0"/>
+                        <a:latin typeface="微软雅黑" panose="020B0503020204020204" pitchFamily="34" charset="-122"/>
+                        <a:ea typeface="微软雅黑" panose="020B0503020204020204" pitchFamily="34" charset="-122"/>
+                        <a:cs typeface="微软雅黑" panose="020B0503020204020204" pitchFamily="34" charset="-122"/>
                       </a:endParaRPr>
                     </a:p>
                   </a:txBody>
-                  <a:tcPr marL="91440" marR="91440" marT="45720" marB="45720" anchor="ctr">
+                  <a:tcPr anchor="ctr">
                     <a:lnL w="9525" cap="flat" cmpd="sng" algn="ctr">
                       <a:solidFill>
                         <a:srgbClr val="D8DBE0"/>
@@ -9582,7 +9400,7 @@
                     <a:bodyPr/>
                     <a:lstStyle/>
                     <a:p>
-                      <a:pPr algn="l" indent="0" marL="0">
+                      <a:pPr marL="0" indent="0" algn="l">
                         <a:buNone/>
                       </a:pPr>
                       <a:r>
@@ -9590,20 +9408,20 @@
                           <a:solidFill>
                             <a:srgbClr val="1F2329"/>
                           </a:solidFill>
-                          <a:latin typeface="微软雅黑" pitchFamily="34" charset="0"/>
-                          <a:ea typeface="微软雅黑" pitchFamily="34" charset="-122"/>
-                          <a:cs typeface="微软雅黑" pitchFamily="34" charset="-120"/>
+                          <a:latin typeface="微软雅黑" panose="020B0503020204020204" pitchFamily="34" charset="-122"/>
+                          <a:ea typeface="微软雅黑" panose="020B0503020204020204" pitchFamily="34" charset="-122"/>
+                          <a:cs typeface="微软雅黑" panose="020B0503020204020204" pitchFamily="34" charset="-120"/>
                         </a:rPr>
-                        <a:t>选择题：数组与特殊矩阵概念（行列优先、三角/…</a:t>
+                        <a:t>数学递归定义</a:t>
                       </a:r>
                       <a:endParaRPr lang="en-US" sz="1500" dirty="0">
-                        <a:latin typeface="微软雅黑" charset="0"/>
-                        <a:ea typeface="微软雅黑" charset="0"/>
-                        <a:cs typeface="微软雅黑" charset="0"/>
+                        <a:latin typeface="微软雅黑" panose="020B0503020204020204" pitchFamily="34" charset="-122"/>
+                        <a:ea typeface="微软雅黑" panose="020B0503020204020204" pitchFamily="34" charset="-122"/>
+                        <a:cs typeface="微软雅黑" panose="020B0503020204020204" pitchFamily="34" charset="-122"/>
                       </a:endParaRPr>
                     </a:p>
                   </a:txBody>
-                  <a:tcPr marL="91440" marR="91440" marT="45720" marB="45720" anchor="ctr">
+                  <a:tcPr anchor="ctr">
                     <a:lnL w="9525" cap="flat" cmpd="sng" algn="ctr">
                       <a:solidFill>
                         <a:srgbClr val="D8DBE0"/>
@@ -9650,7 +9468,7 @@
                     <a:bodyPr/>
                     <a:lstStyle/>
                     <a:p>
-                      <a:pPr algn="l" indent="0" marL="0">
+                      <a:pPr marL="0" indent="0" algn="l">
                         <a:buNone/>
                       </a:pPr>
                       <a:r>
@@ -9658,20 +9476,20 @@
                           <a:solidFill>
                             <a:srgbClr val="1F2329"/>
                           </a:solidFill>
-                          <a:latin typeface="微软雅黑" pitchFamily="34" charset="0"/>
-                          <a:ea typeface="微软雅黑" pitchFamily="34" charset="-122"/>
-                          <a:cs typeface="微软雅黑" pitchFamily="34" charset="-120"/>
+                          <a:latin typeface="微软雅黑" panose="020B0503020204020204" pitchFamily="34" charset="-122"/>
+                          <a:ea typeface="微软雅黑" panose="020B0503020204020204" pitchFamily="34" charset="-122"/>
+                          <a:cs typeface="微软雅黑" panose="020B0503020204020204" pitchFamily="34" charset="-120"/>
                         </a:rPr>
-                        <a:t>选1、8—14</a:t>
+                        <a:t>答19—21</a:t>
                       </a:r>
                       <a:endParaRPr lang="en-US" sz="1500" dirty="0">
-                        <a:latin typeface="微软雅黑" charset="0"/>
-                        <a:ea typeface="微软雅黑" charset="0"/>
-                        <a:cs typeface="微软雅黑" charset="0"/>
+                        <a:latin typeface="微软雅黑" panose="020B0503020204020204" pitchFamily="34" charset="-122"/>
+                        <a:ea typeface="微软雅黑" panose="020B0503020204020204" pitchFamily="34" charset="-122"/>
+                        <a:cs typeface="微软雅黑" panose="020B0503020204020204" pitchFamily="34" charset="-122"/>
                       </a:endParaRPr>
                     </a:p>
                   </a:txBody>
-                  <a:tcPr marL="91440" marR="91440" marT="45720" marB="45720" anchor="ctr">
+                  <a:tcPr anchor="ctr">
                     <a:lnL w="9525" cap="flat" cmpd="sng" algn="ctr">
                       <a:solidFill>
                         <a:srgbClr val="D8DBE0"/>
@@ -9720,7 +9538,7 @@
                     <a:bodyPr/>
                     <a:lstStyle/>
                     <a:p>
-                      <a:pPr algn="l" indent="0" marL="0">
+                      <a:pPr marL="0" indent="0" algn="l">
                         <a:buNone/>
                       </a:pPr>
                       <a:r>
@@ -9728,20 +9546,20 @@
                           <a:solidFill>
                             <a:srgbClr val="1F2329"/>
                           </a:solidFill>
-                          <a:latin typeface="微软雅黑" pitchFamily="34" charset="0"/>
-                          <a:ea typeface="微软雅黑" pitchFamily="34" charset="-122"/>
-                          <a:cs typeface="微软雅黑" pitchFamily="34" charset="-120"/>
+                          <a:latin typeface="微软雅黑" panose="020B0503020204020204" pitchFamily="34" charset="-122"/>
+                          <a:ea typeface="微软雅黑" panose="020B0503020204020204" pitchFamily="34" charset="-122"/>
+                          <a:cs typeface="微软雅黑" panose="020B0503020204020204" pitchFamily="34" charset="-120"/>
                         </a:rPr>
-                        <a:t>解答题：压缩存储公式推导与稀疏矩阵/广义表存…</a:t>
+                        <a:t>m元多项式</a:t>
                       </a:r>
                       <a:endParaRPr lang="en-US" sz="1500" dirty="0">
-                        <a:latin typeface="微软雅黑" charset="0"/>
-                        <a:ea typeface="微软雅黑" charset="0"/>
-                        <a:cs typeface="微软雅黑" charset="0"/>
+                        <a:latin typeface="微软雅黑" panose="020B0503020204020204" pitchFamily="34" charset="-122"/>
+                        <a:ea typeface="微软雅黑" panose="020B0503020204020204" pitchFamily="34" charset="-122"/>
+                        <a:cs typeface="微软雅黑" panose="020B0503020204020204" pitchFamily="34" charset="-122"/>
                       </a:endParaRPr>
                     </a:p>
                   </a:txBody>
-                  <a:tcPr marL="91440" marR="91440" marT="45720" marB="45720" anchor="ctr">
+                  <a:tcPr anchor="ctr">
                     <a:lnL w="9525" cap="flat" cmpd="sng" algn="ctr">
                       <a:solidFill>
                         <a:srgbClr val="D8DBE0"/>
@@ -9788,7 +9606,7 @@
                     <a:bodyPr/>
                     <a:lstStyle/>
                     <a:p>
-                      <a:pPr algn="l" indent="0" marL="0">
+                      <a:pPr marL="0" indent="0" algn="l">
                         <a:buNone/>
                       </a:pPr>
                       <a:r>
@@ -9796,20 +9614,20 @@
                           <a:solidFill>
                             <a:srgbClr val="1F2329"/>
                           </a:solidFill>
-                          <a:latin typeface="微软雅黑" pitchFamily="34" charset="0"/>
-                          <a:ea typeface="微软雅黑" pitchFamily="34" charset="-122"/>
-                          <a:cs typeface="微软雅黑" pitchFamily="34" charset="-120"/>
+                          <a:latin typeface="微软雅黑" panose="020B0503020204020204" pitchFamily="34" charset="-122"/>
+                          <a:ea typeface="微软雅黑" panose="020B0503020204020204" pitchFamily="34" charset="-122"/>
+                          <a:cs typeface="微软雅黑" panose="020B0503020204020204" pitchFamily="34" charset="-120"/>
                         </a:rPr>
-                        <a:t>答4—12、15—18、22</a:t>
+                        <a:t>算3、11、12</a:t>
                       </a:r>
                       <a:endParaRPr lang="en-US" sz="1500" dirty="0">
-                        <a:latin typeface="微软雅黑" charset="0"/>
-                        <a:ea typeface="微软雅黑" charset="0"/>
-                        <a:cs typeface="微软雅黑" charset="0"/>
+                        <a:latin typeface="微软雅黑" panose="020B0503020204020204" pitchFamily="34" charset="-122"/>
+                        <a:ea typeface="微软雅黑" panose="020B0503020204020204" pitchFamily="34" charset="-122"/>
+                        <a:cs typeface="微软雅黑" panose="020B0503020204020204" pitchFamily="34" charset="-122"/>
                       </a:endParaRPr>
                     </a:p>
                   </a:txBody>
-                  <a:tcPr marL="91440" marR="91440" marT="45720" marB="45720" anchor="ctr">
+                  <a:tcPr anchor="ctr">
                     <a:lnL w="9525" cap="flat" cmpd="sng" algn="ctr">
                       <a:solidFill>
                         <a:srgbClr val="D8DBE0"/>
@@ -9858,7 +9676,7 @@
                     <a:bodyPr/>
                     <a:lstStyle/>
                     <a:p>
-                      <a:pPr algn="l" indent="0" marL="0">
+                      <a:pPr marL="0" indent="0" algn="l">
                         <a:buNone/>
                       </a:pPr>
                       <a:r>
@@ -9866,20 +9684,20 @@
                           <a:solidFill>
                             <a:srgbClr val="1F2329"/>
                           </a:solidFill>
-                          <a:latin typeface="微软雅黑" pitchFamily="34" charset="0"/>
-                          <a:ea typeface="微软雅黑" pitchFamily="34" charset="-122"/>
-                          <a:cs typeface="微软雅黑" pitchFamily="34" charset="-120"/>
+                          <a:latin typeface="微软雅黑" panose="020B0503020204020204" pitchFamily="34" charset="-122"/>
+                          <a:ea typeface="微软雅黑" panose="020B0503020204020204" pitchFamily="34" charset="-122"/>
+                          <a:cs typeface="微软雅黑" panose="020B0503020204020204" pitchFamily="34" charset="-120"/>
                         </a:rPr>
-                        <a:t>算法设计题：数组与稀疏矩阵域内巩固（马鞍点、…</a:t>
+                        <a:t>三元组变形存储</a:t>
                       </a:r>
                       <a:endParaRPr lang="en-US" sz="1500" dirty="0">
-                        <a:latin typeface="微软雅黑" charset="0"/>
-                        <a:ea typeface="微软雅黑" charset="0"/>
-                        <a:cs typeface="微软雅黑" charset="0"/>
+                        <a:latin typeface="微软雅黑" panose="020B0503020204020204" pitchFamily="34" charset="-122"/>
+                        <a:ea typeface="微软雅黑" panose="020B0503020204020204" pitchFamily="34" charset="-122"/>
+                        <a:cs typeface="微软雅黑" panose="020B0503020204020204" pitchFamily="34" charset="-122"/>
                       </a:endParaRPr>
                     </a:p>
                   </a:txBody>
-                  <a:tcPr marL="91440" marR="91440" marT="45720" marB="45720" anchor="ctr">
+                  <a:tcPr anchor="ctr">
                     <a:lnL w="9525" cap="flat" cmpd="sng" algn="ctr">
                       <a:solidFill>
                         <a:srgbClr val="D8DBE0"/>
@@ -9926,7 +9744,7 @@
                     <a:bodyPr/>
                     <a:lstStyle/>
                     <a:p>
-                      <a:pPr algn="l" indent="0" marL="0">
+                      <a:pPr marL="0" indent="0" algn="l">
                         <a:buNone/>
                       </a:pPr>
                       <a:r>
@@ -9934,20 +9752,158 @@
                           <a:solidFill>
                             <a:srgbClr val="1F2329"/>
                           </a:solidFill>
-                          <a:latin typeface="微软雅黑" pitchFamily="34" charset="0"/>
-                          <a:ea typeface="微软雅黑" pitchFamily="34" charset="-122"/>
-                          <a:cs typeface="微软雅黑" pitchFamily="34" charset="-120"/>
+                          <a:latin typeface="微软雅黑" panose="020B0503020204020204" pitchFamily="34" charset="-122"/>
+                          <a:ea typeface="微软雅黑" panose="020B0503020204020204" pitchFamily="34" charset="-122"/>
+                          <a:cs typeface="微软雅黑" panose="020B0503020204020204" pitchFamily="34" charset="-120"/>
                         </a:rPr>
-                        <a:t>算2、4、5</a:t>
+                        <a:t>算6</a:t>
                       </a:r>
                       <a:endParaRPr lang="en-US" sz="1500" dirty="0">
-                        <a:latin typeface="微软雅黑" charset="0"/>
-                        <a:ea typeface="微软雅黑" charset="0"/>
-                        <a:cs typeface="微软雅黑" charset="0"/>
+                        <a:latin typeface="微软雅黑" panose="020B0503020204020204" pitchFamily="34" charset="-122"/>
+                        <a:ea typeface="微软雅黑" panose="020B0503020204020204" pitchFamily="34" charset="-122"/>
+                        <a:cs typeface="微软雅黑" panose="020B0503020204020204" pitchFamily="34" charset="-122"/>
                       </a:endParaRPr>
                     </a:p>
                   </a:txBody>
-                  <a:tcPr marL="91440" marR="91440" marT="45720" marB="45720" anchor="ctr">
+                  <a:tcPr anchor="ctr">
+                    <a:lnL w="9525" cap="flat" cmpd="sng" algn="ctr">
+                      <a:solidFill>
+                        <a:srgbClr val="D8DBE0"/>
+                      </a:solidFill>
+                      <a:prstDash val="solid"/>
+                      <a:round/>
+                      <a:headEnd type="none" w="med" len="med"/>
+                      <a:tailEnd type="none" w="med" len="med"/>
+                    </a:lnL>
+                    <a:lnR w="9525" cap="flat" cmpd="sng" algn="ctr">
+                      <a:solidFill>
+                        <a:srgbClr val="D8DBE0"/>
+                      </a:solidFill>
+                      <a:prstDash val="solid"/>
+                      <a:round/>
+                      <a:headEnd type="none" w="med" len="med"/>
+                      <a:tailEnd type="none" w="med" len="med"/>
+                    </a:lnR>
+                    <a:lnT w="9525" cap="flat" cmpd="sng" algn="ctr">
+                      <a:solidFill>
+                        <a:srgbClr val="D8DBE0"/>
+                      </a:solidFill>
+                      <a:prstDash val="solid"/>
+                      <a:round/>
+                      <a:headEnd type="none" w="med" len="med"/>
+                      <a:tailEnd type="none" w="med" len="med"/>
+                    </a:lnT>
+                    <a:lnB w="9525" cap="flat" cmpd="sng" algn="ctr">
+                      <a:solidFill>
+                        <a:srgbClr val="D8DBE0"/>
+                      </a:solidFill>
+                      <a:prstDash val="solid"/>
+                      <a:round/>
+                      <a:headEnd type="none" w="med" len="med"/>
+                      <a:tailEnd type="none" w="med" len="med"/>
+                    </a:lnB>
+                    <a:solidFill>
+                      <a:srgbClr val="FFFFFF"/>
+                    </a:solidFill>
+                  </a:tcPr>
+                </a:tc>
+              </a:tr>
+              <a:tr h="420624">
+                <a:tc>
+                  <a:txBody>
+                    <a:bodyPr/>
+                    <a:lstStyle/>
+                    <a:p>
+                      <a:pPr marL="0" indent="0" algn="l">
+                        <a:buNone/>
+                      </a:pPr>
+                      <a:r>
+                        <a:rPr lang="en-US" sz="1500" dirty="0">
+                          <a:solidFill>
+                            <a:srgbClr val="1F2329"/>
+                          </a:solidFill>
+                          <a:latin typeface="微软雅黑" panose="020B0503020204020204" pitchFamily="34" charset="-122"/>
+                          <a:ea typeface="微软雅黑" panose="020B0503020204020204" pitchFamily="34" charset="-122"/>
+                          <a:cs typeface="微软雅黑" panose="020B0503020204020204" pitchFamily="34" charset="-120"/>
+                        </a:rPr>
+                        <a:t>三元组变形存储</a:t>
+                      </a:r>
+                      <a:endParaRPr lang="en-US" sz="1500" dirty="0">
+                        <a:latin typeface="微软雅黑" panose="020B0503020204020204" pitchFamily="34" charset="-122"/>
+                        <a:ea typeface="微软雅黑" panose="020B0503020204020204" pitchFamily="34" charset="-122"/>
+                        <a:cs typeface="微软雅黑" panose="020B0503020204020204" pitchFamily="34" charset="-122"/>
+                      </a:endParaRPr>
+                    </a:p>
+                  </a:txBody>
+                  <a:tcPr anchor="ctr">
+                    <a:lnL w="9525" cap="flat" cmpd="sng" algn="ctr">
+                      <a:solidFill>
+                        <a:srgbClr val="D8DBE0"/>
+                      </a:solidFill>
+                      <a:prstDash val="solid"/>
+                      <a:round/>
+                      <a:headEnd type="none" w="med" len="med"/>
+                      <a:tailEnd type="none" w="med" len="med"/>
+                    </a:lnL>
+                    <a:lnR w="9525" cap="flat" cmpd="sng" algn="ctr">
+                      <a:solidFill>
+                        <a:srgbClr val="D8DBE0"/>
+                      </a:solidFill>
+                      <a:prstDash val="solid"/>
+                      <a:round/>
+                      <a:headEnd type="none" w="med" len="med"/>
+                      <a:tailEnd type="none" w="med" len="med"/>
+                    </a:lnR>
+                    <a:lnT w="9525" cap="flat" cmpd="sng" algn="ctr">
+                      <a:solidFill>
+                        <a:srgbClr val="D8DBE0"/>
+                      </a:solidFill>
+                      <a:prstDash val="solid"/>
+                      <a:round/>
+                      <a:headEnd type="none" w="med" len="med"/>
+                      <a:tailEnd type="none" w="med" len="med"/>
+                    </a:lnT>
+                    <a:lnB w="9525" cap="flat" cmpd="sng" algn="ctr">
+                      <a:solidFill>
+                        <a:srgbClr val="D8DBE0"/>
+                      </a:solidFill>
+                      <a:prstDash val="solid"/>
+                      <a:round/>
+                      <a:headEnd type="none" w="med" len="med"/>
+                      <a:tailEnd type="none" w="med" len="med"/>
+                    </a:lnB>
+                    <a:solidFill>
+                      <a:srgbClr val="FFFFFF"/>
+                    </a:solidFill>
+                  </a:tcPr>
+                </a:tc>
+                <a:tc>
+                  <a:txBody>
+                    <a:bodyPr/>
+                    <a:lstStyle/>
+                    <a:p>
+                      <a:pPr marL="0" indent="0" algn="l">
+                        <a:buNone/>
+                      </a:pPr>
+                      <a:r>
+                        <a:rPr lang="en-US" sz="1500" dirty="0">
+                          <a:solidFill>
+                            <a:srgbClr val="1F2329"/>
+                          </a:solidFill>
+                          <a:latin typeface="微软雅黑" panose="020B0503020204020204" pitchFamily="34" charset="-122"/>
+                          <a:ea typeface="微软雅黑" panose="020B0503020204020204" pitchFamily="34" charset="-122"/>
+                          <a:cs typeface="微软雅黑" panose="020B0503020204020204" pitchFamily="34" charset="-120"/>
+                        </a:rPr>
+                        <a:t>算7</a:t>
+                      </a:r>
+                      <a:endParaRPr lang="en-US" sz="1500" dirty="0">
+                        <a:latin typeface="微软雅黑" panose="020B0503020204020204" pitchFamily="34" charset="-122"/>
+                        <a:ea typeface="微软雅黑" panose="020B0503020204020204" pitchFamily="34" charset="-122"/>
+                        <a:cs typeface="微软雅黑" panose="020B0503020204020204" pitchFamily="34" charset="-122"/>
+                      </a:endParaRPr>
+                    </a:p>
+                  </a:txBody>
+                  <a:tcPr anchor="ctr">
                     <a:lnL w="9525" cap="flat" cmpd="sng" algn="ctr">
                       <a:solidFill>
                         <a:srgbClr val="D8DBE0"/>
@@ -10004,7 +9960,7 @@
 
 <file path=ppt/slides/slide8.xml><?xml version="1.0" encoding="utf-8"?>
 <p:sld xmlns:a="http://schemas.openxmlformats.org/drawingml/2006/main" xmlns:r="http://schemas.openxmlformats.org/officeDocument/2006/relationships" xmlns:p="http://schemas.openxmlformats.org/presentationml/2006/main">
-  <p:cSld name="Slide 8">
+  <p:cSld>
     <p:bg>
       <p:bgPr>
         <a:blipFill dpi="0" rotWithShape="1">
@@ -10048,13 +10004,12 @@
             <a:avLst/>
           </a:prstGeom>
           <a:noFill/>
-          <a:ln/>
         </p:spPr>
         <p:txBody>
           <a:bodyPr wrap="square" rtlCol="0" anchor="ctr"/>
           <a:lstStyle/>
           <a:p>
-            <a:pPr algn="r" indent="0" marL="0">
+            <a:pPr marL="0" indent="0" algn="r">
               <a:buNone/>
             </a:pPr>
             <a:r>
@@ -10062,11 +10017,11 @@
                 <a:solidFill>
                   <a:srgbClr val="8A9099"/>
                 </a:solidFill>
-                <a:latin typeface="微软雅黑" pitchFamily="34" charset="0"/>
-                <a:ea typeface="微软雅黑" pitchFamily="34" charset="-122"/>
-                <a:cs typeface="微软雅黑" pitchFamily="34" charset="-120"/>
+                <a:latin typeface="微软雅黑" panose="020B0503020204020204" pitchFamily="34" charset="-122"/>
+                <a:ea typeface="微软雅黑" panose="020B0503020204020204" pitchFamily="34" charset="-122"/>
+                <a:cs typeface="微软雅黑" panose="020B0503020204020204" pitchFamily="34" charset="-120"/>
               </a:rPr>
-              <a:t>8 / 10</a:t>
+              <a:t>9 / 10</a:t>
             </a:r>
             <a:endParaRPr lang="en-US" sz="1000" dirty="0"/>
           </a:p>
@@ -10087,13 +10042,12 @@
             <a:avLst/>
           </a:prstGeom>
           <a:noFill/>
-          <a:ln/>
         </p:spPr>
         <p:txBody>
           <a:bodyPr wrap="square" rtlCol="0" anchor="ctr"/>
           <a:lstStyle/>
           <a:p>
-            <a:pPr algn="l" indent="0" marL="0">
+            <a:pPr marL="0" indent="0" algn="l">
               <a:buNone/>
             </a:pPr>
             <a:r>
@@ -10101,9 +10055,9 @@
                 <a:solidFill>
                   <a:srgbClr val="1F4E9C"/>
                 </a:solidFill>
-                <a:latin typeface="微软雅黑" pitchFamily="34" charset="0"/>
-                <a:ea typeface="微软雅黑" pitchFamily="34" charset="-122"/>
-                <a:cs typeface="微软雅黑" pitchFamily="34" charset="-120"/>
+                <a:latin typeface="微软雅黑" panose="020B0503020204020204" pitchFamily="34" charset="-122"/>
+                <a:ea typeface="微软雅黑" panose="020B0503020204020204" pitchFamily="34" charset="-122"/>
+                <a:cs typeface="微软雅黑" panose="020B0503020204020204" pitchFamily="34" charset="-120"/>
               </a:rPr>
               <a:t>完全不做</a:t>
             </a:r>
@@ -10126,13 +10080,12 @@
             <a:avLst/>
           </a:prstGeom>
           <a:noFill/>
-          <a:ln/>
         </p:spPr>
         <p:txBody>
           <a:bodyPr wrap="square" rtlCol="0" anchor="ctr"/>
           <a:lstStyle/>
           <a:p>
-            <a:pPr algn="l" indent="0" marL="0">
+            <a:pPr marL="0" indent="0" algn="l">
               <a:buNone/>
             </a:pPr>
             <a:r>
@@ -10140,11 +10093,11 @@
                 <a:solidFill>
                   <a:srgbClr val="1F2329"/>
                 </a:solidFill>
-                <a:latin typeface="微软雅黑" pitchFamily="34" charset="0"/>
-                <a:ea typeface="微软雅黑" pitchFamily="34" charset="-122"/>
-                <a:cs typeface="微软雅黑" pitchFamily="34" charset="-120"/>
+                <a:latin typeface="微软雅黑" panose="020B0503020204020204" pitchFamily="34" charset="-122"/>
+                <a:ea typeface="微软雅黑" panose="020B0503020204020204" pitchFamily="34" charset="-122"/>
+                <a:cs typeface="微软雅黑" panose="020B0503020204020204" pitchFamily="34" charset="-120"/>
               </a:rPr>
-              <a:t>完全不做清单（1/2）</a:t>
+              <a:t>完全不做清单（2/2）</a:t>
             </a:r>
             <a:endParaRPr lang="en-US" sz="2800" dirty="0"/>
           </a:p>
@@ -10152,21 +10105,15 @@
       </p:sp>
       <p:graphicFrame>
         <p:nvGraphicFramePr>
-          <p:cNvPr id="9" name="Table 0"/>
+          <p:cNvPr id="10" name="Table 0"/>
           <p:cNvGraphicFramePr>
             <a:graphicFrameLocks noGrp="1"/>
           </p:cNvGraphicFramePr>
-          <p:nvPr>
-            <p:extLst>
-              <p:ext uri="{D42A27DB-BD31-4B8C-83A1-F6EECF244321}">
-                <p14:modId xmlns:p14="http://schemas.microsoft.com/office/powerpoint/2010/main" val="1579011935"/>
-              </p:ext>
-            </p:extLst>
-          </p:nvPr>
+          <p:nvPr/>
         </p:nvGraphicFramePr>
         <p:xfrm>
           <a:off x="822960" y="2395728"/>
-          <a:ext cx="10545775" cy="914400"/>
+          <a:ext cx="10545775" cy="1682496"/>
         </p:xfrm>
         <a:graphic>
           <a:graphicData uri="http://schemas.openxmlformats.org/drawingml/2006/table">
@@ -10182,7 +10129,7 @@
                     <a:bodyPr/>
                     <a:lstStyle/>
                     <a:p>
-                      <a:pPr algn="l" indent="0" marL="0">
+                      <a:pPr marL="0" indent="0" algn="l">
                         <a:buNone/>
                       </a:pPr>
                       <a:r>
@@ -10190,20 +10137,20 @@
                           <a:solidFill>
                             <a:srgbClr val="1F4E9C"/>
                           </a:solidFill>
-                          <a:latin typeface="微软雅黑" pitchFamily="34" charset="0"/>
-                          <a:ea typeface="微软雅黑" pitchFamily="34" charset="-122"/>
-                          <a:cs typeface="微软雅黑" pitchFamily="34" charset="-120"/>
+                          <a:latin typeface="微软雅黑" panose="020B0503020204020204" pitchFamily="34" charset="-122"/>
+                          <a:ea typeface="微软雅黑" panose="020B0503020204020204" pitchFamily="34" charset="-122"/>
+                          <a:cs typeface="微软雅黑" panose="020B0503020204020204" pitchFamily="34" charset="-120"/>
                         </a:rPr>
                         <a:t>内容</a:t>
                       </a:r>
                       <a:endParaRPr lang="en-US" sz="1500" dirty="0">
-                        <a:latin typeface="微软雅黑" charset="0"/>
-                        <a:ea typeface="微软雅黑" charset="0"/>
-                        <a:cs typeface="微软雅黑" charset="0"/>
+                        <a:latin typeface="微软雅黑" panose="020B0503020204020204" pitchFamily="34" charset="-122"/>
+                        <a:ea typeface="微软雅黑" panose="020B0503020204020204" pitchFamily="34" charset="-122"/>
+                        <a:cs typeface="微软雅黑" panose="020B0503020204020204" pitchFamily="34" charset="-122"/>
                       </a:endParaRPr>
                     </a:p>
                   </a:txBody>
-                  <a:tcPr marL="91440" marR="91440" marT="45720" marB="45720" anchor="ctr">
+                  <a:tcPr anchor="ctr">
                     <a:lnL w="9525" cap="flat" cmpd="sng" algn="ctr">
                       <a:solidFill>
                         <a:srgbClr val="D8DBE0"/>
@@ -10250,7 +10197,7 @@
                     <a:bodyPr/>
                     <a:lstStyle/>
                     <a:p>
-                      <a:pPr algn="l" indent="0" marL="0">
+                      <a:pPr marL="0" indent="0" algn="l">
                         <a:buNone/>
                       </a:pPr>
                       <a:r>
@@ -10258,20 +10205,20 @@
                           <a:solidFill>
                             <a:srgbClr val="1F4E9C"/>
                           </a:solidFill>
-                          <a:latin typeface="微软雅黑" pitchFamily="34" charset="0"/>
-                          <a:ea typeface="微软雅黑" pitchFamily="34" charset="-122"/>
-                          <a:cs typeface="微软雅黑" pitchFamily="34" charset="-120"/>
+                          <a:latin typeface="微软雅黑" panose="020B0503020204020204" pitchFamily="34" charset="-122"/>
+                          <a:ea typeface="微软雅黑" panose="020B0503020204020204" pitchFamily="34" charset="-122"/>
+                          <a:cs typeface="微软雅黑" panose="020B0503020204020204" pitchFamily="34" charset="-120"/>
                         </a:rPr>
                         <a:t>题号</a:t>
                       </a:r>
                       <a:endParaRPr lang="en-US" sz="1500" dirty="0">
-                        <a:latin typeface="微软雅黑" charset="0"/>
-                        <a:ea typeface="微软雅黑" charset="0"/>
-                        <a:cs typeface="微软雅黑" charset="0"/>
+                        <a:latin typeface="微软雅黑" panose="020B0503020204020204" pitchFamily="34" charset="-122"/>
+                        <a:ea typeface="微软雅黑" panose="020B0503020204020204" pitchFamily="34" charset="-122"/>
+                        <a:cs typeface="微软雅黑" panose="020B0503020204020204" pitchFamily="34" charset="-122"/>
                       </a:endParaRPr>
                     </a:p>
                   </a:txBody>
-                  <a:tcPr marL="91440" marR="91440" marT="45720" marB="45720" anchor="ctr">
+                  <a:tcPr anchor="ctr">
                     <a:lnL w="9525" cap="flat" cmpd="sng" algn="ctr">
                       <a:solidFill>
                         <a:srgbClr val="D8DBE0"/>
@@ -10320,7 +10267,7 @@
                     <a:bodyPr/>
                     <a:lstStyle/>
                     <a:p>
-                      <a:pPr algn="l" indent="0" marL="0">
+                      <a:pPr marL="0" indent="0" algn="l">
                         <a:buNone/>
                       </a:pPr>
                       <a:r>
@@ -10328,20 +10275,20 @@
                           <a:solidFill>
                             <a:srgbClr val="1F2329"/>
                           </a:solidFill>
-                          <a:latin typeface="微软雅黑" pitchFamily="34" charset="0"/>
-                          <a:ea typeface="微软雅黑" pitchFamily="34" charset="-122"/>
-                          <a:cs typeface="微软雅黑" pitchFamily="34" charset="-120"/>
+                          <a:latin typeface="微软雅黑" panose="020B0503020204020204" pitchFamily="34" charset="-122"/>
+                          <a:ea typeface="微软雅黑" panose="020B0503020204020204" pitchFamily="34" charset="-122"/>
+                          <a:cs typeface="微软雅黑" panose="020B0503020204020204" pitchFamily="34" charset="-120"/>
                         </a:rPr>
-                        <a:t>数学递归定义</a:t>
+                        <a:t>三元组变形存储</a:t>
                       </a:r>
                       <a:endParaRPr lang="en-US" sz="1500" dirty="0">
-                        <a:latin typeface="微软雅黑" charset="0"/>
-                        <a:ea typeface="微软雅黑" charset="0"/>
-                        <a:cs typeface="微软雅黑" charset="0"/>
+                        <a:latin typeface="微软雅黑" panose="020B0503020204020204" pitchFamily="34" charset="-122"/>
+                        <a:ea typeface="微软雅黑" panose="020B0503020204020204" pitchFamily="34" charset="-122"/>
+                        <a:cs typeface="微软雅黑" panose="020B0503020204020204" pitchFamily="34" charset="-122"/>
                       </a:endParaRPr>
                     </a:p>
                   </a:txBody>
-                  <a:tcPr marL="91440" marR="91440" marT="45720" marB="45720" anchor="ctr">
+                  <a:tcPr anchor="ctr">
                     <a:lnL w="9525" cap="flat" cmpd="sng" algn="ctr">
                       <a:solidFill>
                         <a:srgbClr val="D8DBE0"/>
@@ -10388,7 +10335,7 @@
                     <a:bodyPr/>
                     <a:lstStyle/>
                     <a:p>
-                      <a:pPr algn="l" indent="0" marL="0">
+                      <a:pPr marL="0" indent="0" algn="l">
                         <a:buNone/>
                       </a:pPr>
                       <a:r>
@@ -10396,20 +10343,20 @@
                           <a:solidFill>
                             <a:srgbClr val="1F2329"/>
                           </a:solidFill>
-                          <a:latin typeface="微软雅黑" pitchFamily="34" charset="0"/>
-                          <a:ea typeface="微软雅黑" pitchFamily="34" charset="-122"/>
-                          <a:cs typeface="微软雅黑" pitchFamily="34" charset="-120"/>
+                          <a:latin typeface="微软雅黑" panose="020B0503020204020204" pitchFamily="34" charset="-122"/>
+                          <a:ea typeface="微软雅黑" panose="020B0503020204020204" pitchFamily="34" charset="-122"/>
+                          <a:cs typeface="微软雅黑" panose="020B0503020204020204" pitchFamily="34" charset="-120"/>
                         </a:rPr>
-                        <a:t>答19—21</a:t>
+                        <a:t>算8</a:t>
                       </a:r>
                       <a:endParaRPr lang="en-US" sz="1500" dirty="0">
-                        <a:latin typeface="微软雅黑" charset="0"/>
-                        <a:ea typeface="微软雅黑" charset="0"/>
-                        <a:cs typeface="微软雅黑" charset="0"/>
+                        <a:latin typeface="微软雅黑" panose="020B0503020204020204" pitchFamily="34" charset="-122"/>
+                        <a:ea typeface="微软雅黑" panose="020B0503020204020204" pitchFamily="34" charset="-122"/>
+                        <a:cs typeface="微软雅黑" panose="020B0503020204020204" pitchFamily="34" charset="-122"/>
                       </a:endParaRPr>
                     </a:p>
                   </a:txBody>
-                  <a:tcPr marL="91440" marR="91440" marT="45720" marB="45720" anchor="ctr">
+                  <a:tcPr anchor="ctr">
                     <a:lnL w="9525" cap="flat" cmpd="sng" algn="ctr">
                       <a:solidFill>
                         <a:srgbClr val="D8DBE0"/>
@@ -10458,7 +10405,7 @@
                     <a:bodyPr/>
                     <a:lstStyle/>
                     <a:p>
-                      <a:pPr algn="l" indent="0" marL="0">
+                      <a:pPr marL="0" indent="0" algn="l">
                         <a:buNone/>
                       </a:pPr>
                       <a:r>
@@ -10466,20 +10413,20 @@
                           <a:solidFill>
                             <a:srgbClr val="1F2329"/>
                           </a:solidFill>
-                          <a:latin typeface="微软雅黑" pitchFamily="34" charset="0"/>
-                          <a:ea typeface="微软雅黑" pitchFamily="34" charset="-122"/>
-                          <a:cs typeface="微软雅黑" pitchFamily="34" charset="-120"/>
+                          <a:latin typeface="微软雅黑" panose="020B0503020204020204" pitchFamily="34" charset="-122"/>
+                          <a:ea typeface="微软雅黑" panose="020B0503020204020204" pitchFamily="34" charset="-122"/>
+                          <a:cs typeface="微软雅黑" panose="020B0503020204020204" pitchFamily="34" charset="-120"/>
                         </a:rPr>
-                        <a:t>m元多项式</a:t>
+                        <a:t>十字链表与邻接多重表</a:t>
                       </a:r>
                       <a:endParaRPr lang="en-US" sz="1500" dirty="0">
-                        <a:latin typeface="微软雅黑" charset="0"/>
-                        <a:ea typeface="微软雅黑" charset="0"/>
-                        <a:cs typeface="微软雅黑" charset="0"/>
+                        <a:latin typeface="微软雅黑" panose="020B0503020204020204" pitchFamily="34" charset="-122"/>
+                        <a:ea typeface="微软雅黑" panose="020B0503020204020204" pitchFamily="34" charset="-122"/>
+                        <a:cs typeface="微软雅黑" panose="020B0503020204020204" pitchFamily="34" charset="-122"/>
                       </a:endParaRPr>
                     </a:p>
                   </a:txBody>
-                  <a:tcPr marL="91440" marR="91440" marT="45720" marB="45720" anchor="ctr">
+                  <a:tcPr anchor="ctr">
                     <a:lnL w="9525" cap="flat" cmpd="sng" algn="ctr">
                       <a:solidFill>
                         <a:srgbClr val="D8DBE0"/>
@@ -10526,7 +10473,7 @@
                     <a:bodyPr/>
                     <a:lstStyle/>
                     <a:p>
-                      <a:pPr algn="l" indent="0" marL="0">
+                      <a:pPr marL="0" indent="0" algn="l">
                         <a:buNone/>
                       </a:pPr>
                       <a:r>
@@ -10534,20 +10481,20 @@
                           <a:solidFill>
                             <a:srgbClr val="1F2329"/>
                           </a:solidFill>
-                          <a:latin typeface="微软雅黑" pitchFamily="34" charset="0"/>
-                          <a:ea typeface="微软雅黑" pitchFamily="34" charset="-122"/>
-                          <a:cs typeface="微软雅黑" pitchFamily="34" charset="-120"/>
+                          <a:latin typeface="微软雅黑" panose="020B0503020204020204" pitchFamily="34" charset="-122"/>
+                          <a:ea typeface="微软雅黑" panose="020B0503020204020204" pitchFamily="34" charset="-122"/>
+                          <a:cs typeface="微软雅黑" panose="020B0503020204020204" pitchFamily="34" charset="-120"/>
                         </a:rPr>
-                        <a:t>算3、11、12</a:t>
+                        <a:t>算9、10</a:t>
                       </a:r>
                       <a:endParaRPr lang="en-US" sz="1500" dirty="0">
-                        <a:latin typeface="微软雅黑" charset="0"/>
-                        <a:ea typeface="微软雅黑" charset="0"/>
-                        <a:cs typeface="微软雅黑" charset="0"/>
+                        <a:latin typeface="微软雅黑" panose="020B0503020204020204" pitchFamily="34" charset="-122"/>
+                        <a:ea typeface="微软雅黑" panose="020B0503020204020204" pitchFamily="34" charset="-122"/>
+                        <a:cs typeface="微软雅黑" panose="020B0503020204020204" pitchFamily="34" charset="-122"/>
                       </a:endParaRPr>
                     </a:p>
                   </a:txBody>
-                  <a:tcPr marL="91440" marR="91440" marT="45720" marB="45720" anchor="ctr">
+                  <a:tcPr anchor="ctr">
                     <a:lnL w="9525" cap="flat" cmpd="sng" algn="ctr">
                       <a:solidFill>
                         <a:srgbClr val="D8DBE0"/>
@@ -10596,7 +10543,7 @@
                     <a:bodyPr/>
                     <a:lstStyle/>
                     <a:p>
-                      <a:pPr algn="l" indent="0" marL="0">
+                      <a:pPr marL="0" indent="0" algn="l">
                         <a:buNone/>
                       </a:pPr>
                       <a:r>
@@ -10604,20 +10551,20 @@
                           <a:solidFill>
                             <a:srgbClr val="1F2329"/>
                           </a:solidFill>
-                          <a:latin typeface="微软雅黑" pitchFamily="34" charset="0"/>
-                          <a:ea typeface="微软雅黑" pitchFamily="34" charset="-122"/>
-                          <a:cs typeface="微软雅黑" pitchFamily="34" charset="-120"/>
+                          <a:latin typeface="微软雅黑" panose="020B0503020204020204" pitchFamily="34" charset="-122"/>
+                          <a:ea typeface="微软雅黑" panose="020B0503020204020204" pitchFamily="34" charset="-122"/>
+                          <a:cs typeface="微软雅黑" panose="020B0503020204020204" pitchFamily="34" charset="-120"/>
                         </a:rPr>
-                        <a:t>三元组变形存储</a:t>
+                        <a:t>广义表代码实现</a:t>
                       </a:r>
                       <a:endParaRPr lang="en-US" sz="1500" dirty="0">
-                        <a:latin typeface="微软雅黑" charset="0"/>
-                        <a:ea typeface="微软雅黑" charset="0"/>
-                        <a:cs typeface="微软雅黑" charset="0"/>
+                        <a:latin typeface="微软雅黑" panose="020B0503020204020204" pitchFamily="34" charset="-122"/>
+                        <a:ea typeface="微软雅黑" panose="020B0503020204020204" pitchFamily="34" charset="-122"/>
+                        <a:cs typeface="微软雅黑" panose="020B0503020204020204" pitchFamily="34" charset="-122"/>
                       </a:endParaRPr>
                     </a:p>
                   </a:txBody>
-                  <a:tcPr marL="91440" marR="91440" marT="45720" marB="45720" anchor="ctr">
+                  <a:tcPr anchor="ctr">
                     <a:lnL w="9525" cap="flat" cmpd="sng" algn="ctr">
                       <a:solidFill>
                         <a:srgbClr val="D8DBE0"/>
@@ -10664,7 +10611,7 @@
                     <a:bodyPr/>
                     <a:lstStyle/>
                     <a:p>
-                      <a:pPr algn="l" indent="0" marL="0">
+                      <a:pPr marL="0" indent="0" algn="l">
                         <a:buNone/>
                       </a:pPr>
                       <a:r>
@@ -10672,158 +10619,20 @@
                           <a:solidFill>
                             <a:srgbClr val="1F2329"/>
                           </a:solidFill>
-                          <a:latin typeface="微软雅黑" pitchFamily="34" charset="0"/>
-                          <a:ea typeface="微软雅黑" pitchFamily="34" charset="-122"/>
-                          <a:cs typeface="微软雅黑" pitchFamily="34" charset="-120"/>
+                          <a:latin typeface="微软雅黑" panose="020B0503020204020204" pitchFamily="34" charset="-122"/>
+                          <a:ea typeface="微软雅黑" panose="020B0503020204020204" pitchFamily="34" charset="-122"/>
+                          <a:cs typeface="微软雅黑" panose="020B0503020204020204" pitchFamily="34" charset="-120"/>
                         </a:rPr>
-                        <a:t>算6</a:t>
+                        <a:t>算13—22</a:t>
                       </a:r>
                       <a:endParaRPr lang="en-US" sz="1500" dirty="0">
-                        <a:latin typeface="微软雅黑" charset="0"/>
-                        <a:ea typeface="微软雅黑" charset="0"/>
-                        <a:cs typeface="微软雅黑" charset="0"/>
+                        <a:latin typeface="微软雅黑" panose="020B0503020204020204" pitchFamily="34" charset="-122"/>
+                        <a:ea typeface="微软雅黑" panose="020B0503020204020204" pitchFamily="34" charset="-122"/>
+                        <a:cs typeface="微软雅黑" panose="020B0503020204020204" pitchFamily="34" charset="-122"/>
                       </a:endParaRPr>
                     </a:p>
                   </a:txBody>
-                  <a:tcPr marL="91440" marR="91440" marT="45720" marB="45720" anchor="ctr">
-                    <a:lnL w="9525" cap="flat" cmpd="sng" algn="ctr">
-                      <a:solidFill>
-                        <a:srgbClr val="D8DBE0"/>
-                      </a:solidFill>
-                      <a:prstDash val="solid"/>
-                      <a:round/>
-                      <a:headEnd type="none" w="med" len="med"/>
-                      <a:tailEnd type="none" w="med" len="med"/>
-                    </a:lnL>
-                    <a:lnR w="9525" cap="flat" cmpd="sng" algn="ctr">
-                      <a:solidFill>
-                        <a:srgbClr val="D8DBE0"/>
-                      </a:solidFill>
-                      <a:prstDash val="solid"/>
-                      <a:round/>
-                      <a:headEnd type="none" w="med" len="med"/>
-                      <a:tailEnd type="none" w="med" len="med"/>
-                    </a:lnR>
-                    <a:lnT w="9525" cap="flat" cmpd="sng" algn="ctr">
-                      <a:solidFill>
-                        <a:srgbClr val="D8DBE0"/>
-                      </a:solidFill>
-                      <a:prstDash val="solid"/>
-                      <a:round/>
-                      <a:headEnd type="none" w="med" len="med"/>
-                      <a:tailEnd type="none" w="med" len="med"/>
-                    </a:lnT>
-                    <a:lnB w="9525" cap="flat" cmpd="sng" algn="ctr">
-                      <a:solidFill>
-                        <a:srgbClr val="D8DBE0"/>
-                      </a:solidFill>
-                      <a:prstDash val="solid"/>
-                      <a:round/>
-                      <a:headEnd type="none" w="med" len="med"/>
-                      <a:tailEnd type="none" w="med" len="med"/>
-                    </a:lnB>
-                    <a:solidFill>
-                      <a:srgbClr val="FFFFFF"/>
-                    </a:solidFill>
-                  </a:tcPr>
-                </a:tc>
-              </a:tr>
-              <a:tr h="420624">
-                <a:tc>
-                  <a:txBody>
-                    <a:bodyPr/>
-                    <a:lstStyle/>
-                    <a:p>
-                      <a:pPr algn="l" indent="0" marL="0">
-                        <a:buNone/>
-                      </a:pPr>
-                      <a:r>
-                        <a:rPr lang="en-US" sz="1500" dirty="0">
-                          <a:solidFill>
-                            <a:srgbClr val="1F2329"/>
-                          </a:solidFill>
-                          <a:latin typeface="微软雅黑" pitchFamily="34" charset="0"/>
-                          <a:ea typeface="微软雅黑" pitchFamily="34" charset="-122"/>
-                          <a:cs typeface="微软雅黑" pitchFamily="34" charset="-120"/>
-                        </a:rPr>
-                        <a:t>三元组变形存储</a:t>
-                      </a:r>
-                      <a:endParaRPr lang="en-US" sz="1500" dirty="0">
-                        <a:latin typeface="微软雅黑" charset="0"/>
-                        <a:ea typeface="微软雅黑" charset="0"/>
-                        <a:cs typeface="微软雅黑" charset="0"/>
-                      </a:endParaRPr>
-                    </a:p>
-                  </a:txBody>
-                  <a:tcPr marL="91440" marR="91440" marT="45720" marB="45720" anchor="ctr">
-                    <a:lnL w="9525" cap="flat" cmpd="sng" algn="ctr">
-                      <a:solidFill>
-                        <a:srgbClr val="D8DBE0"/>
-                      </a:solidFill>
-                      <a:prstDash val="solid"/>
-                      <a:round/>
-                      <a:headEnd type="none" w="med" len="med"/>
-                      <a:tailEnd type="none" w="med" len="med"/>
-                    </a:lnL>
-                    <a:lnR w="9525" cap="flat" cmpd="sng" algn="ctr">
-                      <a:solidFill>
-                        <a:srgbClr val="D8DBE0"/>
-                      </a:solidFill>
-                      <a:prstDash val="solid"/>
-                      <a:round/>
-                      <a:headEnd type="none" w="med" len="med"/>
-                      <a:tailEnd type="none" w="med" len="med"/>
-                    </a:lnR>
-                    <a:lnT w="9525" cap="flat" cmpd="sng" algn="ctr">
-                      <a:solidFill>
-                        <a:srgbClr val="D8DBE0"/>
-                      </a:solidFill>
-                      <a:prstDash val="solid"/>
-                      <a:round/>
-                      <a:headEnd type="none" w="med" len="med"/>
-                      <a:tailEnd type="none" w="med" len="med"/>
-                    </a:lnT>
-                    <a:lnB w="9525" cap="flat" cmpd="sng" algn="ctr">
-                      <a:solidFill>
-                        <a:srgbClr val="D8DBE0"/>
-                      </a:solidFill>
-                      <a:prstDash val="solid"/>
-                      <a:round/>
-                      <a:headEnd type="none" w="med" len="med"/>
-                      <a:tailEnd type="none" w="med" len="med"/>
-                    </a:lnB>
-                    <a:solidFill>
-                      <a:srgbClr val="FFFFFF"/>
-                    </a:solidFill>
-                  </a:tcPr>
-                </a:tc>
-                <a:tc>
-                  <a:txBody>
-                    <a:bodyPr/>
-                    <a:lstStyle/>
-                    <a:p>
-                      <a:pPr algn="l" indent="0" marL="0">
-                        <a:buNone/>
-                      </a:pPr>
-                      <a:r>
-                        <a:rPr lang="en-US" sz="1500" dirty="0">
-                          <a:solidFill>
-                            <a:srgbClr val="1F2329"/>
-                          </a:solidFill>
-                          <a:latin typeface="微软雅黑" pitchFamily="34" charset="0"/>
-                          <a:ea typeface="微软雅黑" pitchFamily="34" charset="-122"/>
-                          <a:cs typeface="微软雅黑" pitchFamily="34" charset="-120"/>
-                        </a:rPr>
-                        <a:t>算7</a:t>
-                      </a:r>
-                      <a:endParaRPr lang="en-US" sz="1500" dirty="0">
-                        <a:latin typeface="微软雅黑" charset="0"/>
-                        <a:ea typeface="微软雅黑" charset="0"/>
-                        <a:cs typeface="微软雅黑" charset="0"/>
-                      </a:endParaRPr>
-                    </a:p>
-                  </a:txBody>
-                  <a:tcPr marL="91440" marR="91440" marT="45720" marB="45720" anchor="ctr">
+                  <a:tcPr anchor="ctr">
                     <a:lnL w="9525" cap="flat" cmpd="sng" algn="ctr">
                       <a:solidFill>
                         <a:srgbClr val="D8DBE0"/>
@@ -10880,7 +10689,7 @@
 
 <file path=ppt/slides/slide9.xml><?xml version="1.0" encoding="utf-8"?>
 <p:sld xmlns:a="http://schemas.openxmlformats.org/drawingml/2006/main" xmlns:r="http://schemas.openxmlformats.org/officeDocument/2006/relationships" xmlns:p="http://schemas.openxmlformats.org/presentationml/2006/main">
-  <p:cSld name="Slide 9">
+  <p:cSld>
     <p:bg>
       <p:bgPr>
         <a:blipFill dpi="0" rotWithShape="1">
@@ -10924,13 +10733,12 @@
             <a:avLst/>
           </a:prstGeom>
           <a:noFill/>
-          <a:ln/>
         </p:spPr>
         <p:txBody>
           <a:bodyPr wrap="square" rtlCol="0" anchor="ctr"/>
           <a:lstStyle/>
           <a:p>
-            <a:pPr algn="r" indent="0" marL="0">
+            <a:pPr marL="0" indent="0" algn="r">
               <a:buNone/>
             </a:pPr>
             <a:r>
@@ -10938,11 +10746,11 @@
                 <a:solidFill>
                   <a:srgbClr val="8A9099"/>
                 </a:solidFill>
-                <a:latin typeface="微软雅黑" pitchFamily="34" charset="0"/>
-                <a:ea typeface="微软雅黑" pitchFamily="34" charset="-122"/>
-                <a:cs typeface="微软雅黑" pitchFamily="34" charset="-120"/>
+                <a:latin typeface="微软雅黑" panose="020B0503020204020204" pitchFamily="34" charset="-122"/>
+                <a:ea typeface="微软雅黑" panose="020B0503020204020204" pitchFamily="34" charset="-122"/>
+                <a:cs typeface="微软雅黑" panose="020B0503020204020204" pitchFamily="34" charset="-120"/>
               </a:rPr>
-              <a:t>9 / 10</a:t>
+              <a:t>7 / 10</a:t>
             </a:r>
             <a:endParaRPr lang="en-US" sz="1000" dirty="0"/>
           </a:p>
@@ -10963,13 +10771,12 @@
             <a:avLst/>
           </a:prstGeom>
           <a:noFill/>
-          <a:ln/>
         </p:spPr>
         <p:txBody>
           <a:bodyPr wrap="square" rtlCol="0" anchor="ctr"/>
           <a:lstStyle/>
           <a:p>
-            <a:pPr algn="l" indent="0" marL="0">
+            <a:pPr marL="0" indent="0" algn="l">
               <a:buNone/>
             </a:pPr>
             <a:r>
@@ -10977,11 +10784,11 @@
                 <a:solidFill>
                   <a:srgbClr val="1F4E9C"/>
                 </a:solidFill>
-                <a:latin typeface="微软雅黑" pitchFamily="34" charset="0"/>
-                <a:ea typeface="微软雅黑" pitchFamily="34" charset="-122"/>
-                <a:cs typeface="微软雅黑" pitchFamily="34" charset="-120"/>
+                <a:latin typeface="微软雅黑" panose="020B0503020204020204" pitchFamily="34" charset="-122"/>
+                <a:ea typeface="微软雅黑" panose="020B0503020204020204" pitchFamily="34" charset="-122"/>
+                <a:cs typeface="微软雅黑" panose="020B0503020204020204" pitchFamily="34" charset="-120"/>
               </a:rPr>
-              <a:t>完全不做</a:t>
+              <a:t>可做可不做</a:t>
             </a:r>
             <a:endParaRPr lang="en-US" sz="1400" dirty="0"/>
           </a:p>
@@ -11002,13 +10809,12 @@
             <a:avLst/>
           </a:prstGeom>
           <a:noFill/>
-          <a:ln/>
         </p:spPr>
         <p:txBody>
           <a:bodyPr wrap="square" rtlCol="0" anchor="ctr"/>
           <a:lstStyle/>
           <a:p>
-            <a:pPr algn="l" indent="0" marL="0">
+            <a:pPr marL="0" indent="0" algn="l">
               <a:buNone/>
             </a:pPr>
             <a:r>
@@ -11016,11 +10822,11 @@
                 <a:solidFill>
                   <a:srgbClr val="1F2329"/>
                 </a:solidFill>
-                <a:latin typeface="微软雅黑" pitchFamily="34" charset="0"/>
-                <a:ea typeface="微软雅黑" pitchFamily="34" charset="-122"/>
-                <a:cs typeface="微软雅黑" pitchFamily="34" charset="-120"/>
+                <a:latin typeface="微软雅黑" panose="020B0503020204020204" pitchFamily="34" charset="-122"/>
+                <a:ea typeface="微软雅黑" panose="020B0503020204020204" pitchFamily="34" charset="-122"/>
+                <a:cs typeface="微软雅黑" panose="020B0503020204020204" pitchFamily="34" charset="-120"/>
               </a:rPr>
-              <a:t>完全不做清单（2/2）</a:t>
+              <a:t>可做可不做清单</a:t>
             </a:r>
             <a:endParaRPr lang="en-US" sz="2800" dirty="0"/>
           </a:p>
@@ -11028,21 +10834,15 @@
       </p:sp>
       <p:graphicFrame>
         <p:nvGraphicFramePr>
-          <p:cNvPr id="10" name="Table 0"/>
+          <p:cNvPr id="8" name="Table 0"/>
           <p:cNvGraphicFramePr>
             <a:graphicFrameLocks noGrp="1"/>
           </p:cNvGraphicFramePr>
-          <p:nvPr>
-            <p:extLst>
-              <p:ext uri="{D42A27DB-BD31-4B8C-83A1-F6EECF244321}">
-                <p14:modId xmlns:p14="http://schemas.microsoft.com/office/powerpoint/2010/main" val="1579011935"/>
-              </p:ext>
-            </p:extLst>
-          </p:nvPr>
+          <p:nvPr/>
         </p:nvGraphicFramePr>
         <p:xfrm>
           <a:off x="822960" y="2395728"/>
-          <a:ext cx="10545775" cy="914400"/>
+          <a:ext cx="10545775" cy="1682496"/>
         </p:xfrm>
         <a:graphic>
           <a:graphicData uri="http://schemas.openxmlformats.org/drawingml/2006/table">
@@ -11058,7 +10858,7 @@
                     <a:bodyPr/>
                     <a:lstStyle/>
                     <a:p>
-                      <a:pPr algn="l" indent="0" marL="0">
+                      <a:pPr marL="0" indent="0" algn="l">
                         <a:buNone/>
                       </a:pPr>
                       <a:r>
@@ -11066,20 +10866,20 @@
                           <a:solidFill>
                             <a:srgbClr val="1F4E9C"/>
                           </a:solidFill>
-                          <a:latin typeface="微软雅黑" pitchFamily="34" charset="0"/>
-                          <a:ea typeface="微软雅黑" pitchFamily="34" charset="-122"/>
-                          <a:cs typeface="微软雅黑" pitchFamily="34" charset="-120"/>
+                          <a:latin typeface="微软雅黑" panose="020B0503020204020204" pitchFamily="34" charset="-122"/>
+                          <a:ea typeface="微软雅黑" panose="020B0503020204020204" pitchFamily="34" charset="-122"/>
+                          <a:cs typeface="微软雅黑" panose="020B0503020204020204" pitchFamily="34" charset="-120"/>
                         </a:rPr>
-                        <a:t>内容</a:t>
+                        <a:t>分组</a:t>
                       </a:r>
                       <a:endParaRPr lang="en-US" sz="1500" dirty="0">
-                        <a:latin typeface="微软雅黑" charset="0"/>
-                        <a:ea typeface="微软雅黑" charset="0"/>
-                        <a:cs typeface="微软雅黑" charset="0"/>
+                        <a:latin typeface="微软雅黑" panose="020B0503020204020204" pitchFamily="34" charset="-122"/>
+                        <a:ea typeface="微软雅黑" panose="020B0503020204020204" pitchFamily="34" charset="-122"/>
+                        <a:cs typeface="微软雅黑" panose="020B0503020204020204" pitchFamily="34" charset="-122"/>
                       </a:endParaRPr>
                     </a:p>
                   </a:txBody>
-                  <a:tcPr marL="91440" marR="91440" marT="45720" marB="45720" anchor="ctr">
+                  <a:tcPr anchor="ctr">
                     <a:lnL w="9525" cap="flat" cmpd="sng" algn="ctr">
                       <a:solidFill>
                         <a:srgbClr val="D8DBE0"/>
@@ -11126,7 +10926,7 @@
                     <a:bodyPr/>
                     <a:lstStyle/>
                     <a:p>
-                      <a:pPr algn="l" indent="0" marL="0">
+                      <a:pPr marL="0" indent="0" algn="l">
                         <a:buNone/>
                       </a:pPr>
                       <a:r>
@@ -11134,20 +10934,20 @@
                           <a:solidFill>
                             <a:srgbClr val="1F4E9C"/>
                           </a:solidFill>
-                          <a:latin typeface="微软雅黑" pitchFamily="34" charset="0"/>
-                          <a:ea typeface="微软雅黑" pitchFamily="34" charset="-122"/>
-                          <a:cs typeface="微软雅黑" pitchFamily="34" charset="-120"/>
+                          <a:latin typeface="微软雅黑" panose="020B0503020204020204" pitchFamily="34" charset="-122"/>
+                          <a:ea typeface="微软雅黑" panose="020B0503020204020204" pitchFamily="34" charset="-122"/>
+                          <a:cs typeface="微软雅黑" panose="020B0503020204020204" pitchFamily="34" charset="-120"/>
                         </a:rPr>
                         <a:t>题号</a:t>
                       </a:r>
                       <a:endParaRPr lang="en-US" sz="1500" dirty="0">
-                        <a:latin typeface="微软雅黑" charset="0"/>
-                        <a:ea typeface="微软雅黑" charset="0"/>
-                        <a:cs typeface="微软雅黑" charset="0"/>
+                        <a:latin typeface="微软雅黑" panose="020B0503020204020204" pitchFamily="34" charset="-122"/>
+                        <a:ea typeface="微软雅黑" panose="020B0503020204020204" pitchFamily="34" charset="-122"/>
+                        <a:cs typeface="微软雅黑" panose="020B0503020204020204" pitchFamily="34" charset="-122"/>
                       </a:endParaRPr>
                     </a:p>
                   </a:txBody>
-                  <a:tcPr marL="91440" marR="91440" marT="45720" marB="45720" anchor="ctr">
+                  <a:tcPr anchor="ctr">
                     <a:lnL w="9525" cap="flat" cmpd="sng" algn="ctr">
                       <a:solidFill>
                         <a:srgbClr val="D8DBE0"/>
@@ -11196,7 +10996,7 @@
                     <a:bodyPr/>
                     <a:lstStyle/>
                     <a:p>
-                      <a:pPr algn="l" indent="0" marL="0">
+                      <a:pPr marL="0" indent="0" algn="l">
                         <a:buNone/>
                       </a:pPr>
                       <a:r>
@@ -11204,20 +11004,20 @@
                           <a:solidFill>
                             <a:srgbClr val="1F2329"/>
                           </a:solidFill>
-                          <a:latin typeface="微软雅黑" pitchFamily="34" charset="0"/>
-                          <a:ea typeface="微软雅黑" pitchFamily="34" charset="-122"/>
-                          <a:cs typeface="微软雅黑" pitchFamily="34" charset="-120"/>
+                          <a:latin typeface="微软雅黑" panose="020B0503020204020204" pitchFamily="34" charset="-122"/>
+                          <a:ea typeface="微软雅黑" panose="020B0503020204020204" pitchFamily="34" charset="-122"/>
+                          <a:cs typeface="微软雅黑" panose="020B0503020204020204" pitchFamily="34" charset="-120"/>
                         </a:rPr>
-                        <a:t>三元组变形存储</a:t>
+                        <a:t>选择题：数组与特殊矩阵概念（行列优先、三角/…</a:t>
                       </a:r>
                       <a:endParaRPr lang="en-US" sz="1500" dirty="0">
-                        <a:latin typeface="微软雅黑" charset="0"/>
-                        <a:ea typeface="微软雅黑" charset="0"/>
-                        <a:cs typeface="微软雅黑" charset="0"/>
+                        <a:latin typeface="微软雅黑" panose="020B0503020204020204" pitchFamily="34" charset="-122"/>
+                        <a:ea typeface="微软雅黑" panose="020B0503020204020204" pitchFamily="34" charset="-122"/>
+                        <a:cs typeface="微软雅黑" panose="020B0503020204020204" pitchFamily="34" charset="-122"/>
                       </a:endParaRPr>
                     </a:p>
                   </a:txBody>
-                  <a:tcPr marL="91440" marR="91440" marT="45720" marB="45720" anchor="ctr">
+                  <a:tcPr anchor="ctr">
                     <a:lnL w="9525" cap="flat" cmpd="sng" algn="ctr">
                       <a:solidFill>
                         <a:srgbClr val="D8DBE0"/>
@@ -11264,7 +11064,7 @@
                     <a:bodyPr/>
                     <a:lstStyle/>
                     <a:p>
-                      <a:pPr algn="l" indent="0" marL="0">
+                      <a:pPr marL="0" indent="0" algn="l">
                         <a:buNone/>
                       </a:pPr>
                       <a:r>
@@ -11272,20 +11072,20 @@
                           <a:solidFill>
                             <a:srgbClr val="1F2329"/>
                           </a:solidFill>
-                          <a:latin typeface="微软雅黑" pitchFamily="34" charset="0"/>
-                          <a:ea typeface="微软雅黑" pitchFamily="34" charset="-122"/>
-                          <a:cs typeface="微软雅黑" pitchFamily="34" charset="-120"/>
+                          <a:latin typeface="微软雅黑" panose="020B0503020204020204" pitchFamily="34" charset="-122"/>
+                          <a:ea typeface="微软雅黑" panose="020B0503020204020204" pitchFamily="34" charset="-122"/>
+                          <a:cs typeface="微软雅黑" panose="020B0503020204020204" pitchFamily="34" charset="-120"/>
                         </a:rPr>
-                        <a:t>算8</a:t>
+                        <a:t>选1、8—14</a:t>
                       </a:r>
                       <a:endParaRPr lang="en-US" sz="1500" dirty="0">
-                        <a:latin typeface="微软雅黑" charset="0"/>
-                        <a:ea typeface="微软雅黑" charset="0"/>
-                        <a:cs typeface="微软雅黑" charset="0"/>
+                        <a:latin typeface="微软雅黑" panose="020B0503020204020204" pitchFamily="34" charset="-122"/>
+                        <a:ea typeface="微软雅黑" panose="020B0503020204020204" pitchFamily="34" charset="-122"/>
+                        <a:cs typeface="微软雅黑" panose="020B0503020204020204" pitchFamily="34" charset="-122"/>
                       </a:endParaRPr>
                     </a:p>
                   </a:txBody>
-                  <a:tcPr marL="91440" marR="91440" marT="45720" marB="45720" anchor="ctr">
+                  <a:tcPr anchor="ctr">
                     <a:lnL w="9525" cap="flat" cmpd="sng" algn="ctr">
                       <a:solidFill>
                         <a:srgbClr val="D8DBE0"/>
@@ -11334,7 +11134,7 @@
                     <a:bodyPr/>
                     <a:lstStyle/>
                     <a:p>
-                      <a:pPr algn="l" indent="0" marL="0">
+                      <a:pPr marL="0" indent="0" algn="l">
                         <a:buNone/>
                       </a:pPr>
                       <a:r>
@@ -11342,20 +11142,20 @@
                           <a:solidFill>
                             <a:srgbClr val="1F2329"/>
                           </a:solidFill>
-                          <a:latin typeface="微软雅黑" pitchFamily="34" charset="0"/>
-                          <a:ea typeface="微软雅黑" pitchFamily="34" charset="-122"/>
-                          <a:cs typeface="微软雅黑" pitchFamily="34" charset="-120"/>
+                          <a:latin typeface="微软雅黑" panose="020B0503020204020204" pitchFamily="34" charset="-122"/>
+                          <a:ea typeface="微软雅黑" panose="020B0503020204020204" pitchFamily="34" charset="-122"/>
+                          <a:cs typeface="微软雅黑" panose="020B0503020204020204" pitchFamily="34" charset="-120"/>
                         </a:rPr>
-                        <a:t>十字链表与邻接多重表</a:t>
+                        <a:t>解答题：压缩存储公式推导与稀疏矩阵/广义表存…</a:t>
                       </a:r>
                       <a:endParaRPr lang="en-US" sz="1500" dirty="0">
-                        <a:latin typeface="微软雅黑" charset="0"/>
-                        <a:ea typeface="微软雅黑" charset="0"/>
-                        <a:cs typeface="微软雅黑" charset="0"/>
+                        <a:latin typeface="微软雅黑" panose="020B0503020204020204" pitchFamily="34" charset="-122"/>
+                        <a:ea typeface="微软雅黑" panose="020B0503020204020204" pitchFamily="34" charset="-122"/>
+                        <a:cs typeface="微软雅黑" panose="020B0503020204020204" pitchFamily="34" charset="-122"/>
                       </a:endParaRPr>
                     </a:p>
                   </a:txBody>
-                  <a:tcPr marL="91440" marR="91440" marT="45720" marB="45720" anchor="ctr">
+                  <a:tcPr anchor="ctr">
                     <a:lnL w="9525" cap="flat" cmpd="sng" algn="ctr">
                       <a:solidFill>
                         <a:srgbClr val="D8DBE0"/>
@@ -11402,7 +11202,7 @@
                     <a:bodyPr/>
                     <a:lstStyle/>
                     <a:p>
-                      <a:pPr algn="l" indent="0" marL="0">
+                      <a:pPr marL="0" indent="0" algn="l">
                         <a:buNone/>
                       </a:pPr>
                       <a:r>
@@ -11410,20 +11210,20 @@
                           <a:solidFill>
                             <a:srgbClr val="1F2329"/>
                           </a:solidFill>
-                          <a:latin typeface="微软雅黑" pitchFamily="34" charset="0"/>
-                          <a:ea typeface="微软雅黑" pitchFamily="34" charset="-122"/>
-                          <a:cs typeface="微软雅黑" pitchFamily="34" charset="-120"/>
+                          <a:latin typeface="微软雅黑" panose="020B0503020204020204" pitchFamily="34" charset="-122"/>
+                          <a:ea typeface="微软雅黑" panose="020B0503020204020204" pitchFamily="34" charset="-122"/>
+                          <a:cs typeface="微软雅黑" panose="020B0503020204020204" pitchFamily="34" charset="-120"/>
                         </a:rPr>
-                        <a:t>算9、10</a:t>
+                        <a:t>答4—12、15—18、22</a:t>
                       </a:r>
                       <a:endParaRPr lang="en-US" sz="1500" dirty="0">
-                        <a:latin typeface="微软雅黑" charset="0"/>
-                        <a:ea typeface="微软雅黑" charset="0"/>
-                        <a:cs typeface="微软雅黑" charset="0"/>
+                        <a:latin typeface="微软雅黑" panose="020B0503020204020204" pitchFamily="34" charset="-122"/>
+                        <a:ea typeface="微软雅黑" panose="020B0503020204020204" pitchFamily="34" charset="-122"/>
+                        <a:cs typeface="微软雅黑" panose="020B0503020204020204" pitchFamily="34" charset="-122"/>
                       </a:endParaRPr>
                     </a:p>
                   </a:txBody>
-                  <a:tcPr marL="91440" marR="91440" marT="45720" marB="45720" anchor="ctr">
+                  <a:tcPr anchor="ctr">
                     <a:lnL w="9525" cap="flat" cmpd="sng" algn="ctr">
                       <a:solidFill>
                         <a:srgbClr val="D8DBE0"/>
@@ -11472,7 +11272,7 @@
                     <a:bodyPr/>
                     <a:lstStyle/>
                     <a:p>
-                      <a:pPr algn="l" indent="0" marL="0">
+                      <a:pPr marL="0" indent="0" algn="l">
                         <a:buNone/>
                       </a:pPr>
                       <a:r>
@@ -11480,20 +11280,20 @@
                           <a:solidFill>
                             <a:srgbClr val="1F2329"/>
                           </a:solidFill>
-                          <a:latin typeface="微软雅黑" pitchFamily="34" charset="0"/>
-                          <a:ea typeface="微软雅黑" pitchFamily="34" charset="-122"/>
-                          <a:cs typeface="微软雅黑" pitchFamily="34" charset="-120"/>
+                          <a:latin typeface="微软雅黑" panose="020B0503020204020204" pitchFamily="34" charset="-122"/>
+                          <a:ea typeface="微软雅黑" panose="020B0503020204020204" pitchFamily="34" charset="-122"/>
+                          <a:cs typeface="微软雅黑" panose="020B0503020204020204" pitchFamily="34" charset="-120"/>
                         </a:rPr>
-                        <a:t>广义表代码实现</a:t>
+                        <a:t>算法设计题：数组与稀疏矩阵域内巩固（马鞍点、…</a:t>
                       </a:r>
                       <a:endParaRPr lang="en-US" sz="1500" dirty="0">
-                        <a:latin typeface="微软雅黑" charset="0"/>
-                        <a:ea typeface="微软雅黑" charset="0"/>
-                        <a:cs typeface="微软雅黑" charset="0"/>
+                        <a:latin typeface="微软雅黑" panose="020B0503020204020204" pitchFamily="34" charset="-122"/>
+                        <a:ea typeface="微软雅黑" panose="020B0503020204020204" pitchFamily="34" charset="-122"/>
+                        <a:cs typeface="微软雅黑" panose="020B0503020204020204" pitchFamily="34" charset="-122"/>
                       </a:endParaRPr>
                     </a:p>
                   </a:txBody>
-                  <a:tcPr marL="91440" marR="91440" marT="45720" marB="45720" anchor="ctr">
+                  <a:tcPr anchor="ctr">
                     <a:lnL w="9525" cap="flat" cmpd="sng" algn="ctr">
                       <a:solidFill>
                         <a:srgbClr val="D8DBE0"/>
@@ -11540,7 +11340,7 @@
                     <a:bodyPr/>
                     <a:lstStyle/>
                     <a:p>
-                      <a:pPr algn="l" indent="0" marL="0">
+                      <a:pPr marL="0" indent="0" algn="l">
                         <a:buNone/>
                       </a:pPr>
                       <a:r>
@@ -11548,20 +11348,20 @@
                           <a:solidFill>
                             <a:srgbClr val="1F2329"/>
                           </a:solidFill>
-                          <a:latin typeface="微软雅黑" pitchFamily="34" charset="0"/>
-                          <a:ea typeface="微软雅黑" pitchFamily="34" charset="-122"/>
-                          <a:cs typeface="微软雅黑" pitchFamily="34" charset="-120"/>
+                          <a:latin typeface="微软雅黑" panose="020B0503020204020204" pitchFamily="34" charset="-122"/>
+                          <a:ea typeface="微软雅黑" panose="020B0503020204020204" pitchFamily="34" charset="-122"/>
+                          <a:cs typeface="微软雅黑" panose="020B0503020204020204" pitchFamily="34" charset="-120"/>
                         </a:rPr>
-                        <a:t>算13—22</a:t>
+                        <a:t>算2、4、5</a:t>
                       </a:r>
                       <a:endParaRPr lang="en-US" sz="1500" dirty="0">
-                        <a:latin typeface="微软雅黑" charset="0"/>
-                        <a:ea typeface="微软雅黑" charset="0"/>
-                        <a:cs typeface="微软雅黑" charset="0"/>
+                        <a:latin typeface="微软雅黑" panose="020B0503020204020204" pitchFamily="34" charset="-122"/>
+                        <a:ea typeface="微软雅黑" panose="020B0503020204020204" pitchFamily="34" charset="-122"/>
+                        <a:cs typeface="微软雅黑" panose="020B0503020204020204" pitchFamily="34" charset="-122"/>
                       </a:endParaRPr>
                     </a:p>
                   </a:txBody>
-                  <a:tcPr marL="91440" marR="91440" marT="45720" marB="45720" anchor="ctr">
+                  <a:tcPr anchor="ctr">
                     <a:lnL w="9525" cap="flat" cmpd="sng" algn="ctr">
                       <a:solidFill>
                         <a:srgbClr val="D8DBE0"/>
@@ -11659,7 +11459,7 @@
     </a:clrScheme>
     <a:fontScheme name="Office">
       <a:majorFont>
-        <a:latin typeface="Calibri Light" panose="020F0302020204030204"/>
+        <a:latin typeface="Calibri Light"/>
         <a:ea typeface=""/>
         <a:cs typeface=""/>
         <a:font script="Jpan" typeface="游ゴシック Light"/>
@@ -11692,26 +11492,9 @@
         <a:font script="Viet" typeface="Times New Roman"/>
         <a:font script="Uigh" typeface="Microsoft Uighur"/>
         <a:font script="Geor" typeface="Sylfaen"/>
-        <a:font script="Armn" typeface="Arial"/>
-        <a:font script="Bugi" typeface="Leelawadee UI"/>
-        <a:font script="Bopo" typeface="Microsoft JhengHei"/>
-        <a:font script="Java" typeface="Javanese Text"/>
-        <a:font script="Lisu" typeface="Segoe UI"/>
-        <a:font script="Mymr" typeface="Myanmar Text"/>
-        <a:font script="Nkoo" typeface="Ebrima"/>
-        <a:font script="Olck" typeface="Nirmala UI"/>
-        <a:font script="Osma" typeface="Ebrima"/>
-        <a:font script="Phag" typeface="Phagspa"/>
-        <a:font script="Syrn" typeface="Estrangelo Edessa"/>
-        <a:font script="Syrj" typeface="Estrangelo Edessa"/>
-        <a:font script="Syre" typeface="Estrangelo Edessa"/>
-        <a:font script="Sora" typeface="Nirmala UI"/>
-        <a:font script="Tale" typeface="Microsoft Tai Le"/>
-        <a:font script="Talu" typeface="Microsoft New Tai Lue"/>
-        <a:font script="Tfng" typeface="Ebrima"/>
       </a:majorFont>
       <a:minorFont>
-        <a:latin typeface="Calibri" panose="020F0502020204030204"/>
+        <a:latin typeface="Calibri"/>
         <a:ea typeface=""/>
         <a:cs typeface=""/>
         <a:font script="Jpan" typeface="游ゴシック"/>
@@ -11744,23 +11527,6 @@
         <a:font script="Viet" typeface="Arial"/>
         <a:font script="Uigh" typeface="Microsoft Uighur"/>
         <a:font script="Geor" typeface="Sylfaen"/>
-        <a:font script="Armn" typeface="Arial"/>
-        <a:font script="Bugi" typeface="Leelawadee UI"/>
-        <a:font script="Bopo" typeface="Microsoft JhengHei"/>
-        <a:font script="Java" typeface="Javanese Text"/>
-        <a:font script="Lisu" typeface="Segoe UI"/>
-        <a:font script="Mymr" typeface="Myanmar Text"/>
-        <a:font script="Nkoo" typeface="Ebrima"/>
-        <a:font script="Olck" typeface="Nirmala UI"/>
-        <a:font script="Osma" typeface="Ebrima"/>
-        <a:font script="Phag" typeface="Phagspa"/>
-        <a:font script="Syrn" typeface="Estrangelo Edessa"/>
-        <a:font script="Syrj" typeface="Estrangelo Edessa"/>
-        <a:font script="Syre" typeface="Estrangelo Edessa"/>
-        <a:font script="Sora" typeface="Nirmala UI"/>
-        <a:font script="Tale" typeface="Microsoft Tai Le"/>
-        <a:font script="Talu" typeface="Microsoft New Tai Lue"/>
-        <a:font script="Tfng" typeface="Ebrima"/>
       </a:minorFont>
     </a:fontScheme>
     <a:fmtScheme name="Office">
@@ -11901,8 +11667,265 @@
       </a:bgFillStyleLst>
     </a:fmtScheme>
   </a:themeElements>
-  <a:objectDefaults/>
-  <a:extraClrSchemeLst/>
+  <a:extLst>
+    <a:ext uri="{05A4C25C-085E-4340-85A3-A5531E510DB2}">
+      <thm15:themeFamily xmlns:thm15="http://schemas.microsoft.com/office/thememl/2012/main" name="Office Theme" id="{62F939B6-93AF-4DB8-9C6B-D6C7DFDC589F}" vid="{4A3C46E8-61CC-4603-A589-7422A47A8E4A}"/>
+    </a:ext>
+  </a:extLst>
+</a:theme>
+</file>
+
+<file path=ppt/theme/theme2.xml><?xml version="1.0" encoding="utf-8"?>
+<a:theme xmlns:a="http://schemas.openxmlformats.org/drawingml/2006/main" name="Office Theme">
+  <a:themeElements>
+    <a:clrScheme name="Office">
+      <a:dk1>
+        <a:sysClr val="windowText" lastClr="000000"/>
+      </a:dk1>
+      <a:lt1>
+        <a:sysClr val="window" lastClr="FFFFFF"/>
+      </a:lt1>
+      <a:dk2>
+        <a:srgbClr val="44546A"/>
+      </a:dk2>
+      <a:lt2>
+        <a:srgbClr val="E7E6E6"/>
+      </a:lt2>
+      <a:accent1>
+        <a:srgbClr val="4472C4"/>
+      </a:accent1>
+      <a:accent2>
+        <a:srgbClr val="ED7D31"/>
+      </a:accent2>
+      <a:accent3>
+        <a:srgbClr val="A5A5A5"/>
+      </a:accent3>
+      <a:accent4>
+        <a:srgbClr val="FFC000"/>
+      </a:accent4>
+      <a:accent5>
+        <a:srgbClr val="5B9BD5"/>
+      </a:accent5>
+      <a:accent6>
+        <a:srgbClr val="70AD47"/>
+      </a:accent6>
+      <a:hlink>
+        <a:srgbClr val="0563C1"/>
+      </a:hlink>
+      <a:folHlink>
+        <a:srgbClr val="954F72"/>
+      </a:folHlink>
+    </a:clrScheme>
+    <a:fontScheme name="Office">
+      <a:majorFont>
+        <a:latin typeface="Calibri Light"/>
+        <a:ea typeface=""/>
+        <a:cs typeface=""/>
+        <a:font script="Jpan" typeface="游ゴシック Light"/>
+        <a:font script="Hang" typeface="맑은 고딕"/>
+        <a:font script="Hans" typeface="等线 Light"/>
+        <a:font script="Hant" typeface="新細明體"/>
+        <a:font script="Arab" typeface="Times New Roman"/>
+        <a:font script="Hebr" typeface="Times New Roman"/>
+        <a:font script="Thai" typeface="Angsana New"/>
+        <a:font script="Ethi" typeface="Nyala"/>
+        <a:font script="Beng" typeface="Vrinda"/>
+        <a:font script="Gujr" typeface="Shruti"/>
+        <a:font script="Khmr" typeface="MoolBoran"/>
+        <a:font script="Knda" typeface="Tunga"/>
+        <a:font script="Guru" typeface="Raavi"/>
+        <a:font script="Cans" typeface="Euphemia"/>
+        <a:font script="Cher" typeface="Plantagenet Cherokee"/>
+        <a:font script="Yiii" typeface="Microsoft Yi Baiti"/>
+        <a:font script="Tibt" typeface="Microsoft Himalaya"/>
+        <a:font script="Thaa" typeface="MV Boli"/>
+        <a:font script="Deva" typeface="Mangal"/>
+        <a:font script="Telu" typeface="Gautami"/>
+        <a:font script="Taml" typeface="Latha"/>
+        <a:font script="Syrc" typeface="Estrangelo Edessa"/>
+        <a:font script="Orya" typeface="Kalinga"/>
+        <a:font script="Mlym" typeface="Kartika"/>
+        <a:font script="Laoo" typeface="DokChampa"/>
+        <a:font script="Sinh" typeface="Iskoola Pota"/>
+        <a:font script="Mong" typeface="Mongolian Baiti"/>
+        <a:font script="Viet" typeface="Times New Roman"/>
+        <a:font script="Uigh" typeface="Microsoft Uighur"/>
+        <a:font script="Geor" typeface="Sylfaen"/>
+      </a:majorFont>
+      <a:minorFont>
+        <a:latin typeface="Calibri"/>
+        <a:ea typeface=""/>
+        <a:cs typeface=""/>
+        <a:font script="Jpan" typeface="游ゴシック"/>
+        <a:font script="Hang" typeface="맑은 고딕"/>
+        <a:font script="Hans" typeface="等线"/>
+        <a:font script="Hant" typeface="新細明體"/>
+        <a:font script="Arab" typeface="Arial"/>
+        <a:font script="Hebr" typeface="Arial"/>
+        <a:font script="Thai" typeface="Cordia New"/>
+        <a:font script="Ethi" typeface="Nyala"/>
+        <a:font script="Beng" typeface="Vrinda"/>
+        <a:font script="Gujr" typeface="Shruti"/>
+        <a:font script="Khmr" typeface="DaunPenh"/>
+        <a:font script="Knda" typeface="Tunga"/>
+        <a:font script="Guru" typeface="Raavi"/>
+        <a:font script="Cans" typeface="Euphemia"/>
+        <a:font script="Cher" typeface="Plantagenet Cherokee"/>
+        <a:font script="Yiii" typeface="Microsoft Yi Baiti"/>
+        <a:font script="Tibt" typeface="Microsoft Himalaya"/>
+        <a:font script="Thaa" typeface="MV Boli"/>
+        <a:font script="Deva" typeface="Mangal"/>
+        <a:font script="Telu" typeface="Gautami"/>
+        <a:font script="Taml" typeface="Latha"/>
+        <a:font script="Syrc" typeface="Estrangelo Edessa"/>
+        <a:font script="Orya" typeface="Kalinga"/>
+        <a:font script="Mlym" typeface="Kartika"/>
+        <a:font script="Laoo" typeface="DokChampa"/>
+        <a:font script="Sinh" typeface="Iskoola Pota"/>
+        <a:font script="Mong" typeface="Mongolian Baiti"/>
+        <a:font script="Viet" typeface="Arial"/>
+        <a:font script="Uigh" typeface="Microsoft Uighur"/>
+        <a:font script="Geor" typeface="Sylfaen"/>
+      </a:minorFont>
+    </a:fontScheme>
+    <a:fmtScheme name="Office">
+      <a:fillStyleLst>
+        <a:solidFill>
+          <a:schemeClr val="phClr"/>
+        </a:solidFill>
+        <a:gradFill rotWithShape="1">
+          <a:gsLst>
+            <a:gs pos="0">
+              <a:schemeClr val="phClr">
+                <a:lumMod val="110000"/>
+                <a:satMod val="105000"/>
+                <a:tint val="67000"/>
+              </a:schemeClr>
+            </a:gs>
+            <a:gs pos="50000">
+              <a:schemeClr val="phClr">
+                <a:lumMod val="105000"/>
+                <a:satMod val="103000"/>
+                <a:tint val="73000"/>
+              </a:schemeClr>
+            </a:gs>
+            <a:gs pos="100000">
+              <a:schemeClr val="phClr">
+                <a:lumMod val="105000"/>
+                <a:satMod val="109000"/>
+                <a:tint val="81000"/>
+              </a:schemeClr>
+            </a:gs>
+          </a:gsLst>
+          <a:lin ang="5400000" scaled="0"/>
+        </a:gradFill>
+        <a:gradFill rotWithShape="1">
+          <a:gsLst>
+            <a:gs pos="0">
+              <a:schemeClr val="phClr">
+                <a:satMod val="103000"/>
+                <a:lumMod val="102000"/>
+                <a:tint val="94000"/>
+              </a:schemeClr>
+            </a:gs>
+            <a:gs pos="50000">
+              <a:schemeClr val="phClr">
+                <a:satMod val="110000"/>
+                <a:lumMod val="100000"/>
+                <a:shade val="100000"/>
+              </a:schemeClr>
+            </a:gs>
+            <a:gs pos="100000">
+              <a:schemeClr val="phClr">
+                <a:lumMod val="99000"/>
+                <a:satMod val="120000"/>
+                <a:shade val="78000"/>
+              </a:schemeClr>
+            </a:gs>
+          </a:gsLst>
+          <a:lin ang="5400000" scaled="0"/>
+        </a:gradFill>
+      </a:fillStyleLst>
+      <a:lnStyleLst>
+        <a:ln w="6350" cap="flat" cmpd="sng" algn="ctr">
+          <a:solidFill>
+            <a:schemeClr val="phClr"/>
+          </a:solidFill>
+          <a:prstDash val="solid"/>
+          <a:miter lim="800000"/>
+        </a:ln>
+        <a:ln w="12700" cap="flat" cmpd="sng" algn="ctr">
+          <a:solidFill>
+            <a:schemeClr val="phClr"/>
+          </a:solidFill>
+          <a:prstDash val="solid"/>
+          <a:miter lim="800000"/>
+        </a:ln>
+        <a:ln w="19050" cap="flat" cmpd="sng" algn="ctr">
+          <a:solidFill>
+            <a:schemeClr val="phClr"/>
+          </a:solidFill>
+          <a:prstDash val="solid"/>
+          <a:miter lim="800000"/>
+        </a:ln>
+      </a:lnStyleLst>
+      <a:effectStyleLst>
+        <a:effectStyle>
+          <a:effectLst/>
+        </a:effectStyle>
+        <a:effectStyle>
+          <a:effectLst/>
+        </a:effectStyle>
+        <a:effectStyle>
+          <a:effectLst>
+            <a:outerShdw blurRad="57150" dist="19050" dir="5400000" algn="ctr" rotWithShape="0">
+              <a:srgbClr val="000000">
+                <a:alpha val="63000"/>
+              </a:srgbClr>
+            </a:outerShdw>
+          </a:effectLst>
+        </a:effectStyle>
+      </a:effectStyleLst>
+      <a:bgFillStyleLst>
+        <a:solidFill>
+          <a:schemeClr val="phClr"/>
+        </a:solidFill>
+        <a:solidFill>
+          <a:schemeClr val="phClr">
+            <a:tint val="95000"/>
+            <a:satMod val="170000"/>
+          </a:schemeClr>
+        </a:solidFill>
+        <a:gradFill rotWithShape="1">
+          <a:gsLst>
+            <a:gs pos="0">
+              <a:schemeClr val="phClr">
+                <a:tint val="93000"/>
+                <a:satMod val="150000"/>
+                <a:shade val="98000"/>
+                <a:lumMod val="102000"/>
+              </a:schemeClr>
+            </a:gs>
+            <a:gs pos="50000">
+              <a:schemeClr val="phClr">
+                <a:tint val="98000"/>
+                <a:satMod val="130000"/>
+                <a:shade val="90000"/>
+                <a:lumMod val="103000"/>
+              </a:schemeClr>
+            </a:gs>
+            <a:gs pos="100000">
+              <a:schemeClr val="phClr">
+                <a:shade val="63000"/>
+                <a:satMod val="120000"/>
+              </a:schemeClr>
+            </a:gs>
+          </a:gsLst>
+          <a:lin ang="5400000" scaled="0"/>
+        </a:gradFill>
+      </a:bgFillStyleLst>
+    </a:fmtScheme>
+  </a:themeElements>
   <a:extLst>
     <a:ext uri="{05A4C25C-085E-4340-85A3-A5531E510DB2}">
       <thm15:themeFamily xmlns:thm15="http://schemas.microsoft.com/office/thememl/2012/main" name="Office Theme" id="{62F939B6-93AF-4DB8-9C6B-D6C7DFDC589F}" vid="{4A3C46E8-61CC-4603-A589-7422A47A8E4A}"/>
